--- a/docs/evidencegate-deck.pptx
+++ b/docs/evidencegate-deck.pptx
@@ -3295,7 +3295,7 @@
                 </a:solidFill>
                 <a:latin typeface="Inter"/>
               </a:rPr>
-              <a:t>Fé pública programável para a economia de agentes.</a:t>
+              <a:t>O radar antifraude da economia de agentes.</a:t>
             </a:r>
           </a:p>
         </p:txBody>
@@ -3378,7 +3378,7 @@
                 </a:solidFill>
                 <a:latin typeface="Inter"/>
               </a:rPr>
-              <a:t>Quando agentes pagam agentes, quem confere o trabalho?</a:t>
+              <a:t>Quando agentes pagam agentes, quem barra o golpe?</a:t>
             </a:r>
           </a:p>
         </p:txBody>
@@ -3573,7 +3573,7 @@
                 </a:solidFill>
                 <a:latin typeface="Inter"/>
               </a:rPr>
-              <a:t>Ninguém confere o trabalho.</a:t>
+              <a:t>Ninguém barra a fraude.</a:t>
             </a:r>
           </a:p>
         </p:txBody>
@@ -3734,7 +3734,7 @@
                 </a:solidFill>
                 <a:latin typeface="Inter"/>
               </a:rPr>
-              <a:t>O trilho existe — o controle de qualidade, não.</a:t>
+              <a:t>O trilho existe — o antifraude, não.</a:t>
             </a:r>
           </a:p>
         </p:txBody>
@@ -5521,7 +5521,7 @@
                 </a:solidFill>
                 <a:latin typeface="Inter"/>
               </a:rPr>
-              <a:t>6 escrows</a:t>
+              <a:t>49 decisões</a:t>
             </a:r>
           </a:p>
         </p:txBody>
@@ -5560,7 +5560,7 @@
                 </a:solidFill>
                 <a:latin typeface="Inter"/>
               </a:rPr>
-              <a:t>liquidados com juízes reais</a:t>
+              <a:t>autônomas · 0 intervenções humanas</a:t>
             </a:r>
           </a:p>
         </p:txBody>
@@ -6078,7 +6078,7 @@
                 </a:solidFill>
                 <a:latin typeface="Inter"/>
               </a:rPr>
-              <a:t>RASTREABILIDADE &amp; CONFIANÇA</a:t>
+              <a:t>THREAT INTELLIGENCE</a:t>
             </a:r>
           </a:p>
         </p:txBody>
@@ -6180,7 +6180,7 @@
                 </a:solidFill>
                 <a:latin typeface="Inter"/>
               </a:rPr>
-              <a:t>Grafo de proveniência</a:t>
+              <a:t>Grafo de ameaças</a:t>
             </a:r>
           </a:p>
         </p:txBody>
@@ -7409,7 +7409,7 @@
                 </a:solidFill>
                 <a:latin typeface="Inter"/>
               </a:rPr>
-              <a:t>Os trilhos estão prontos. A camada de confiança, não.</a:t>
+              <a:t>Os trilhos estão prontos. O antifraude, não.</a:t>
             </a:r>
           </a:p>
         </p:txBody>
@@ -7705,7 +7705,7 @@
                 </a:solidFill>
                 <a:latin typeface="Inter"/>
               </a:rPr>
-              <a:t>Registry de reputação: cada escrow settled melhora o score de todos. Dados de confiança que ninguém constrói sozinho — rede, não feature.</a:t>
+              <a:t>Rede antifraude: cada golpe barrado num cliente protege todos. É o Stripe Radar dos agentes — dados que ninguém constrói sozinho. Rede, não feature.</a:t>
             </a:r>
           </a:p>
         </p:txBody>
@@ -8215,7 +8215,7 @@
                 </a:solidFill>
                 <a:latin typeface="Inter"/>
               </a:rPr>
-              <a:t>EvidenceGate — fé pública programável.</a:t>
+              <a:t>EvidenceGate — o radar antifraude dos agentes.</a:t>
             </a:r>
           </a:p>
         </p:txBody>

--- a/docs/evidencegate-deck.pptx
+++ b/docs/evidencegate-deck.pptx
@@ -5,16 +5,16 @@
     <p:sldMasterId id="2147483648" r:id="rId1"/>
   </p:sldMasterIdLst>
   <p:sldIdLst>
-    <p:sldId id="256" r:id="rId7"/>
-    <p:sldId id="257" r:id="rId8"/>
-    <p:sldId id="258" r:id="rId9"/>
-    <p:sldId id="259" r:id="rId10"/>
-    <p:sldId id="260" r:id="rId11"/>
-    <p:sldId id="261" r:id="rId12"/>
-    <p:sldId id="262" r:id="rId13"/>
-    <p:sldId id="263" r:id="rId14"/>
+    <p:sldId id="256" r:id="rId2"/>
+    <p:sldId id="257" r:id="rId3"/>
+    <p:sldId id="258" r:id="rId4"/>
+    <p:sldId id="259" r:id="rId5"/>
+    <p:sldId id="260" r:id="rId6"/>
+    <p:sldId id="261" r:id="rId7"/>
+    <p:sldId id="262" r:id="rId8"/>
+    <p:sldId id="263" r:id="rId9"/>
   </p:sldIdLst>
-  <p:sldSz cx="12191695" cy="6858000" type="screen4x3"/>
+  <p:sldSz cx="12192000" cy="6858000"/>
   <p:notesSz cx="6858000" cy="9144000"/>
   <p:defaultTextStyle>
     <a:defPPr>
@@ -111,7 +111,31 @@
       </a:defRPr>
     </a:lvl9pPr>
   </p:defaultTextStyle>
+  <p:extLst>
+    <p:ext uri="{EFAFB233-063F-42B5-8137-9DF3F51BA10A}">
+      <p15:sldGuideLst xmlns:p15="http://schemas.microsoft.com/office/powerpoint/2012/main">
+        <p15:guide id="1" orient="horz" pos="2160">
+          <p15:clr>
+            <a:srgbClr val="A4A3A4"/>
+          </p15:clr>
+        </p15:guide>
+        <p15:guide id="2" pos="2880">
+          <p15:clr>
+            <a:srgbClr val="A4A3A4"/>
+          </p15:clr>
+        </p15:guide>
+      </p15:sldGuideLst>
+    </p:ext>
+  </p:extLst>
 </p:presentation>
+</file>
+
+<file path=ppt/revisionInfo.xml><?xml version="1.0" encoding="utf-8"?>
+<p1510:revInfo xmlns:a="http://schemas.openxmlformats.org/drawingml/2006/main" xmlns:r="http://schemas.openxmlformats.org/officeDocument/2006/relationships" xmlns:p1510="http://schemas.microsoft.com/office/powerpoint/2015/10/main">
+  <p1510:revLst>
+    <p1510:client id="{00000000-0000-0000-0000-000000000000}" v="938" dt="2026-09-20T13:40:31.140"/>
+  </p1510:revLst>
+</p1510:revInfo>
 </file>
 
 <file path=ppt/slideLayouts/slideLayout1.xml><?xml version="1.0" encoding="utf-8"?>
@@ -152,10 +176,9 @@
           <a:lstStyle/>
           <a:p>
             <a:r>
-              <a:rPr lang="en-US" smtClean="0"/>
+              <a:rPr lang="en-US"/>
               <a:t>Click to edit Master title style</a:t>
             </a:r>
-            <a:endParaRPr lang="en-US"/>
           </a:p>
         </p:txBody>
       </p:sp>
@@ -271,10 +294,9 @@
           </a:lstStyle>
           <a:p>
             <a:r>
-              <a:rPr lang="en-US" smtClean="0"/>
+              <a:rPr lang="en-US"/>
               <a:t>Click to edit Master subtitle style</a:t>
             </a:r>
-            <a:endParaRPr lang="en-US"/>
           </a:p>
         </p:txBody>
       </p:sp>
@@ -295,7 +317,7 @@
           <a:p>
             <a:fld id="{5BCAD085-E8A6-8845-BD4E-CB4CCA059FC4}" type="datetimeFigureOut">
               <a:rPr lang="en-US" smtClean="0"/>
-              <a:t>1/27/13</a:t>
+              <a:t>9/20/2026</a:t>
             </a:fld>
             <a:endParaRPr lang="en-US"/>
           </a:p>
@@ -389,10 +411,9 @@
           <a:lstStyle/>
           <a:p>
             <a:r>
-              <a:rPr lang="en-US" smtClean="0"/>
+              <a:rPr lang="en-US"/>
               <a:t>Click to edit Master title style</a:t>
             </a:r>
-            <a:endParaRPr lang="en-US"/>
           </a:p>
         </p:txBody>
       </p:sp>
@@ -413,38 +434,37 @@
           <a:p>
             <a:pPr lvl="0"/>
             <a:r>
-              <a:rPr lang="en-US" smtClean="0"/>
+              <a:rPr lang="en-US"/>
               <a:t>Click to edit Master text styles</a:t>
             </a:r>
           </a:p>
           <a:p>
             <a:pPr lvl="1"/>
             <a:r>
-              <a:rPr lang="en-US" smtClean="0"/>
+              <a:rPr lang="en-US"/>
               <a:t>Second level</a:t>
             </a:r>
           </a:p>
           <a:p>
             <a:pPr lvl="2"/>
             <a:r>
-              <a:rPr lang="en-US" smtClean="0"/>
+              <a:rPr lang="en-US"/>
               <a:t>Third level</a:t>
             </a:r>
           </a:p>
           <a:p>
             <a:pPr lvl="3"/>
             <a:r>
-              <a:rPr lang="en-US" smtClean="0"/>
+              <a:rPr lang="en-US"/>
               <a:t>Fourth level</a:t>
             </a:r>
           </a:p>
           <a:p>
             <a:pPr lvl="4"/>
             <a:r>
-              <a:rPr lang="en-US" smtClean="0"/>
+              <a:rPr lang="en-US"/>
               <a:t>Fifth level</a:t>
             </a:r>
-            <a:endParaRPr lang="en-US"/>
           </a:p>
         </p:txBody>
       </p:sp>
@@ -465,7 +485,7 @@
           <a:p>
             <a:fld id="{5BCAD085-E8A6-8845-BD4E-CB4CCA059FC4}" type="datetimeFigureOut">
               <a:rPr lang="en-US" smtClean="0"/>
-              <a:t>1/27/13</a:t>
+              <a:t>9/20/2026</a:t>
             </a:fld>
             <a:endParaRPr lang="en-US"/>
           </a:p>
@@ -564,10 +584,9 @@
           <a:lstStyle/>
           <a:p>
             <a:r>
-              <a:rPr lang="en-US" smtClean="0"/>
+              <a:rPr lang="en-US"/>
               <a:t>Click to edit Master title style</a:t>
             </a:r>
-            <a:endParaRPr lang="en-US"/>
           </a:p>
         </p:txBody>
       </p:sp>
@@ -593,38 +612,37 @@
           <a:p>
             <a:pPr lvl="0"/>
             <a:r>
-              <a:rPr lang="en-US" smtClean="0"/>
+              <a:rPr lang="en-US"/>
               <a:t>Click to edit Master text styles</a:t>
             </a:r>
           </a:p>
           <a:p>
             <a:pPr lvl="1"/>
             <a:r>
-              <a:rPr lang="en-US" smtClean="0"/>
+              <a:rPr lang="en-US"/>
               <a:t>Second level</a:t>
             </a:r>
           </a:p>
           <a:p>
             <a:pPr lvl="2"/>
             <a:r>
-              <a:rPr lang="en-US" smtClean="0"/>
+              <a:rPr lang="en-US"/>
               <a:t>Third level</a:t>
             </a:r>
           </a:p>
           <a:p>
             <a:pPr lvl="3"/>
             <a:r>
-              <a:rPr lang="en-US" smtClean="0"/>
+              <a:rPr lang="en-US"/>
               <a:t>Fourth level</a:t>
             </a:r>
           </a:p>
           <a:p>
             <a:pPr lvl="4"/>
             <a:r>
-              <a:rPr lang="en-US" smtClean="0"/>
+              <a:rPr lang="en-US"/>
               <a:t>Fifth level</a:t>
             </a:r>
-            <a:endParaRPr lang="en-US"/>
           </a:p>
         </p:txBody>
       </p:sp>
@@ -645,7 +663,7 @@
           <a:p>
             <a:fld id="{5BCAD085-E8A6-8845-BD4E-CB4CCA059FC4}" type="datetimeFigureOut">
               <a:rPr lang="en-US" smtClean="0"/>
-              <a:t>1/27/13</a:t>
+              <a:t>9/20/2026</a:t>
             </a:fld>
             <a:endParaRPr lang="en-US"/>
           </a:p>
@@ -739,10 +757,9 @@
           <a:lstStyle/>
           <a:p>
             <a:r>
-              <a:rPr lang="en-US" smtClean="0"/>
+              <a:rPr lang="en-US"/>
               <a:t>Click to edit Master title style</a:t>
             </a:r>
-            <a:endParaRPr lang="en-US"/>
           </a:p>
         </p:txBody>
       </p:sp>
@@ -763,38 +780,37 @@
           <a:p>
             <a:pPr lvl="0"/>
             <a:r>
-              <a:rPr lang="en-US" smtClean="0"/>
+              <a:rPr lang="en-US"/>
               <a:t>Click to edit Master text styles</a:t>
             </a:r>
           </a:p>
           <a:p>
             <a:pPr lvl="1"/>
             <a:r>
-              <a:rPr lang="en-US" smtClean="0"/>
+              <a:rPr lang="en-US"/>
               <a:t>Second level</a:t>
             </a:r>
           </a:p>
           <a:p>
             <a:pPr lvl="2"/>
             <a:r>
-              <a:rPr lang="en-US" smtClean="0"/>
+              <a:rPr lang="en-US"/>
               <a:t>Third level</a:t>
             </a:r>
           </a:p>
           <a:p>
             <a:pPr lvl="3"/>
             <a:r>
-              <a:rPr lang="en-US" smtClean="0"/>
+              <a:rPr lang="en-US"/>
               <a:t>Fourth level</a:t>
             </a:r>
           </a:p>
           <a:p>
             <a:pPr lvl="4"/>
             <a:r>
-              <a:rPr lang="en-US" smtClean="0"/>
+              <a:rPr lang="en-US"/>
               <a:t>Fifth level</a:t>
             </a:r>
-            <a:endParaRPr lang="en-US"/>
           </a:p>
         </p:txBody>
       </p:sp>
@@ -815,7 +831,7 @@
           <a:p>
             <a:fld id="{5BCAD085-E8A6-8845-BD4E-CB4CCA059FC4}" type="datetimeFigureOut">
               <a:rPr lang="en-US" smtClean="0"/>
-              <a:t>1/27/13</a:t>
+              <a:t>9/20/2026</a:t>
             </a:fld>
             <a:endParaRPr lang="en-US"/>
           </a:p>
@@ -918,10 +934,9 @@
           </a:lstStyle>
           <a:p>
             <a:r>
-              <a:rPr lang="en-US" smtClean="0"/>
+              <a:rPr lang="en-US"/>
               <a:t>Click to edit Master title style</a:t>
             </a:r>
-            <a:endParaRPr lang="en-US"/>
           </a:p>
         </p:txBody>
       </p:sp>
@@ -1038,7 +1053,7 @@
           <a:p>
             <a:pPr lvl="0"/>
             <a:r>
-              <a:rPr lang="en-US" smtClean="0"/>
+              <a:rPr lang="en-US"/>
               <a:t>Click to edit Master text styles</a:t>
             </a:r>
           </a:p>
@@ -1061,7 +1076,7 @@
           <a:p>
             <a:fld id="{5BCAD085-E8A6-8845-BD4E-CB4CCA059FC4}" type="datetimeFigureOut">
               <a:rPr lang="en-US" smtClean="0"/>
-              <a:t>1/27/13</a:t>
+              <a:t>9/20/2026</a:t>
             </a:fld>
             <a:endParaRPr lang="en-US"/>
           </a:p>
@@ -1155,10 +1170,9 @@
           <a:lstStyle/>
           <a:p>
             <a:r>
-              <a:rPr lang="en-US" smtClean="0"/>
+              <a:rPr lang="en-US"/>
               <a:t>Click to edit Master title style</a:t>
             </a:r>
-            <a:endParaRPr lang="en-US"/>
           </a:p>
         </p:txBody>
       </p:sp>
@@ -1212,38 +1226,37 @@
           <a:p>
             <a:pPr lvl="0"/>
             <a:r>
-              <a:rPr lang="en-US" smtClean="0"/>
+              <a:rPr lang="en-US"/>
               <a:t>Click to edit Master text styles</a:t>
             </a:r>
           </a:p>
           <a:p>
             <a:pPr lvl="1"/>
             <a:r>
-              <a:rPr lang="en-US" smtClean="0"/>
+              <a:rPr lang="en-US"/>
               <a:t>Second level</a:t>
             </a:r>
           </a:p>
           <a:p>
             <a:pPr lvl="2"/>
             <a:r>
-              <a:rPr lang="en-US" smtClean="0"/>
+              <a:rPr lang="en-US"/>
               <a:t>Third level</a:t>
             </a:r>
           </a:p>
           <a:p>
             <a:pPr lvl="3"/>
             <a:r>
-              <a:rPr lang="en-US" smtClean="0"/>
+              <a:rPr lang="en-US"/>
               <a:t>Fourth level</a:t>
             </a:r>
           </a:p>
           <a:p>
             <a:pPr lvl="4"/>
             <a:r>
-              <a:rPr lang="en-US" smtClean="0"/>
+              <a:rPr lang="en-US"/>
               <a:t>Fifth level</a:t>
             </a:r>
-            <a:endParaRPr lang="en-US"/>
           </a:p>
         </p:txBody>
       </p:sp>
@@ -1297,38 +1310,37 @@
           <a:p>
             <a:pPr lvl="0"/>
             <a:r>
-              <a:rPr lang="en-US" smtClean="0"/>
+              <a:rPr lang="en-US"/>
               <a:t>Click to edit Master text styles</a:t>
             </a:r>
           </a:p>
           <a:p>
             <a:pPr lvl="1"/>
             <a:r>
-              <a:rPr lang="en-US" smtClean="0"/>
+              <a:rPr lang="en-US"/>
               <a:t>Second level</a:t>
             </a:r>
           </a:p>
           <a:p>
             <a:pPr lvl="2"/>
             <a:r>
-              <a:rPr lang="en-US" smtClean="0"/>
+              <a:rPr lang="en-US"/>
               <a:t>Third level</a:t>
             </a:r>
           </a:p>
           <a:p>
             <a:pPr lvl="3"/>
             <a:r>
-              <a:rPr lang="en-US" smtClean="0"/>
+              <a:rPr lang="en-US"/>
               <a:t>Fourth level</a:t>
             </a:r>
           </a:p>
           <a:p>
             <a:pPr lvl="4"/>
             <a:r>
-              <a:rPr lang="en-US" smtClean="0"/>
+              <a:rPr lang="en-US"/>
               <a:t>Fifth level</a:t>
             </a:r>
-            <a:endParaRPr lang="en-US"/>
           </a:p>
         </p:txBody>
       </p:sp>
@@ -1349,7 +1361,7 @@
           <a:p>
             <a:fld id="{5BCAD085-E8A6-8845-BD4E-CB4CCA059FC4}" type="datetimeFigureOut">
               <a:rPr lang="en-US" smtClean="0"/>
-              <a:t>1/27/13</a:t>
+              <a:t>9/20/2026</a:t>
             </a:fld>
             <a:endParaRPr lang="en-US"/>
           </a:p>
@@ -1447,10 +1459,9 @@
           </a:lstStyle>
           <a:p>
             <a:r>
-              <a:rPr lang="en-US" smtClean="0"/>
+              <a:rPr lang="en-US"/>
               <a:t>Click to edit Master title style</a:t>
             </a:r>
-            <a:endParaRPr lang="en-US"/>
           </a:p>
         </p:txBody>
       </p:sp>
@@ -1513,7 +1524,7 @@
           <a:p>
             <a:pPr lvl="0"/>
             <a:r>
-              <a:rPr lang="en-US" smtClean="0"/>
+              <a:rPr lang="en-US"/>
               <a:t>Click to edit Master text styles</a:t>
             </a:r>
           </a:p>
@@ -1569,38 +1580,37 @@
           <a:p>
             <a:pPr lvl="0"/>
             <a:r>
-              <a:rPr lang="en-US" smtClean="0"/>
+              <a:rPr lang="en-US"/>
               <a:t>Click to edit Master text styles</a:t>
             </a:r>
           </a:p>
           <a:p>
             <a:pPr lvl="1"/>
             <a:r>
-              <a:rPr lang="en-US" smtClean="0"/>
+              <a:rPr lang="en-US"/>
               <a:t>Second level</a:t>
             </a:r>
           </a:p>
           <a:p>
             <a:pPr lvl="2"/>
             <a:r>
-              <a:rPr lang="en-US" smtClean="0"/>
+              <a:rPr lang="en-US"/>
               <a:t>Third level</a:t>
             </a:r>
           </a:p>
           <a:p>
             <a:pPr lvl="3"/>
             <a:r>
-              <a:rPr lang="en-US" smtClean="0"/>
+              <a:rPr lang="en-US"/>
               <a:t>Fourth level</a:t>
             </a:r>
           </a:p>
           <a:p>
             <a:pPr lvl="4"/>
             <a:r>
-              <a:rPr lang="en-US" smtClean="0"/>
+              <a:rPr lang="en-US"/>
               <a:t>Fifth level</a:t>
             </a:r>
-            <a:endParaRPr lang="en-US"/>
           </a:p>
         </p:txBody>
       </p:sp>
@@ -1663,7 +1673,7 @@
           <a:p>
             <a:pPr lvl="0"/>
             <a:r>
-              <a:rPr lang="en-US" smtClean="0"/>
+              <a:rPr lang="en-US"/>
               <a:t>Click to edit Master text styles</a:t>
             </a:r>
           </a:p>
@@ -1719,38 +1729,37 @@
           <a:p>
             <a:pPr lvl="0"/>
             <a:r>
-              <a:rPr lang="en-US" smtClean="0"/>
+              <a:rPr lang="en-US"/>
               <a:t>Click to edit Master text styles</a:t>
             </a:r>
           </a:p>
           <a:p>
             <a:pPr lvl="1"/>
             <a:r>
-              <a:rPr lang="en-US" smtClean="0"/>
+              <a:rPr lang="en-US"/>
               <a:t>Second level</a:t>
             </a:r>
           </a:p>
           <a:p>
             <a:pPr lvl="2"/>
             <a:r>
-              <a:rPr lang="en-US" smtClean="0"/>
+              <a:rPr lang="en-US"/>
               <a:t>Third level</a:t>
             </a:r>
           </a:p>
           <a:p>
             <a:pPr lvl="3"/>
             <a:r>
-              <a:rPr lang="en-US" smtClean="0"/>
+              <a:rPr lang="en-US"/>
               <a:t>Fourth level</a:t>
             </a:r>
           </a:p>
           <a:p>
             <a:pPr lvl="4"/>
             <a:r>
-              <a:rPr lang="en-US" smtClean="0"/>
+              <a:rPr lang="en-US"/>
               <a:t>Fifth level</a:t>
             </a:r>
-            <a:endParaRPr lang="en-US"/>
           </a:p>
         </p:txBody>
       </p:sp>
@@ -1771,7 +1780,7 @@
           <a:p>
             <a:fld id="{5BCAD085-E8A6-8845-BD4E-CB4CCA059FC4}" type="datetimeFigureOut">
               <a:rPr lang="en-US" smtClean="0"/>
-              <a:t>1/27/13</a:t>
+              <a:t>9/20/2026</a:t>
             </a:fld>
             <a:endParaRPr lang="en-US"/>
           </a:p>
@@ -1865,10 +1874,9 @@
           <a:lstStyle/>
           <a:p>
             <a:r>
-              <a:rPr lang="en-US" smtClean="0"/>
+              <a:rPr lang="en-US"/>
               <a:t>Click to edit Master title style</a:t>
             </a:r>
-            <a:endParaRPr lang="en-US"/>
           </a:p>
         </p:txBody>
       </p:sp>
@@ -1889,7 +1897,7 @@
           <a:p>
             <a:fld id="{5BCAD085-E8A6-8845-BD4E-CB4CCA059FC4}" type="datetimeFigureOut">
               <a:rPr lang="en-US" smtClean="0"/>
-              <a:t>1/27/13</a:t>
+              <a:t>9/20/2026</a:t>
             </a:fld>
             <a:endParaRPr lang="en-US"/>
           </a:p>
@@ -1984,7 +1992,7 @@
           <a:p>
             <a:fld id="{5BCAD085-E8A6-8845-BD4E-CB4CCA059FC4}" type="datetimeFigureOut">
               <a:rPr lang="en-US" smtClean="0"/>
-              <a:t>1/27/13</a:t>
+              <a:t>9/20/2026</a:t>
             </a:fld>
             <a:endParaRPr lang="en-US"/>
           </a:p>
@@ -2087,10 +2095,9 @@
           </a:lstStyle>
           <a:p>
             <a:r>
-              <a:rPr lang="en-US" smtClean="0"/>
+              <a:rPr lang="en-US"/>
               <a:t>Click to edit Master title style</a:t>
             </a:r>
-            <a:endParaRPr lang="en-US"/>
           </a:p>
         </p:txBody>
       </p:sp>
@@ -2144,38 +2151,37 @@
           <a:p>
             <a:pPr lvl="0"/>
             <a:r>
-              <a:rPr lang="en-US" smtClean="0"/>
+              <a:rPr lang="en-US"/>
               <a:t>Click to edit Master text styles</a:t>
             </a:r>
           </a:p>
           <a:p>
             <a:pPr lvl="1"/>
             <a:r>
-              <a:rPr lang="en-US" smtClean="0"/>
+              <a:rPr lang="en-US"/>
               <a:t>Second level</a:t>
             </a:r>
           </a:p>
           <a:p>
             <a:pPr lvl="2"/>
             <a:r>
-              <a:rPr lang="en-US" smtClean="0"/>
+              <a:rPr lang="en-US"/>
               <a:t>Third level</a:t>
             </a:r>
           </a:p>
           <a:p>
             <a:pPr lvl="3"/>
             <a:r>
-              <a:rPr lang="en-US" smtClean="0"/>
+              <a:rPr lang="en-US"/>
               <a:t>Fourth level</a:t>
             </a:r>
           </a:p>
           <a:p>
             <a:pPr lvl="4"/>
             <a:r>
-              <a:rPr lang="en-US" smtClean="0"/>
+              <a:rPr lang="en-US"/>
               <a:t>Fifth level</a:t>
             </a:r>
-            <a:endParaRPr lang="en-US"/>
           </a:p>
         </p:txBody>
       </p:sp>
@@ -2238,7 +2244,7 @@
           <a:p>
             <a:pPr lvl="0"/>
             <a:r>
-              <a:rPr lang="en-US" smtClean="0"/>
+              <a:rPr lang="en-US"/>
               <a:t>Click to edit Master text styles</a:t>
             </a:r>
           </a:p>
@@ -2261,7 +2267,7 @@
           <a:p>
             <a:fld id="{5BCAD085-E8A6-8845-BD4E-CB4CCA059FC4}" type="datetimeFigureOut">
               <a:rPr lang="en-US" smtClean="0"/>
-              <a:t>1/27/13</a:t>
+              <a:t>9/20/2026</a:t>
             </a:fld>
             <a:endParaRPr lang="en-US"/>
           </a:p>
@@ -2364,10 +2370,9 @@
           </a:lstStyle>
           <a:p>
             <a:r>
-              <a:rPr lang="en-US" smtClean="0"/>
+              <a:rPr lang="en-US"/>
               <a:t>Click to edit Master title style</a:t>
             </a:r>
-            <a:endParaRPr lang="en-US"/>
           </a:p>
         </p:txBody>
       </p:sp>
@@ -2491,7 +2496,7 @@
           <a:p>
             <a:pPr lvl="0"/>
             <a:r>
-              <a:rPr lang="en-US" smtClean="0"/>
+              <a:rPr lang="en-US"/>
               <a:t>Click to edit Master text styles</a:t>
             </a:r>
           </a:p>
@@ -2514,7 +2519,7 @@
           <a:p>
             <a:fld id="{5BCAD085-E8A6-8845-BD4E-CB4CCA059FC4}" type="datetimeFigureOut">
               <a:rPr lang="en-US" smtClean="0"/>
-              <a:t>1/27/13</a:t>
+              <a:t>9/20/2026</a:t>
             </a:fld>
             <a:endParaRPr lang="en-US"/>
           </a:p>
@@ -2623,10 +2628,9 @@
           <a:lstStyle/>
           <a:p>
             <a:r>
-              <a:rPr lang="en-US" smtClean="0"/>
+              <a:rPr lang="en-US"/>
               <a:t>Click to edit Master title style</a:t>
             </a:r>
-            <a:endParaRPr lang="en-US"/>
           </a:p>
         </p:txBody>
       </p:sp>
@@ -2657,38 +2661,37 @@
           <a:p>
             <a:pPr lvl="0"/>
             <a:r>
-              <a:rPr lang="en-US" smtClean="0"/>
+              <a:rPr lang="en-US"/>
               <a:t>Click to edit Master text styles</a:t>
             </a:r>
           </a:p>
           <a:p>
             <a:pPr lvl="1"/>
             <a:r>
-              <a:rPr lang="en-US" smtClean="0"/>
+              <a:rPr lang="en-US"/>
               <a:t>Second level</a:t>
             </a:r>
           </a:p>
           <a:p>
             <a:pPr lvl="2"/>
             <a:r>
-              <a:rPr lang="en-US" smtClean="0"/>
+              <a:rPr lang="en-US"/>
               <a:t>Third level</a:t>
             </a:r>
           </a:p>
           <a:p>
             <a:pPr lvl="3"/>
             <a:r>
-              <a:rPr lang="en-US" smtClean="0"/>
+              <a:rPr lang="en-US"/>
               <a:t>Fourth level</a:t>
             </a:r>
           </a:p>
           <a:p>
             <a:pPr lvl="4"/>
             <a:r>
-              <a:rPr lang="en-US" smtClean="0"/>
+              <a:rPr lang="en-US"/>
               <a:t>Fifth level</a:t>
             </a:r>
-            <a:endParaRPr lang="en-US"/>
           </a:p>
         </p:txBody>
       </p:sp>
@@ -2727,7 +2730,7 @@
           <a:p>
             <a:fld id="{5BCAD085-E8A6-8845-BD4E-CB4CCA059FC4}" type="datetimeFigureOut">
               <a:rPr lang="en-US" smtClean="0"/>
-              <a:t>1/27/13</a:t>
+              <a:t>9/20/2026</a:t>
             </a:fld>
             <a:endParaRPr lang="en-US"/>
           </a:p>
@@ -3086,7 +3089,7 @@
 </file>
 
 <file path=ppt/slides/slide1.xml><?xml version="1.0" encoding="utf-8"?>
-<p:sld xmlns:a="http://schemas.openxmlformats.org/drawingml/2006/main" xmlns:p="http://schemas.openxmlformats.org/presentationml/2006/main" xmlns:r="http://schemas.openxmlformats.org/officeDocument/2006/relationships">
+<p:sld xmlns:a="http://schemas.openxmlformats.org/drawingml/2006/main" xmlns:r="http://schemas.openxmlformats.org/officeDocument/2006/relationships" xmlns:p="http://schemas.openxmlformats.org/presentationml/2006/main">
   <p:cSld>
     <p:spTree>
       <p:nvGrpSpPr>
@@ -3094,7 +3097,14 @@
         <p:cNvGrpSpPr/>
         <p:nvPr/>
       </p:nvGrpSpPr>
-      <p:grpSpPr/>
+      <p:grpSpPr>
+        <a:xfrm>
+          <a:off x="0" y="0"/>
+          <a:ext cx="0" cy="0"/>
+          <a:chOff x="0" y="0"/>
+          <a:chExt cx="0" cy="0"/>
+        </a:xfrm>
+      </p:grpSpPr>
       <p:sp>
         <p:nvSpPr>
           <p:cNvPr id="2" name="Rectangle 1"/>
@@ -3136,6 +3146,7 @@
           <a:lstStyle/>
           <a:p>
             <a:pPr algn="ctr"/>
+            <a:endParaRPr/>
           </a:p>
         </p:txBody>
       </p:sp>
@@ -3180,6 +3191,7 @@
           <a:lstStyle/>
           <a:p>
             <a:pPr algn="ctr"/>
+            <a:endParaRPr/>
           </a:p>
         </p:txBody>
       </p:sp>
@@ -3295,7 +3307,7 @@
                 </a:solidFill>
                 <a:latin typeface="Inter"/>
               </a:rPr>
-              <a:t>O radar antifraude da economia de agentes.</a:t>
+              <a:t>Fé pública programável para a economia de agentes.</a:t>
             </a:r>
           </a:p>
         </p:txBody>
@@ -3341,6 +3353,7 @@
           <a:lstStyle/>
           <a:p>
             <a:pPr algn="ctr"/>
+            <a:endParaRPr/>
           </a:p>
         </p:txBody>
       </p:sp>
@@ -3378,7 +3391,7 @@
                 </a:solidFill>
                 <a:latin typeface="Inter"/>
               </a:rPr>
-              <a:t>Quando agentes pagam agentes, quem barra o golpe?</a:t>
+              <a:t>Quando agentes pagam agentes, quem confere o trabalho?</a:t>
             </a:r>
           </a:p>
         </p:txBody>
@@ -3431,7 +3444,7 @@
 </file>
 
 <file path=ppt/slides/slide2.xml><?xml version="1.0" encoding="utf-8"?>
-<p:sld xmlns:a="http://schemas.openxmlformats.org/drawingml/2006/main" xmlns:p="http://schemas.openxmlformats.org/presentationml/2006/main" xmlns:r="http://schemas.openxmlformats.org/officeDocument/2006/relationships">
+<p:sld xmlns:a="http://schemas.openxmlformats.org/drawingml/2006/main" xmlns:r="http://schemas.openxmlformats.org/officeDocument/2006/relationships" xmlns:p="http://schemas.openxmlformats.org/presentationml/2006/main">
   <p:cSld>
     <p:spTree>
       <p:nvGrpSpPr>
@@ -3439,7 +3452,14 @@
         <p:cNvGrpSpPr/>
         <p:nvPr/>
       </p:nvGrpSpPr>
-      <p:grpSpPr/>
+      <p:grpSpPr>
+        <a:xfrm>
+          <a:off x="0" y="0"/>
+          <a:ext cx="0" cy="0"/>
+          <a:chOff x="0" y="0"/>
+          <a:chExt cx="0" cy="0"/>
+        </a:xfrm>
+      </p:grpSpPr>
       <p:sp>
         <p:nvSpPr>
           <p:cNvPr id="2" name="Rectangle 1"/>
@@ -3481,6 +3501,7 @@
           <a:lstStyle/>
           <a:p>
             <a:pPr algn="ctr"/>
+            <a:endParaRPr/>
           </a:p>
         </p:txBody>
       </p:sp>
@@ -3573,7 +3594,7 @@
                 </a:solidFill>
                 <a:latin typeface="Inter"/>
               </a:rPr>
-              <a:t>Ninguém barra a fraude.</a:t>
+              <a:t>Ninguém confere o trabalho.</a:t>
             </a:r>
           </a:p>
         </p:txBody>
@@ -3619,6 +3640,7 @@
           <a:lstStyle/>
           <a:p>
             <a:pPr algn="ctr"/>
+            <a:endParaRPr/>
           </a:p>
         </p:txBody>
       </p:sp>
@@ -3630,7 +3652,7 @@
         </p:nvSpPr>
         <p:spPr>
           <a:xfrm>
-            <a:off x="822960" y="2697480"/>
+            <a:off x="822960" y="2656840"/>
             <a:ext cx="914400" cy="457200"/>
           </a:xfrm>
           <a:prstGeom prst="rect">
@@ -3709,7 +3731,122 @@
         <p:spPr>
           <a:xfrm>
             <a:off x="1554480" y="3108960"/>
-            <a:ext cx="9875520" cy="457200"/>
+            <a:ext cx="9875520" cy="323165"/>
+          </a:xfrm>
+          <a:prstGeom prst="rect">
+            <a:avLst/>
+          </a:prstGeom>
+          <a:noFill/>
+        </p:spPr>
+        <p:txBody>
+          <a:bodyPr wrap="square" lIns="91440" tIns="45720" rIns="91440" bIns="45720" anchor="t">
+            <a:spAutoFit/>
+          </a:bodyPr>
+          <a:lstStyle/>
+          <a:p>
+            <a:r>
+              <a:rPr lang="en-US" sz="1500" dirty="0">
+                <a:solidFill>
+                  <a:srgbClr val="8B98B8"/>
+                </a:solidFill>
+                <a:latin typeface="Inter"/>
+              </a:rPr>
+              <a:t>O </a:t>
+            </a:r>
+            <a:r>
+              <a:rPr lang="en-US" sz="1500" dirty="0" err="1">
+                <a:solidFill>
+                  <a:srgbClr val="8B98B8"/>
+                </a:solidFill>
+                <a:latin typeface="Inter"/>
+              </a:rPr>
+              <a:t>processo</a:t>
+            </a:r>
+            <a:r>
+              <a:rPr lang="en-US" sz="1500" dirty="0">
+                <a:solidFill>
+                  <a:srgbClr val="8B98B8"/>
+                </a:solidFill>
+                <a:latin typeface="Inter"/>
+              </a:rPr>
+              <a:t> </a:t>
+            </a:r>
+            <a:r>
+              <a:rPr lang="en-US" sz="1500" dirty="0" err="1">
+                <a:solidFill>
+                  <a:srgbClr val="8B98B8"/>
+                </a:solidFill>
+                <a:latin typeface="Inter"/>
+              </a:rPr>
+              <a:t>existe</a:t>
+            </a:r>
+            <a:r>
+              <a:rPr lang="en-US" sz="1500" dirty="0">
+                <a:solidFill>
+                  <a:srgbClr val="8B98B8"/>
+                </a:solidFill>
+                <a:latin typeface="Inter"/>
+              </a:rPr>
+              <a:t>, mas </a:t>
+            </a:r>
+            <a:r>
+              <a:rPr lang="en-US" sz="1500" dirty="0" err="1">
+                <a:solidFill>
+                  <a:srgbClr val="8B98B8"/>
+                </a:solidFill>
+                <a:latin typeface="Inter"/>
+              </a:rPr>
+              <a:t>carece</a:t>
+            </a:r>
+            <a:r>
+              <a:rPr lang="en-US" sz="1500" dirty="0">
+                <a:solidFill>
+                  <a:srgbClr val="8B98B8"/>
+                </a:solidFill>
+                <a:latin typeface="Inter"/>
+              </a:rPr>
+              <a:t> de </a:t>
+            </a:r>
+            <a:r>
+              <a:rPr lang="en-US" sz="1500" dirty="0" err="1">
+                <a:solidFill>
+                  <a:srgbClr val="8B98B8"/>
+                </a:solidFill>
+                <a:latin typeface="Inter"/>
+              </a:rPr>
+              <a:t>controle</a:t>
+            </a:r>
+            <a:r>
+              <a:rPr lang="en-US" sz="1500" dirty="0">
+                <a:solidFill>
+                  <a:srgbClr val="8B98B8"/>
+                </a:solidFill>
+                <a:latin typeface="Inter"/>
+              </a:rPr>
+              <a:t> de </a:t>
+            </a:r>
+            <a:r>
+              <a:rPr lang="en-US" sz="1500" b="0" dirty="0" err="1">
+                <a:solidFill>
+                  <a:srgbClr val="8B98B8"/>
+                </a:solidFill>
+                <a:latin typeface="Inter"/>
+              </a:rPr>
+              <a:t>qualidade</a:t>
+            </a:r>
+          </a:p>
+        </p:txBody>
+      </p:sp>
+      <p:sp>
+        <p:nvSpPr>
+          <p:cNvPr id="9" name="TextBox 8"/>
+          <p:cNvSpPr txBox="1"/>
+          <p:nvPr/>
+        </p:nvSpPr>
+        <p:spPr>
+          <a:xfrm>
+            <a:off x="822960" y="3708399"/>
+            <a:ext cx="914400" cy="457200"/>
           </a:xfrm>
           <a:prstGeom prst="rect">
             <a:avLst/>
@@ -3728,27 +3865,27 @@
               </a:lnSpc>
             </a:pPr>
             <a:r>
-              <a:rPr sz="1500" b="0">
-                <a:solidFill>
-                  <a:srgbClr val="8B98B8"/>
-                </a:solidFill>
-                <a:latin typeface="Inter"/>
-              </a:rPr>
-              <a:t>O trilho existe — o antifraude, não.</a:t>
-            </a:r>
-          </a:p>
-        </p:txBody>
-      </p:sp>
-      <p:sp>
-        <p:nvSpPr>
-          <p:cNvPr id="9" name="TextBox 8"/>
+              <a:rPr sz="2200" b="1">
+                <a:solidFill>
+                  <a:srgbClr val="FBBF24"/>
+                </a:solidFill>
+                <a:latin typeface="Inter"/>
+              </a:rPr>
+              <a:t>02</a:t>
+            </a:r>
+          </a:p>
+        </p:txBody>
+      </p:sp>
+      <p:sp>
+        <p:nvSpPr>
+          <p:cNvPr id="10" name="TextBox 9"/>
           <p:cNvSpPr txBox="1"/>
           <p:nvPr/>
         </p:nvSpPr>
         <p:spPr>
           <a:xfrm>
-            <a:off x="822960" y="3749039"/>
-            <a:ext cx="914400" cy="457200"/>
+            <a:off x="1554480" y="3730752"/>
+            <a:ext cx="9875520" cy="411480"/>
           </a:xfrm>
           <a:prstGeom prst="rect">
             <a:avLst/>
@@ -3767,27 +3904,193 @@
               </a:lnSpc>
             </a:pPr>
             <a:r>
-              <a:rPr sz="2200" b="1">
-                <a:solidFill>
-                  <a:srgbClr val="FBBF24"/>
-                </a:solidFill>
-                <a:latin typeface="Inter"/>
-              </a:rPr>
-              <a:t>02</a:t>
-            </a:r>
-          </a:p>
-        </p:txBody>
-      </p:sp>
-      <p:sp>
-        <p:nvSpPr>
-          <p:cNvPr id="10" name="TextBox 9"/>
+              <a:rPr sz="1900" b="1">
+                <a:solidFill>
+                  <a:srgbClr val="FFFFFF"/>
+                </a:solidFill>
+                <a:latin typeface="Inter"/>
+              </a:rPr>
+              <a:t>Humano conferindo cada transação não escala.</a:t>
+            </a:r>
+          </a:p>
+        </p:txBody>
+      </p:sp>
+      <p:sp>
+        <p:nvSpPr>
+          <p:cNvPr id="11" name="TextBox 10"/>
           <p:cNvSpPr txBox="1"/>
           <p:nvPr/>
         </p:nvSpPr>
         <p:spPr>
           <a:xfrm>
-            <a:off x="1554480" y="3730752"/>
-            <a:ext cx="9875520" cy="411480"/>
+            <a:off x="1554480" y="4160520"/>
+            <a:ext cx="9875520" cy="323165"/>
+          </a:xfrm>
+          <a:prstGeom prst="rect">
+            <a:avLst/>
+          </a:prstGeom>
+          <a:noFill/>
+        </p:spPr>
+        <p:txBody>
+          <a:bodyPr wrap="square" lIns="91440" tIns="45720" rIns="91440" bIns="45720" anchor="t">
+            <a:spAutoFit/>
+          </a:bodyPr>
+          <a:lstStyle/>
+          <a:p>
+            <a:r>
+              <a:rPr lang="en-US" sz="1500" dirty="0" err="1">
+                <a:solidFill>
+                  <a:srgbClr val="8B98B8"/>
+                </a:solidFill>
+                <a:latin typeface="Inter"/>
+              </a:rPr>
+              <a:t>Agentes</a:t>
+            </a:r>
+            <a:r>
+              <a:rPr lang="en-US" sz="1500" dirty="0">
+                <a:solidFill>
+                  <a:srgbClr val="8B98B8"/>
+                </a:solidFill>
+                <a:latin typeface="Inter"/>
+              </a:rPr>
+              <a:t> </a:t>
+            </a:r>
+            <a:r>
+              <a:rPr lang="en-US" sz="1500" dirty="0" err="1">
+                <a:solidFill>
+                  <a:srgbClr val="8B98B8"/>
+                </a:solidFill>
+                <a:latin typeface="Inter"/>
+              </a:rPr>
+              <a:t>trabalham</a:t>
+            </a:r>
+            <a:r>
+              <a:rPr lang="en-US" sz="1500" dirty="0">
+                <a:solidFill>
+                  <a:srgbClr val="8B98B8"/>
+                </a:solidFill>
+                <a:latin typeface="Inter"/>
+              </a:rPr>
+              <a:t> </a:t>
+            </a:r>
+            <a:r>
+              <a:rPr lang="en-US" sz="1500" dirty="0" err="1">
+                <a:solidFill>
+                  <a:srgbClr val="8B98B8"/>
+                </a:solidFill>
+                <a:latin typeface="Inter"/>
+              </a:rPr>
+              <a:t>em</a:t>
+            </a:r>
+            <a:r>
+              <a:rPr lang="en-US" sz="1500" dirty="0">
+                <a:solidFill>
+                  <a:srgbClr val="8B98B8"/>
+                </a:solidFill>
+                <a:latin typeface="Inter"/>
+              </a:rPr>
+              <a:t> </a:t>
+            </a:r>
+            <a:r>
+              <a:rPr lang="en-US" sz="1500" dirty="0" err="1">
+                <a:solidFill>
+                  <a:srgbClr val="8B98B8"/>
+                </a:solidFill>
+                <a:latin typeface="Inter"/>
+              </a:rPr>
+              <a:t>milissegundos</a:t>
+            </a:r>
+            <a:r>
+              <a:rPr lang="en-US" sz="1500" dirty="0">
+                <a:solidFill>
+                  <a:srgbClr val="8B98B8"/>
+                </a:solidFill>
+                <a:latin typeface="Inter"/>
+              </a:rPr>
+              <a:t> e o ser </a:t>
+            </a:r>
+            <a:r>
+              <a:rPr lang="en-US" sz="1500" dirty="0" err="1">
+                <a:solidFill>
+                  <a:srgbClr val="8B98B8"/>
+                </a:solidFill>
+                <a:latin typeface="Inter"/>
+              </a:rPr>
+              <a:t>humano</a:t>
+            </a:r>
+            <a:r>
+              <a:rPr lang="en-US" sz="1500" dirty="0">
+                <a:solidFill>
+                  <a:srgbClr val="8B98B8"/>
+                </a:solidFill>
+                <a:latin typeface="Inter"/>
+              </a:rPr>
+              <a:t> </a:t>
+            </a:r>
+            <a:r>
+              <a:rPr lang="en-US" sz="1500" dirty="0" err="1">
+                <a:solidFill>
+                  <a:srgbClr val="8B98B8"/>
+                </a:solidFill>
+                <a:latin typeface="Inter"/>
+              </a:rPr>
+              <a:t>não</a:t>
+            </a:r>
+            <a:r>
+              <a:rPr lang="en-US" sz="1500" dirty="0">
+                <a:solidFill>
+                  <a:srgbClr val="8B98B8"/>
+                </a:solidFill>
+                <a:latin typeface="Inter"/>
+              </a:rPr>
+              <a:t> </a:t>
+            </a:r>
+            <a:r>
+              <a:rPr lang="en-US" sz="1500" dirty="0" err="1">
+                <a:solidFill>
+                  <a:srgbClr val="8B98B8"/>
+                </a:solidFill>
+                <a:latin typeface="Inter"/>
+              </a:rPr>
+              <a:t>consegue</a:t>
+            </a:r>
+            <a:r>
+              <a:rPr lang="en-US" sz="1500" dirty="0">
+                <a:solidFill>
+                  <a:srgbClr val="8B98B8"/>
+                </a:solidFill>
+                <a:latin typeface="Inter"/>
+              </a:rPr>
+              <a:t> </a:t>
+            </a:r>
+            <a:r>
+              <a:rPr lang="en-US" sz="1500" dirty="0" err="1">
+                <a:solidFill>
+                  <a:srgbClr val="8B98B8"/>
+                </a:solidFill>
+                <a:latin typeface="Inter"/>
+              </a:rPr>
+              <a:t>acompanhar</a:t>
+            </a:r>
+            <a:endParaRPr lang="en-US" sz="1500" b="0" dirty="0" err="1">
+              <a:solidFill>
+                <a:srgbClr val="8B98B8"/>
+              </a:solidFill>
+              <a:latin typeface="Inter"/>
+            </a:endParaRPr>
+          </a:p>
+        </p:txBody>
+      </p:sp>
+      <p:sp>
+        <p:nvSpPr>
+          <p:cNvPr id="12" name="TextBox 11"/>
+          <p:cNvSpPr txBox="1"/>
+          <p:nvPr/>
+        </p:nvSpPr>
+        <p:spPr>
+          <a:xfrm>
+            <a:off x="822960" y="4759960"/>
+            <a:ext cx="914400" cy="457200"/>
           </a:xfrm>
           <a:prstGeom prst="rect">
             <a:avLst/>
@@ -3806,27 +4109,27 @@
               </a:lnSpc>
             </a:pPr>
             <a:r>
-              <a:rPr sz="1900" b="1">
-                <a:solidFill>
-                  <a:srgbClr val="FFFFFF"/>
-                </a:solidFill>
-                <a:latin typeface="Inter"/>
-              </a:rPr>
-              <a:t>Humano conferindo cada transação não escala.</a:t>
-            </a:r>
-          </a:p>
-        </p:txBody>
-      </p:sp>
-      <p:sp>
-        <p:nvSpPr>
-          <p:cNvPr id="11" name="TextBox 10"/>
+              <a:rPr sz="2200" b="1">
+                <a:solidFill>
+                  <a:srgbClr val="F87171"/>
+                </a:solidFill>
+                <a:latin typeface="Inter"/>
+              </a:rPr>
+              <a:t>03</a:t>
+            </a:r>
+          </a:p>
+        </p:txBody>
+      </p:sp>
+      <p:sp>
+        <p:nvSpPr>
+          <p:cNvPr id="13" name="TextBox 12"/>
           <p:cNvSpPr txBox="1"/>
           <p:nvPr/>
         </p:nvSpPr>
         <p:spPr>
           <a:xfrm>
-            <a:off x="1554480" y="4160520"/>
-            <a:ext cx="9875520" cy="457200"/>
+            <a:off x="1554480" y="4782312"/>
+            <a:ext cx="9875520" cy="411480"/>
           </a:xfrm>
           <a:prstGeom prst="rect">
             <a:avLst/>
@@ -3845,84 +4148,6 @@
               </a:lnSpc>
             </a:pPr>
             <a:r>
-              <a:rPr sz="1500" b="0">
-                <a:solidFill>
-                  <a:srgbClr val="8B98B8"/>
-                </a:solidFill>
-                <a:latin typeface="Inter"/>
-              </a:rPr>
-              <a:t>Se agente trabalha em milissegundo, o humano vira o gargalo — e mata a tese A2A.</a:t>
-            </a:r>
-          </a:p>
-        </p:txBody>
-      </p:sp>
-      <p:sp>
-        <p:nvSpPr>
-          <p:cNvPr id="12" name="TextBox 11"/>
-          <p:cNvSpPr txBox="1"/>
-          <p:nvPr/>
-        </p:nvSpPr>
-        <p:spPr>
-          <a:xfrm>
-            <a:off x="822960" y="4800600"/>
-            <a:ext cx="914400" cy="457200"/>
-          </a:xfrm>
-          <a:prstGeom prst="rect">
-            <a:avLst/>
-          </a:prstGeom>
-          <a:noFill/>
-        </p:spPr>
-        <p:txBody>
-          <a:bodyPr wrap="square">
-            <a:spAutoFit/>
-          </a:bodyPr>
-          <a:lstStyle/>
-          <a:p>
-            <a:pPr algn="l">
-              <a:lnSpc>
-                <a:spcPct val="100000"/>
-              </a:lnSpc>
-            </a:pPr>
-            <a:r>
-              <a:rPr sz="2200" b="1">
-                <a:solidFill>
-                  <a:srgbClr val="F87171"/>
-                </a:solidFill>
-                <a:latin typeface="Inter"/>
-              </a:rPr>
-              <a:t>03</a:t>
-            </a:r>
-          </a:p>
-        </p:txBody>
-      </p:sp>
-      <p:sp>
-        <p:nvSpPr>
-          <p:cNvPr id="13" name="TextBox 12"/>
-          <p:cNvSpPr txBox="1"/>
-          <p:nvPr/>
-        </p:nvSpPr>
-        <p:spPr>
-          <a:xfrm>
-            <a:off x="1554480" y="4782312"/>
-            <a:ext cx="9875520" cy="411480"/>
-          </a:xfrm>
-          <a:prstGeom prst="rect">
-            <a:avLst/>
-          </a:prstGeom>
-          <a:noFill/>
-        </p:spPr>
-        <p:txBody>
-          <a:bodyPr wrap="square">
-            <a:spAutoFit/>
-          </a:bodyPr>
-          <a:lstStyle/>
-          <a:p>
-            <a:pPr algn="l">
-              <a:lnSpc>
-                <a:spcPct val="100000"/>
-              </a:lnSpc>
-            </a:pPr>
-            <a:r>
               <a:rPr sz="1900" b="1">
                 <a:solidFill>
                   <a:srgbClr val="FFFFFF"/>
@@ -3943,7 +4168,7 @@
         <p:spPr>
           <a:xfrm>
             <a:off x="1554480" y="5212080"/>
-            <a:ext cx="9875520" cy="457200"/>
+            <a:ext cx="9875520" cy="323165"/>
           </a:xfrm>
           <a:prstGeom prst="rect">
             <a:avLst/>
@@ -3951,64 +4176,197 @@
           <a:noFill/>
         </p:spPr>
         <p:txBody>
-          <a:bodyPr wrap="square">
+          <a:bodyPr wrap="square" lIns="91440" tIns="45720" rIns="91440" bIns="45720" anchor="t">
             <a:spAutoFit/>
           </a:bodyPr>
           <a:lstStyle/>
           <a:p>
-            <a:pPr algn="l">
-              <a:lnSpc>
-                <a:spcPct val="100000"/>
-              </a:lnSpc>
-            </a:pPr>
-            <a:r>
-              <a:rPr sz="1500" b="0">
-                <a:solidFill>
-                  <a:srgbClr val="8B98B8"/>
-                </a:solidFill>
-                <a:latin typeface="Inter"/>
-              </a:rPr>
-              <a:t>Sem camada de verificação, o piloto de agentic payments não sai do lab.</a:t>
-            </a:r>
-          </a:p>
-        </p:txBody>
-      </p:sp>
-      <p:sp>
-        <p:nvSpPr>
-          <p:cNvPr id="15" name="TextBox 14"/>
-          <p:cNvSpPr txBox="1"/>
-          <p:nvPr/>
-        </p:nvSpPr>
-        <p:spPr>
-          <a:xfrm>
-            <a:off x="822960" y="6035040"/>
-            <a:ext cx="10515600" cy="457200"/>
-          </a:xfrm>
-          <a:prstGeom prst="rect">
-            <a:avLst/>
-          </a:prstGeom>
-          <a:noFill/>
-        </p:spPr>
-        <p:txBody>
-          <a:bodyPr wrap="square">
-            <a:spAutoFit/>
-          </a:bodyPr>
-          <a:lstStyle/>
-          <a:p>
-            <a:pPr algn="l">
-              <a:lnSpc>
-                <a:spcPct val="100000"/>
-              </a:lnSpc>
-            </a:pPr>
-            <a:r>
-              <a:rPr sz="1500" b="0">
-                <a:solidFill>
-                  <a:srgbClr val="665EFD"/>
-                </a:solidFill>
-                <a:latin typeface="Inter"/>
-              </a:rPr>
-              <a:t>“Autorização pergunta se devia pagar. Verificação pergunta se o trabalho foi bom. Você precisa dos dois.”</a:t>
-            </a:r>
+            <a:r>
+              <a:rPr sz="1500" b="0" dirty="0">
+                <a:solidFill>
+                  <a:srgbClr val="8B98B8"/>
+                </a:solidFill>
+                <a:latin typeface="Inter"/>
+              </a:rPr>
+              <a:t>Sem </a:t>
+            </a:r>
+            <a:r>
+              <a:rPr lang="en-US" sz="1500" dirty="0">
+                <a:solidFill>
+                  <a:srgbClr val="8B98B8"/>
+                </a:solidFill>
+                <a:latin typeface="Inter"/>
+              </a:rPr>
+              <a:t>a </a:t>
+            </a:r>
+            <a:r>
+              <a:rPr sz="1500" b="0" dirty="0" err="1">
+                <a:solidFill>
+                  <a:srgbClr val="8B98B8"/>
+                </a:solidFill>
+                <a:latin typeface="Inter"/>
+              </a:rPr>
+              <a:t>camada</a:t>
+            </a:r>
+            <a:r>
+              <a:rPr sz="1500" b="0" dirty="0">
+                <a:solidFill>
+                  <a:srgbClr val="8B98B8"/>
+                </a:solidFill>
+                <a:latin typeface="Inter"/>
+              </a:rPr>
+              <a:t> de </a:t>
+            </a:r>
+            <a:r>
+              <a:rPr sz="1500" b="0" dirty="0" err="1">
+                <a:solidFill>
+                  <a:srgbClr val="8B98B8"/>
+                </a:solidFill>
+                <a:latin typeface="Inter"/>
+              </a:rPr>
+              <a:t>verificação</a:t>
+            </a:r>
+            <a:r>
+              <a:rPr sz="1500" b="0" dirty="0">
+                <a:solidFill>
+                  <a:srgbClr val="8B98B8"/>
+                </a:solidFill>
+                <a:latin typeface="Inter"/>
+              </a:rPr>
+              <a:t> </a:t>
+            </a:r>
+            <a:r>
+              <a:rPr lang="en-US" sz="1500" dirty="0">
+                <a:solidFill>
+                  <a:srgbClr val="8B98B8"/>
+                </a:solidFill>
+                <a:latin typeface="Inter"/>
+              </a:rPr>
+              <a:t>e </a:t>
+            </a:r>
+            <a:r>
+              <a:rPr lang="en-US" sz="1500" dirty="0" err="1">
+                <a:solidFill>
+                  <a:srgbClr val="8B98B8"/>
+                </a:solidFill>
+                <a:latin typeface="Inter"/>
+              </a:rPr>
+              <a:t>controle</a:t>
+            </a:r>
+            <a:r>
+              <a:rPr lang="en-US" sz="1500" dirty="0">
+                <a:solidFill>
+                  <a:srgbClr val="8B98B8"/>
+                </a:solidFill>
+                <a:latin typeface="Inter"/>
+              </a:rPr>
+              <a:t>, </a:t>
+            </a:r>
+            <a:r>
+              <a:rPr lang="en-US" sz="1500" dirty="0" err="1">
+                <a:solidFill>
+                  <a:srgbClr val="8B98B8"/>
+                </a:solidFill>
+                <a:latin typeface="Inter"/>
+              </a:rPr>
+              <a:t>pagamentos</a:t>
+            </a:r>
+            <a:r>
+              <a:rPr lang="en-US" sz="1500" dirty="0">
+                <a:solidFill>
+                  <a:srgbClr val="8B98B8"/>
+                </a:solidFill>
+                <a:latin typeface="Inter"/>
+              </a:rPr>
+              <a:t> </a:t>
+            </a:r>
+            <a:r>
+              <a:rPr lang="en-US" sz="1500" dirty="0" err="1">
+                <a:solidFill>
+                  <a:srgbClr val="8B98B8"/>
+                </a:solidFill>
+                <a:latin typeface="Inter"/>
+              </a:rPr>
+              <a:t>em</a:t>
+            </a:r>
+            <a:r>
+              <a:rPr lang="en-US" sz="1500" dirty="0">
+                <a:solidFill>
+                  <a:srgbClr val="8B98B8"/>
+                </a:solidFill>
+                <a:latin typeface="Inter"/>
+              </a:rPr>
+              <a:t> </a:t>
+            </a:r>
+            <a:r>
+              <a:rPr lang="en-US" sz="1500" dirty="0" err="1">
+                <a:solidFill>
+                  <a:srgbClr val="8B98B8"/>
+                </a:solidFill>
+                <a:latin typeface="Inter"/>
+              </a:rPr>
+              <a:t>escala</a:t>
+            </a:r>
+            <a:r>
+              <a:rPr lang="en-US" sz="1500" dirty="0">
+                <a:solidFill>
+                  <a:srgbClr val="8B98B8"/>
+                </a:solidFill>
+                <a:latin typeface="Inter"/>
+              </a:rPr>
+              <a:t> </a:t>
+            </a:r>
+            <a:r>
+              <a:rPr lang="en-US" sz="1500" dirty="0" err="1">
+                <a:solidFill>
+                  <a:srgbClr val="8B98B8"/>
+                </a:solidFill>
+                <a:latin typeface="Inter"/>
+              </a:rPr>
+              <a:t>não</a:t>
+            </a:r>
+            <a:r>
+              <a:rPr lang="en-US" sz="1500" dirty="0">
+                <a:solidFill>
+                  <a:srgbClr val="8B98B8"/>
+                </a:solidFill>
+                <a:latin typeface="Inter"/>
+              </a:rPr>
+              <a:t> </a:t>
+            </a:r>
+            <a:r>
+              <a:rPr lang="en-US" sz="1500" dirty="0" err="1">
+                <a:solidFill>
+                  <a:srgbClr val="8B98B8"/>
+                </a:solidFill>
+                <a:latin typeface="Inter"/>
+              </a:rPr>
+              <a:t>são</a:t>
+            </a:r>
+            <a:r>
+              <a:rPr lang="en-US" sz="1500" dirty="0">
+                <a:solidFill>
+                  <a:srgbClr val="8B98B8"/>
+                </a:solidFill>
+                <a:latin typeface="Inter"/>
+              </a:rPr>
+              <a:t> </a:t>
+            </a:r>
+            <a:r>
+              <a:rPr lang="en-US" sz="1500" dirty="0" err="1">
+                <a:solidFill>
+                  <a:srgbClr val="8B98B8"/>
+                </a:solidFill>
+                <a:latin typeface="Inter"/>
+              </a:rPr>
+              <a:t>viáveis</a:t>
+            </a:r>
+            <a:endParaRPr lang="en-US" sz="1500" b="0" dirty="0" err="1">
+              <a:solidFill>
+                <a:srgbClr val="8B98B8"/>
+              </a:solidFill>
+              <a:latin typeface="Inter"/>
+            </a:endParaRPr>
           </a:p>
         </p:txBody>
       </p:sp>
@@ -4021,7 +4379,7 @@
 </file>
 
 <file path=ppt/slides/slide3.xml><?xml version="1.0" encoding="utf-8"?>
-<p:sld xmlns:a="http://schemas.openxmlformats.org/drawingml/2006/main" xmlns:p="http://schemas.openxmlformats.org/presentationml/2006/main" xmlns:r="http://schemas.openxmlformats.org/officeDocument/2006/relationships">
+<p:sld xmlns:a="http://schemas.openxmlformats.org/drawingml/2006/main" xmlns:r="http://schemas.openxmlformats.org/officeDocument/2006/relationships" xmlns:p="http://schemas.openxmlformats.org/presentationml/2006/main">
   <p:cSld>
     <p:spTree>
       <p:nvGrpSpPr>
@@ -4029,7 +4387,14 @@
         <p:cNvGrpSpPr/>
         <p:nvPr/>
       </p:nvGrpSpPr>
-      <p:grpSpPr/>
+      <p:grpSpPr>
+        <a:xfrm>
+          <a:off x="0" y="0"/>
+          <a:ext cx="0" cy="0"/>
+          <a:chOff x="0" y="0"/>
+          <a:chExt cx="0" cy="0"/>
+        </a:xfrm>
+      </p:grpSpPr>
       <p:sp>
         <p:nvSpPr>
           <p:cNvPr id="2" name="Rectangle 1"/>
@@ -4071,6 +4436,7 @@
           <a:lstStyle/>
           <a:p>
             <a:pPr algn="ctr"/>
+            <a:endParaRPr/>
           </a:p>
         </p:txBody>
       </p:sp>
@@ -4161,7 +4527,7 @@
         <p:spPr>
           <a:xfrm>
             <a:off x="822960" y="1783080"/>
-            <a:ext cx="10515600" cy="457200"/>
+            <a:ext cx="10515600" cy="338554"/>
           </a:xfrm>
           <a:prstGeom prst="rect">
             <a:avLst/>
@@ -4169,25 +4535,170 @@
           <a:noFill/>
         </p:spPr>
         <p:txBody>
-          <a:bodyPr wrap="square">
+          <a:bodyPr wrap="square" lIns="91440" tIns="45720" rIns="91440" bIns="45720" anchor="t">
             <a:spAutoFit/>
           </a:bodyPr>
           <a:lstStyle/>
           <a:p>
-            <a:pPr algn="l">
-              <a:lnSpc>
-                <a:spcPct val="100000"/>
-              </a:lnSpc>
-            </a:pPr>
-            <a:r>
-              <a:rPr sz="1600" b="0">
-                <a:solidFill>
-                  <a:srgbClr val="8B98B8"/>
-                </a:solidFill>
-                <a:latin typeface="Inter"/>
-              </a:rPr>
-              <a:t>Escrow verificado: settlement é consequência da verificação, não um passo separado.</a:t>
-            </a:r>
+            <a:r>
+              <a:rPr sz="1600" b="0" dirty="0">
+                <a:solidFill>
+                  <a:srgbClr val="8B98B8"/>
+                </a:solidFill>
+                <a:latin typeface="Inter"/>
+              </a:rPr>
+              <a:t>Escrow </a:t>
+            </a:r>
+            <a:r>
+              <a:rPr lang="en-US" sz="1600" dirty="0">
+                <a:solidFill>
+                  <a:srgbClr val="8B98B8"/>
+                </a:solidFill>
+                <a:latin typeface="Inter"/>
+              </a:rPr>
+              <a:t>é </a:t>
+            </a:r>
+            <a:r>
+              <a:rPr lang="en-US" sz="1600" dirty="0" err="1">
+                <a:solidFill>
+                  <a:srgbClr val="8B98B8"/>
+                </a:solidFill>
+                <a:latin typeface="Inter"/>
+              </a:rPr>
+              <a:t>verificado</a:t>
+            </a:r>
+            <a:r>
+              <a:rPr sz="1600" b="0" dirty="0">
+                <a:solidFill>
+                  <a:srgbClr val="8B98B8"/>
+                </a:solidFill>
+                <a:latin typeface="Inter"/>
+              </a:rPr>
+              <a:t>: </a:t>
+            </a:r>
+            <a:r>
+              <a:rPr lang="en-US" sz="1600" dirty="0">
+                <a:solidFill>
+                  <a:srgbClr val="8B98B8"/>
+                </a:solidFill>
+                <a:latin typeface="Inter"/>
+              </a:rPr>
+              <a:t>o </a:t>
+            </a:r>
+            <a:r>
+              <a:rPr sz="1600" b="0" dirty="0">
+                <a:solidFill>
+                  <a:srgbClr val="8B98B8"/>
+                </a:solidFill>
+                <a:latin typeface="Inter"/>
+              </a:rPr>
+              <a:t>settlement</a:t>
+            </a:r>
+            <a:r>
+              <a:rPr lang="en-US" sz="1600" dirty="0">
+                <a:solidFill>
+                  <a:srgbClr val="8B98B8"/>
+                </a:solidFill>
+                <a:latin typeface="Inter"/>
+              </a:rPr>
+              <a:t> </a:t>
+            </a:r>
+            <a:r>
+              <a:rPr lang="en-US" sz="1600" dirty="0" err="1">
+                <a:solidFill>
+                  <a:srgbClr val="8B98B8"/>
+                </a:solidFill>
+                <a:latin typeface="Inter"/>
+              </a:rPr>
+              <a:t>só</a:t>
+            </a:r>
+            <a:r>
+              <a:rPr lang="en-US" sz="1600" dirty="0">
+                <a:solidFill>
+                  <a:srgbClr val="8B98B8"/>
+                </a:solidFill>
+                <a:latin typeface="Inter"/>
+              </a:rPr>
+              <a:t> </a:t>
+            </a:r>
+            <a:r>
+              <a:rPr lang="en-US" sz="1600" b="0" dirty="0">
+                <a:solidFill>
+                  <a:srgbClr val="8B98B8"/>
+                </a:solidFill>
+                <a:latin typeface="Inter"/>
+              </a:rPr>
+              <a:t>é </a:t>
+            </a:r>
+            <a:r>
+              <a:rPr lang="en-US" sz="1600" dirty="0" err="1">
+                <a:solidFill>
+                  <a:srgbClr val="8B98B8"/>
+                </a:solidFill>
+                <a:latin typeface="Inter"/>
+              </a:rPr>
+              <a:t>feito</a:t>
+            </a:r>
+            <a:r>
+              <a:rPr lang="en-US" sz="1600" dirty="0">
+                <a:solidFill>
+                  <a:srgbClr val="8B98B8"/>
+                </a:solidFill>
+                <a:latin typeface="Inter"/>
+              </a:rPr>
+              <a:t> </a:t>
+            </a:r>
+            <a:r>
+              <a:rPr lang="en-US" sz="1600" dirty="0" err="1">
+                <a:solidFill>
+                  <a:srgbClr val="8B98B8"/>
+                </a:solidFill>
+                <a:latin typeface="Inter"/>
+              </a:rPr>
+              <a:t>após</a:t>
+            </a:r>
+            <a:r>
+              <a:rPr lang="en-US" sz="1600" dirty="0">
+                <a:solidFill>
+                  <a:srgbClr val="8B98B8"/>
+                </a:solidFill>
+                <a:latin typeface="Inter"/>
+              </a:rPr>
+              <a:t> </a:t>
+            </a:r>
+            <a:r>
+              <a:rPr lang="en-US" sz="1600" b="0" dirty="0" err="1">
+                <a:solidFill>
+                  <a:srgbClr val="8B98B8"/>
+                </a:solidFill>
+                <a:latin typeface="Inter"/>
+              </a:rPr>
+              <a:t>verificação</a:t>
+            </a:r>
+            <a:r>
+              <a:rPr lang="en-US" sz="1600" dirty="0">
+                <a:solidFill>
+                  <a:srgbClr val="8B98B8"/>
+                </a:solidFill>
+                <a:latin typeface="Inter"/>
+              </a:rPr>
+              <a:t> e </a:t>
+            </a:r>
+            <a:r>
+              <a:rPr lang="en-US" sz="1600" dirty="0" err="1">
+                <a:solidFill>
+                  <a:srgbClr val="8B98B8"/>
+                </a:solidFill>
+                <a:latin typeface="Inter"/>
+              </a:rPr>
+              <a:t>julgamento</a:t>
+            </a:r>
+            <a:endParaRPr lang="en-US" sz="1600" b="0" dirty="0">
+              <a:solidFill>
+                <a:srgbClr val="8B98B8"/>
+              </a:solidFill>
+              <a:latin typeface="Inter"/>
+            </a:endParaRPr>
           </a:p>
         </p:txBody>
       </p:sp>
@@ -4230,7 +4741,7 @@
           </a:fontRef>
         </p:style>
         <p:txBody>
-          <a:bodyPr rtlCol="0" anchor="ctr" wrap="square" lIns="73152" rIns="73152" tIns="18288" bIns="18288"/>
+          <a:bodyPr wrap="square" lIns="73152" tIns="18288" rIns="73152" bIns="18288" rtlCol="0" anchor="ctr"/>
           <a:lstStyle/>
           <a:p>
             <a:pPr algn="ctr"/>
@@ -4379,7 +4890,7 @@
           </a:fontRef>
         </p:style>
         <p:txBody>
-          <a:bodyPr rtlCol="0" anchor="ctr" wrap="square" lIns="73152" rIns="73152" tIns="18288" bIns="18288"/>
+          <a:bodyPr wrap="square" lIns="73152" tIns="18288" rIns="73152" bIns="18288" rtlCol="0" anchor="ctr"/>
           <a:lstStyle/>
           <a:p>
             <a:pPr algn="ctr"/>
@@ -4528,7 +5039,7 @@
           </a:fontRef>
         </p:style>
         <p:txBody>
-          <a:bodyPr rtlCol="0" anchor="ctr" wrap="square" lIns="73152" rIns="73152" tIns="18288" bIns="18288"/>
+          <a:bodyPr wrap="square" lIns="73152" tIns="18288" rIns="73152" bIns="18288" rtlCol="0" anchor="ctr"/>
           <a:lstStyle/>
           <a:p>
             <a:pPr algn="ctr"/>
@@ -4677,7 +5188,7 @@
           </a:fontRef>
         </p:style>
         <p:txBody>
-          <a:bodyPr rtlCol="0" anchor="ctr" wrap="square" lIns="73152" rIns="73152" tIns="18288" bIns="18288"/>
+          <a:bodyPr wrap="square" lIns="73152" tIns="18288" rIns="73152" bIns="18288" rtlCol="0" anchor="ctr"/>
           <a:lstStyle/>
           <a:p>
             <a:pPr algn="ctr"/>
@@ -4826,7 +5337,7 @@
           </a:fontRef>
         </p:style>
         <p:txBody>
-          <a:bodyPr rtlCol="0" anchor="ctr" wrap="square" lIns="73152" rIns="73152" tIns="18288" bIns="18288"/>
+          <a:bodyPr wrap="square" lIns="73152" tIns="18288" rIns="73152" bIns="18288" rtlCol="0" anchor="ctr"/>
           <a:lstStyle/>
           <a:p>
             <a:pPr algn="ctr"/>
@@ -4942,6 +5453,7 @@
           <a:lstStyle/>
           <a:p>
             <a:pPr algn="ctr"/>
+            <a:endParaRPr/>
           </a:p>
         </p:txBody>
       </p:sp>
@@ -4993,7 +5505,7 @@
         <p:spPr>
           <a:xfrm>
             <a:off x="1024128" y="4937760"/>
-            <a:ext cx="3017520" cy="1097280"/>
+            <a:ext cx="3017520" cy="666208"/>
           </a:xfrm>
           <a:prstGeom prst="rect">
             <a:avLst/>
@@ -5001,24 +5513,132 @@
           <a:noFill/>
         </p:spPr>
         <p:txBody>
-          <a:bodyPr wrap="square">
+          <a:bodyPr wrap="square" lIns="91440" tIns="45720" rIns="91440" bIns="45720" anchor="t">
             <a:spAutoFit/>
           </a:bodyPr>
           <a:lstStyle/>
           <a:p>
-            <a:pPr algn="l">
+            <a:pPr>
               <a:lnSpc>
                 <a:spcPct val="105000"/>
               </a:lnSpc>
             </a:pPr>
             <a:r>
-              <a:rPr sz="1200" b="0">
-                <a:solidFill>
-                  <a:srgbClr val="8B98B8"/>
-                </a:solidFill>
-                <a:latin typeface="Inter"/>
-              </a:rPr>
-              <a:t>Stage A determinístico (grátis) barra falhas objetivas; painel cross-capability vota o subjetivo com commit-reveal.</a:t>
+              <a:rPr sz="1200" b="0" dirty="0">
+                <a:solidFill>
+                  <a:srgbClr val="8B98B8"/>
+                </a:solidFill>
+                <a:latin typeface="Inter"/>
+              </a:rPr>
+              <a:t>Stage A </a:t>
+            </a:r>
+            <a:r>
+              <a:rPr sz="1200" b="0" dirty="0" err="1">
+                <a:solidFill>
+                  <a:srgbClr val="8B98B8"/>
+                </a:solidFill>
+                <a:latin typeface="Inter"/>
+              </a:rPr>
+              <a:t>determinístico</a:t>
+            </a:r>
+            <a:r>
+              <a:rPr sz="1200" b="0" dirty="0">
+                <a:solidFill>
+                  <a:srgbClr val="8B98B8"/>
+                </a:solidFill>
+                <a:latin typeface="Inter"/>
+              </a:rPr>
+              <a:t> barra </a:t>
+            </a:r>
+            <a:r>
+              <a:rPr sz="1200" b="0" dirty="0" err="1">
+                <a:solidFill>
+                  <a:srgbClr val="8B98B8"/>
+                </a:solidFill>
+                <a:latin typeface="Inter"/>
+              </a:rPr>
+              <a:t>falhas</a:t>
+            </a:r>
+            <a:r>
+              <a:rPr sz="1200" b="0" dirty="0">
+                <a:solidFill>
+                  <a:srgbClr val="8B98B8"/>
+                </a:solidFill>
+                <a:latin typeface="Inter"/>
+              </a:rPr>
+              <a:t> </a:t>
+            </a:r>
+            <a:r>
+              <a:rPr sz="1200" b="0" dirty="0" err="1">
+                <a:solidFill>
+                  <a:srgbClr val="8B98B8"/>
+                </a:solidFill>
+                <a:latin typeface="Inter"/>
+              </a:rPr>
+              <a:t>objetivas</a:t>
+            </a:r>
+            <a:r>
+              <a:rPr lang="en-US" sz="1200" dirty="0">
+                <a:solidFill>
+                  <a:srgbClr val="8B98B8"/>
+                </a:solidFill>
+                <a:latin typeface="Inter"/>
+              </a:rPr>
+              <a:t> e</a:t>
+            </a:r>
+            <a:r>
+              <a:rPr lang="en-US" sz="1200" b="0" dirty="0">
+                <a:solidFill>
+                  <a:srgbClr val="8B98B8"/>
+                </a:solidFill>
+                <a:latin typeface="Inter"/>
+              </a:rPr>
+              <a:t> </a:t>
+            </a:r>
+            <a:r>
+              <a:rPr lang="en-US" sz="1200" dirty="0">
+                <a:solidFill>
+                  <a:srgbClr val="8B98B8"/>
+                </a:solidFill>
+                <a:latin typeface="Inter"/>
+              </a:rPr>
+              <a:t>o </a:t>
+            </a:r>
+            <a:r>
+              <a:rPr sz="1200" b="0" dirty="0" err="1">
+                <a:solidFill>
+                  <a:srgbClr val="8B98B8"/>
+                </a:solidFill>
+                <a:latin typeface="Inter"/>
+              </a:rPr>
+              <a:t>painel</a:t>
+            </a:r>
+            <a:r>
+              <a:rPr sz="1200" b="0" dirty="0">
+                <a:solidFill>
+                  <a:srgbClr val="8B98B8"/>
+                </a:solidFill>
+                <a:latin typeface="Inter"/>
+              </a:rPr>
+              <a:t> cross-capability vota o </a:t>
+            </a:r>
+            <a:r>
+              <a:rPr sz="1200" b="0" dirty="0" err="1">
+                <a:solidFill>
+                  <a:srgbClr val="8B98B8"/>
+                </a:solidFill>
+                <a:latin typeface="Inter"/>
+              </a:rPr>
+              <a:t>subjetivo</a:t>
+            </a:r>
+            <a:r>
+              <a:rPr sz="1200" b="0" dirty="0">
+                <a:solidFill>
+                  <a:srgbClr val="8B98B8"/>
+                </a:solidFill>
+                <a:latin typeface="Inter"/>
+              </a:rPr>
+              <a:t> com commit-reveal.</a:t>
             </a:r>
           </a:p>
         </p:txBody>
@@ -5068,6 +5688,7 @@
           <a:lstStyle/>
           <a:p>
             <a:pPr algn="ctr"/>
+            <a:endParaRPr/>
           </a:p>
         </p:txBody>
       </p:sp>
@@ -5119,7 +5740,7 @@
         <p:spPr>
           <a:xfrm>
             <a:off x="4636008" y="4937760"/>
-            <a:ext cx="3017520" cy="1097280"/>
+            <a:ext cx="3017520" cy="278410"/>
           </a:xfrm>
           <a:prstGeom prst="rect">
             <a:avLst/>
@@ -5127,25 +5748,130 @@
           <a:noFill/>
         </p:spPr>
         <p:txBody>
-          <a:bodyPr wrap="square">
+          <a:bodyPr wrap="square" lIns="91440" tIns="45720" rIns="91440" bIns="45720" anchor="t">
             <a:spAutoFit/>
           </a:bodyPr>
           <a:lstStyle/>
           <a:p>
-            <a:pPr algn="l">
+            <a:pPr>
               <a:lnSpc>
                 <a:spcPct val="105000"/>
               </a:lnSpc>
             </a:pPr>
             <a:r>
-              <a:rPr sz="1200" b="0">
-                <a:solidFill>
-                  <a:srgbClr val="8B98B8"/>
-                </a:solidFill>
-                <a:latin typeface="Inter"/>
-              </a:rPr>
-              <a:t>Juiz que cai vira reject com conf 0 — a banca decide mesmo assim. Provado ao vivo, duas vezes.</a:t>
-            </a:r>
+              <a:rPr sz="1200" b="0" dirty="0">
+                <a:solidFill>
+                  <a:srgbClr val="8B98B8"/>
+                </a:solidFill>
+                <a:latin typeface="Inter"/>
+              </a:rPr>
+              <a:t>Juiz </a:t>
+            </a:r>
+            <a:r>
+              <a:rPr sz="1200" b="0" dirty="0" err="1">
+                <a:solidFill>
+                  <a:srgbClr val="8B98B8"/>
+                </a:solidFill>
+                <a:latin typeface="Inter"/>
+              </a:rPr>
+              <a:t>que</a:t>
+            </a:r>
+            <a:r>
+              <a:rPr sz="1200" b="0" dirty="0">
+                <a:solidFill>
+                  <a:srgbClr val="8B98B8"/>
+                </a:solidFill>
+                <a:latin typeface="Inter"/>
+              </a:rPr>
+              <a:t> </a:t>
+            </a:r>
+            <a:r>
+              <a:rPr sz="1200" b="0" dirty="0" err="1">
+                <a:solidFill>
+                  <a:srgbClr val="8B98B8"/>
+                </a:solidFill>
+                <a:latin typeface="Inter"/>
+              </a:rPr>
+              <a:t>cai</a:t>
+            </a:r>
+            <a:r>
+              <a:rPr lang="en-US" sz="1200" dirty="0">
+                <a:solidFill>
+                  <a:srgbClr val="8B98B8"/>
+                </a:solidFill>
+                <a:latin typeface="Inter"/>
+              </a:rPr>
+              <a:t> é </a:t>
+            </a:r>
+            <a:r>
+              <a:rPr lang="en-US" sz="1200" dirty="0" err="1">
+                <a:solidFill>
+                  <a:srgbClr val="8B98B8"/>
+                </a:solidFill>
+                <a:latin typeface="Inter"/>
+              </a:rPr>
+              <a:t>rejeitado</a:t>
+            </a:r>
+            <a:r>
+              <a:rPr sz="1200" b="0" dirty="0">
+                <a:solidFill>
+                  <a:srgbClr val="8B98B8"/>
+                </a:solidFill>
+                <a:latin typeface="Inter"/>
+              </a:rPr>
+              <a:t> com</a:t>
+            </a:r>
+            <a:r>
+              <a:rPr lang="en-US" sz="1200" dirty="0">
+                <a:solidFill>
+                  <a:srgbClr val="8B98B8"/>
+                </a:solidFill>
+                <a:latin typeface="Inter"/>
+              </a:rPr>
+              <a:t> </a:t>
+            </a:r>
+            <a:r>
+              <a:rPr lang="en-US" sz="1200" dirty="0" err="1">
+                <a:solidFill>
+                  <a:srgbClr val="8B98B8"/>
+                </a:solidFill>
+                <a:latin typeface="Inter"/>
+              </a:rPr>
+              <a:t>confiança</a:t>
+            </a:r>
+            <a:r>
+              <a:rPr lang="en-US" sz="1200" b="0" dirty="0">
+                <a:solidFill>
+                  <a:srgbClr val="8B98B8"/>
+                </a:solidFill>
+                <a:latin typeface="Inter"/>
+              </a:rPr>
+              <a:t> </a:t>
+            </a:r>
+            <a:r>
+              <a:rPr lang="en-US" sz="1200" dirty="0">
+                <a:solidFill>
+                  <a:srgbClr val="8B98B8"/>
+                </a:solidFill>
+                <a:latin typeface="Inter"/>
+              </a:rPr>
+              <a:t>zero </a:t>
+            </a:r>
+            <a:r>
+              <a:rPr sz="1200" b="0" dirty="0">
+                <a:solidFill>
+                  <a:srgbClr val="8B98B8"/>
+                </a:solidFill>
+                <a:latin typeface="Inter"/>
+              </a:rPr>
+              <a:t>0</a:t>
+            </a:r>
+            <a:endParaRPr lang="en-US" sz="1600" b="0">
+              <a:solidFill>
+                <a:srgbClr val="8B98B8"/>
+              </a:solidFill>
+              <a:latin typeface="Inter"/>
+            </a:endParaRPr>
           </a:p>
         </p:txBody>
       </p:sp>
@@ -5194,6 +5920,7 @@
           <a:lstStyle/>
           <a:p>
             <a:pPr algn="ctr"/>
+            <a:endParaRPr/>
           </a:p>
         </p:txBody>
       </p:sp>
@@ -5245,7 +5972,7 @@
         <p:spPr>
           <a:xfrm>
             <a:off x="8247888" y="4937760"/>
-            <a:ext cx="3017520" cy="1097280"/>
+            <a:ext cx="3017520" cy="472309"/>
           </a:xfrm>
           <a:prstGeom prst="rect">
             <a:avLst/>
@@ -5253,25 +5980,112 @@
           <a:noFill/>
         </p:spPr>
         <p:txBody>
-          <a:bodyPr wrap="square">
+          <a:bodyPr wrap="square" lIns="91440" tIns="45720" rIns="91440" bIns="45720" anchor="t">
             <a:spAutoFit/>
           </a:bodyPr>
           <a:lstStyle/>
           <a:p>
-            <a:pPr algn="l">
+            <a:pPr>
               <a:lnSpc>
                 <a:spcPct val="105000"/>
               </a:lnSpc>
             </a:pPr>
             <a:r>
-              <a:rPr sz="1200" b="0">
-                <a:solidFill>
-                  <a:srgbClr val="8B98B8"/>
-                </a:solidFill>
-                <a:latin typeface="Inter"/>
-              </a:rPr>
-              <a:t>Disputa e arbitragem existem — é o MED do Pix, o chargeback do Visa. Até a exceção fica na trilha.</a:t>
-            </a:r>
+              <a:rPr sz="1200" b="0" dirty="0" err="1">
+                <a:solidFill>
+                  <a:srgbClr val="8B98B8"/>
+                </a:solidFill>
+                <a:latin typeface="Inter"/>
+              </a:rPr>
+              <a:t>Disputa</a:t>
+            </a:r>
+            <a:r>
+              <a:rPr sz="1200" b="0" dirty="0">
+                <a:solidFill>
+                  <a:srgbClr val="8B98B8"/>
+                </a:solidFill>
+                <a:latin typeface="Inter"/>
+              </a:rPr>
+              <a:t> e </a:t>
+            </a:r>
+            <a:r>
+              <a:rPr sz="1200" b="0" dirty="0" err="1">
+                <a:solidFill>
+                  <a:srgbClr val="8B98B8"/>
+                </a:solidFill>
+                <a:latin typeface="Inter"/>
+              </a:rPr>
+              <a:t>arbitragem</a:t>
+            </a:r>
+            <a:r>
+              <a:rPr sz="1200" b="0" dirty="0">
+                <a:solidFill>
+                  <a:srgbClr val="8B98B8"/>
+                </a:solidFill>
+                <a:latin typeface="Inter"/>
+              </a:rPr>
+              <a:t> </a:t>
+            </a:r>
+            <a:r>
+              <a:rPr sz="1200" b="0" dirty="0" err="1">
+                <a:solidFill>
+                  <a:srgbClr val="8B98B8"/>
+                </a:solidFill>
+                <a:latin typeface="Inter"/>
+              </a:rPr>
+              <a:t>existem</a:t>
+            </a:r>
+            <a:r>
+              <a:rPr lang="en-US" sz="1200" dirty="0">
+                <a:solidFill>
+                  <a:srgbClr val="8B98B8"/>
+                </a:solidFill>
+                <a:latin typeface="Inter"/>
+              </a:rPr>
+              <a:t>.</a:t>
+            </a:r>
+            <a:r>
+              <a:rPr lang="en-US" sz="1200" b="0" dirty="0">
+                <a:solidFill>
+                  <a:srgbClr val="8B98B8"/>
+                </a:solidFill>
+                <a:latin typeface="Inter"/>
+              </a:rPr>
+              <a:t> </a:t>
+            </a:r>
+            <a:r>
+              <a:rPr lang="en-US" sz="1200" dirty="0" err="1">
+                <a:solidFill>
+                  <a:srgbClr val="8B98B8"/>
+                </a:solidFill>
+                <a:latin typeface="Inter"/>
+              </a:rPr>
+              <a:t>Exemplos</a:t>
+            </a:r>
+            <a:r>
+              <a:rPr lang="en-US" sz="1200" dirty="0">
+                <a:solidFill>
+                  <a:srgbClr val="8B98B8"/>
+                </a:solidFill>
+                <a:latin typeface="Inter"/>
+              </a:rPr>
+              <a:t>: MED</a:t>
+            </a:r>
+            <a:r>
+              <a:rPr sz="1200" b="0" dirty="0">
+                <a:solidFill>
+                  <a:srgbClr val="8B98B8"/>
+                </a:solidFill>
+                <a:latin typeface="Inter"/>
+              </a:rPr>
+              <a:t> do Pix, o chargeback do Visa.</a:t>
+            </a:r>
+            <a:endParaRPr lang="en-US" sz="1200" b="0" dirty="0">
+              <a:solidFill>
+                <a:srgbClr val="8B98B8"/>
+              </a:solidFill>
+              <a:latin typeface="Inter"/>
+            </a:endParaRPr>
           </a:p>
         </p:txBody>
       </p:sp>
@@ -5284,7 +6098,7 @@
 </file>
 
 <file path=ppt/slides/slide4.xml><?xml version="1.0" encoding="utf-8"?>
-<p:sld xmlns:a="http://schemas.openxmlformats.org/drawingml/2006/main" xmlns:p="http://schemas.openxmlformats.org/presentationml/2006/main" xmlns:r="http://schemas.openxmlformats.org/officeDocument/2006/relationships">
+<p:sld xmlns:a="http://schemas.openxmlformats.org/drawingml/2006/main" xmlns:r="http://schemas.openxmlformats.org/officeDocument/2006/relationships" xmlns:p="http://schemas.openxmlformats.org/presentationml/2006/main">
   <p:cSld>
     <p:spTree>
       <p:nvGrpSpPr>
@@ -5292,7 +6106,14 @@
         <p:cNvGrpSpPr/>
         <p:nvPr/>
       </p:nvGrpSpPr>
-      <p:grpSpPr/>
+      <p:grpSpPr>
+        <a:xfrm>
+          <a:off x="0" y="0"/>
+          <a:ext cx="0" cy="0"/>
+          <a:chOff x="0" y="0"/>
+          <a:chExt cx="0" cy="0"/>
+        </a:xfrm>
+      </p:grpSpPr>
       <p:sp>
         <p:nvSpPr>
           <p:cNvPr id="2" name="Rectangle 1"/>
@@ -5334,84 +6155,7 @@
           <a:lstStyle/>
           <a:p>
             <a:pPr algn="ctr"/>
-          </a:p>
-        </p:txBody>
-      </p:sp>
-      <p:sp>
-        <p:nvSpPr>
-          <p:cNvPr id="3" name="TextBox 2"/>
-          <p:cNvSpPr txBox="1"/>
-          <p:nvPr/>
-        </p:nvSpPr>
-        <p:spPr>
-          <a:xfrm>
-            <a:off x="822960" y="548640"/>
-            <a:ext cx="5486400" cy="365760"/>
-          </a:xfrm>
-          <a:prstGeom prst="rect">
-            <a:avLst/>
-          </a:prstGeom>
-          <a:noFill/>
-        </p:spPr>
-        <p:txBody>
-          <a:bodyPr wrap="square">
-            <a:spAutoFit/>
-          </a:bodyPr>
-          <a:lstStyle/>
-          <a:p>
-            <a:pPr algn="l">
-              <a:lnSpc>
-                <a:spcPct val="100000"/>
-              </a:lnSpc>
-            </a:pPr>
-            <a:r>
-              <a:rPr sz="1300" b="1">
-                <a:solidFill>
-                  <a:srgbClr val="665EFD"/>
-                </a:solidFill>
-                <a:latin typeface="Inter"/>
-              </a:rPr>
-              <a:t>FUNCIONA DE VERDADE</a:t>
-            </a:r>
-          </a:p>
-        </p:txBody>
-      </p:sp>
-      <p:sp>
-        <p:nvSpPr>
-          <p:cNvPr id="4" name="TextBox 3"/>
-          <p:cNvSpPr txBox="1"/>
-          <p:nvPr/>
-        </p:nvSpPr>
-        <p:spPr>
-          <a:xfrm>
-            <a:off x="822960" y="960120"/>
-            <a:ext cx="10515600" cy="640080"/>
-          </a:xfrm>
-          <a:prstGeom prst="rect">
-            <a:avLst/>
-          </a:prstGeom>
-          <a:noFill/>
-        </p:spPr>
-        <p:txBody>
-          <a:bodyPr wrap="square">
-            <a:spAutoFit/>
-          </a:bodyPr>
-          <a:lstStyle/>
-          <a:p>
-            <a:pPr algn="l">
-              <a:lnSpc>
-                <a:spcPct val="100000"/>
-              </a:lnSpc>
-            </a:pPr>
-            <a:r>
-              <a:rPr sz="3400" b="1">
-                <a:solidFill>
-                  <a:srgbClr val="FFFFFF"/>
-                </a:solidFill>
-                <a:latin typeface="Inter"/>
-              </a:rPr>
-              <a:t>Não é mock. É produção ao vivo.</a:t>
-            </a:r>
+            <a:endParaRPr/>
           </a:p>
         </p:txBody>
       </p:sp>
@@ -5431,8 +6175,8 @@
         </p:blipFill>
         <p:spPr>
           <a:xfrm>
-            <a:off x="822960" y="1691640"/>
-            <a:ext cx="6949440" cy="4467497"/>
+            <a:off x="1828800" y="889000"/>
+            <a:ext cx="8503920" cy="5463177"/>
           </a:xfrm>
           <a:prstGeom prst="rect">
             <a:avLst/>
@@ -5441,27 +6185,145 @@
       </p:pic>
       <p:sp>
         <p:nvSpPr>
-          <p:cNvPr id="6" name="Rounded Rectangle 5"/>
+          <p:cNvPr id="18" name="TextBox 17"/>
+          <p:cNvSpPr txBox="1"/>
+          <p:nvPr/>
+        </p:nvSpPr>
+        <p:spPr>
+          <a:xfrm>
+            <a:off x="833120" y="6334760"/>
+            <a:ext cx="10515600" cy="457200"/>
+          </a:xfrm>
+          <a:prstGeom prst="rect">
+            <a:avLst/>
+          </a:prstGeom>
+          <a:noFill/>
+        </p:spPr>
+        <p:txBody>
+          <a:bodyPr wrap="square">
+            <a:spAutoFit/>
+          </a:bodyPr>
+          <a:lstStyle/>
+          <a:p>
+            <a:pPr algn="l">
+              <a:lnSpc>
+                <a:spcPct val="100000"/>
+              </a:lnSpc>
+            </a:pPr>
+            <a:r>
+              <a:rPr sz="1400" b="0">
+                <a:solidFill>
+                  <a:srgbClr val="DBE3F5"/>
+                </a:solidFill>
+                <a:latin typeface="Inter"/>
+              </a:rPr>
+              <a:t>Escrow e-bfb3f1434714: reasoning falhou → reject conf 0 → reasoning-pro + code aprovaram → RELEASED.</a:t>
+            </a:r>
+          </a:p>
+        </p:txBody>
+      </p:sp>
+      <p:sp>
+        <p:nvSpPr>
+          <p:cNvPr id="20" name="TextBox 19">
+            <a:extLst>
+              <a:ext uri="{FF2B5EF4-FFF2-40B4-BE49-F238E27FC236}">
+                <a16:creationId xmlns:a16="http://schemas.microsoft.com/office/drawing/2014/main" id="{03C01C18-3221-9CF7-BAFF-FD66D69F1B57}"/>
+              </a:ext>
+            </a:extLst>
+          </p:cNvPr>
+          <p:cNvSpPr txBox="1"/>
+          <p:nvPr/>
+        </p:nvSpPr>
+        <p:spPr>
+          <a:xfrm>
+            <a:off x="822960" y="248920"/>
+            <a:ext cx="10515600" cy="646331"/>
+          </a:xfrm>
+          <a:prstGeom prst="rect">
+            <a:avLst/>
+          </a:prstGeom>
+          <a:noFill/>
+        </p:spPr>
+        <p:txBody>
+          <a:bodyPr wrap="square" lIns="91440" tIns="45720" rIns="91440" bIns="45720" anchor="t">
+            <a:spAutoFit/>
+          </a:bodyPr>
+          <a:lstStyle/>
+          <a:p>
+            <a:r>
+              <a:rPr lang="en-US" sz="3600" b="1" dirty="0">
+                <a:solidFill>
+                  <a:srgbClr val="FFFFFF"/>
+                </a:solidFill>
+                <a:latin typeface="Inter"/>
+              </a:rPr>
+              <a:t>Dados </a:t>
+            </a:r>
+            <a:r>
+              <a:rPr lang="en-US" sz="3600" b="1" dirty="0" err="1">
+                <a:solidFill>
+                  <a:srgbClr val="FFFFFF"/>
+                </a:solidFill>
+                <a:latin typeface="Inter"/>
+              </a:rPr>
+              <a:t>em</a:t>
+            </a:r>
+            <a:r>
+              <a:rPr lang="en-US" sz="3600" b="1" dirty="0">
+                <a:solidFill>
+                  <a:srgbClr val="FFFFFF"/>
+                </a:solidFill>
+                <a:latin typeface="Inter"/>
+              </a:rPr>
+              <a:t> real-time</a:t>
+            </a:r>
+          </a:p>
+        </p:txBody>
+      </p:sp>
+    </p:spTree>
+  </p:cSld>
+  <p:clrMapOvr>
+    <a:masterClrMapping/>
+  </p:clrMapOvr>
+</p:sld>
+</file>
+
+<file path=ppt/slides/slide5.xml><?xml version="1.0" encoding="utf-8"?>
+<p:sld xmlns:a="http://schemas.openxmlformats.org/drawingml/2006/main" xmlns:r="http://schemas.openxmlformats.org/officeDocument/2006/relationships" xmlns:p="http://schemas.openxmlformats.org/presentationml/2006/main">
+  <p:cSld>
+    <p:spTree>
+      <p:nvGrpSpPr>
+        <p:cNvPr id="1" name=""/>
+        <p:cNvGrpSpPr/>
+        <p:nvPr/>
+      </p:nvGrpSpPr>
+      <p:grpSpPr>
+        <a:xfrm>
+          <a:off x="0" y="0"/>
+          <a:ext cx="0" cy="0"/>
+          <a:chOff x="0" y="0"/>
+          <a:chExt cx="0" cy="0"/>
+        </a:xfrm>
+      </p:grpSpPr>
+      <p:sp>
+        <p:nvSpPr>
+          <p:cNvPr id="2" name="Rectangle 1"/>
           <p:cNvSpPr/>
           <p:nvPr/>
         </p:nvSpPr>
         <p:spPr>
           <a:xfrm>
-            <a:off x="8046720" y="1783080"/>
-            <a:ext cx="3383280" cy="960120"/>
-          </a:xfrm>
-          <a:prstGeom prst="roundRect">
-            <a:avLst>
-              <a:gd name="adj" fmla="val 6000"/>
-            </a:avLst>
+            <a:off x="0" y="0"/>
+            <a:ext cx="12191695" cy="6858000"/>
+          </a:xfrm>
+          <a:prstGeom prst="rect">
+            <a:avLst/>
           </a:prstGeom>
           <a:solidFill>
-            <a:srgbClr val="111731"/>
+            <a:srgbClr val="0A0E1E"/>
           </a:solidFill>
-          <a:ln w="12700">
-            <a:solidFill>
-              <a:srgbClr val="1C2640"/>
-            </a:solidFill>
+          <a:ln>
+            <a:noFill/>
           </a:ln>
           <a:effectLst/>
         </p:spPr>
@@ -5484,19 +6346,20 @@
           <a:lstStyle/>
           <a:p>
             <a:pPr algn="ctr"/>
-          </a:p>
-        </p:txBody>
-      </p:sp>
-      <p:sp>
-        <p:nvSpPr>
-          <p:cNvPr id="7" name="TextBox 6"/>
+            <a:endParaRPr/>
+          </a:p>
+        </p:txBody>
+      </p:sp>
+      <p:sp>
+        <p:nvSpPr>
+          <p:cNvPr id="3" name="TextBox 2"/>
           <p:cNvSpPr txBox="1"/>
           <p:nvPr/>
         </p:nvSpPr>
         <p:spPr>
           <a:xfrm>
-            <a:off x="8229600" y="1874519"/>
-            <a:ext cx="3108960" cy="411480"/>
+            <a:off x="822960" y="548640"/>
+            <a:ext cx="5486400" cy="365760"/>
           </a:xfrm>
           <a:prstGeom prst="rect">
             <a:avLst/>
@@ -5515,27 +6378,27 @@
               </a:lnSpc>
             </a:pPr>
             <a:r>
-              <a:rPr sz="2100" b="1">
-                <a:solidFill>
-                  <a:srgbClr val="34D399"/>
-                </a:solidFill>
-                <a:latin typeface="Inter"/>
-              </a:rPr>
-              <a:t>49 decisões</a:t>
-            </a:r>
-          </a:p>
-        </p:txBody>
-      </p:sp>
-      <p:sp>
-        <p:nvSpPr>
-          <p:cNvPr id="8" name="TextBox 7"/>
+              <a:rPr sz="1300" b="1">
+                <a:solidFill>
+                  <a:srgbClr val="665EFD"/>
+                </a:solidFill>
+                <a:latin typeface="Inter"/>
+              </a:rPr>
+              <a:t>RASTREABILIDADE &amp; CONFIANÇA</a:t>
+            </a:r>
+          </a:p>
+        </p:txBody>
+      </p:sp>
+      <p:sp>
+        <p:nvSpPr>
+          <p:cNvPr id="4" name="TextBox 3"/>
           <p:cNvSpPr txBox="1"/>
           <p:nvPr/>
         </p:nvSpPr>
         <p:spPr>
           <a:xfrm>
-            <a:off x="8229600" y="2313432"/>
-            <a:ext cx="3108960" cy="365760"/>
+            <a:off x="822960" y="960120"/>
+            <a:ext cx="10515600" cy="640080"/>
           </a:xfrm>
           <a:prstGeom prst="rect">
             <a:avLst/>
@@ -5554,40 +6417,397 @@
               </a:lnSpc>
             </a:pPr>
             <a:r>
+              <a:rPr sz="3400" b="1">
+                <a:solidFill>
+                  <a:srgbClr val="FFFFFF"/>
+                </a:solidFill>
+                <a:latin typeface="Inter"/>
+              </a:rPr>
+              <a:t>Tudo conectado. Tudo provável.</a:t>
+            </a:r>
+          </a:p>
+        </p:txBody>
+      </p:sp>
+      <p:pic>
+        <p:nvPicPr>
+          <p:cNvPr id="5" name="Picture 4" descr="deck_trace.png"/>
+          <p:cNvPicPr>
+            <a:picLocks noChangeAspect="1"/>
+          </p:cNvPicPr>
+          <p:nvPr/>
+        </p:nvPicPr>
+        <p:blipFill>
+          <a:blip r:embed="rId2"/>
+          <a:stretch>
+            <a:fillRect/>
+          </a:stretch>
+        </p:blipFill>
+        <p:spPr>
+          <a:xfrm>
+            <a:off x="822960" y="1691640"/>
+            <a:ext cx="6949440" cy="4467497"/>
+          </a:xfrm>
+          <a:prstGeom prst="rect">
+            <a:avLst/>
+          </a:prstGeom>
+        </p:spPr>
+      </p:pic>
+      <p:sp>
+        <p:nvSpPr>
+          <p:cNvPr id="6" name="TextBox 5"/>
+          <p:cNvSpPr txBox="1"/>
+          <p:nvPr/>
+        </p:nvSpPr>
+        <p:spPr>
+          <a:xfrm>
+            <a:off x="8046720" y="1828800"/>
+            <a:ext cx="3474720" cy="365760"/>
+          </a:xfrm>
+          <a:prstGeom prst="rect">
+            <a:avLst/>
+          </a:prstGeom>
+          <a:noFill/>
+        </p:spPr>
+        <p:txBody>
+          <a:bodyPr wrap="square">
+            <a:spAutoFit/>
+          </a:bodyPr>
+          <a:lstStyle/>
+          <a:p>
+            <a:pPr algn="l">
+              <a:lnSpc>
+                <a:spcPct val="100000"/>
+              </a:lnSpc>
+            </a:pPr>
+            <a:r>
+              <a:rPr sz="1600" b="1">
+                <a:solidFill>
+                  <a:srgbClr val="38BDF8"/>
+                </a:solidFill>
+                <a:latin typeface="Inter"/>
+              </a:rPr>
+              <a:t>Grafo de proveniência</a:t>
+            </a:r>
+          </a:p>
+        </p:txBody>
+      </p:sp>
+      <p:sp>
+        <p:nvSpPr>
+          <p:cNvPr id="7" name="TextBox 6"/>
+          <p:cNvSpPr txBox="1"/>
+          <p:nvPr/>
+        </p:nvSpPr>
+        <p:spPr>
+          <a:xfrm>
+            <a:off x="8046720" y="2176272"/>
+            <a:ext cx="3474720" cy="777240"/>
+          </a:xfrm>
+          <a:prstGeom prst="rect">
+            <a:avLst/>
+          </a:prstGeom>
+          <a:noFill/>
+        </p:spPr>
+        <p:txBody>
+          <a:bodyPr wrap="square">
+            <a:spAutoFit/>
+          </a:bodyPr>
+          <a:lstStyle/>
+          <a:p>
+            <a:pPr algn="l">
+              <a:lnSpc>
+                <a:spcPct val="105000"/>
+              </a:lnSpc>
+            </a:pPr>
+            <a:r>
               <a:rPr sz="1200" b="0">
                 <a:solidFill>
                   <a:srgbClr val="8B98B8"/>
                 </a:solidFill>
                 <a:latin typeface="Inter"/>
               </a:rPr>
-              <a:t>autônomas · 0 intervenções humanas</a:t>
-            </a:r>
-          </a:p>
-        </p:txBody>
-      </p:sp>
-      <p:sp>
-        <p:nvSpPr>
-          <p:cNvPr id="9" name="Rounded Rectangle 8"/>
+              <a:t>KYC → KYA → quote → escrow → votos → dinheiro, clicável.</a:t>
+            </a:r>
+          </a:p>
+        </p:txBody>
+      </p:sp>
+      <p:sp>
+        <p:nvSpPr>
+          <p:cNvPr id="8" name="TextBox 7"/>
+          <p:cNvSpPr txBox="1"/>
+          <p:nvPr/>
+        </p:nvSpPr>
+        <p:spPr>
+          <a:xfrm>
+            <a:off x="8046720" y="2971800"/>
+            <a:ext cx="3474720" cy="365760"/>
+          </a:xfrm>
+          <a:prstGeom prst="rect">
+            <a:avLst/>
+          </a:prstGeom>
+          <a:noFill/>
+        </p:spPr>
+        <p:txBody>
+          <a:bodyPr wrap="square">
+            <a:spAutoFit/>
+          </a:bodyPr>
+          <a:lstStyle/>
+          <a:p>
+            <a:pPr algn="l">
+              <a:lnSpc>
+                <a:spcPct val="100000"/>
+              </a:lnSpc>
+            </a:pPr>
+            <a:r>
+              <a:rPr sz="1600" b="1">
+                <a:solidFill>
+                  <a:srgbClr val="38BDF8"/>
+                </a:solidFill>
+                <a:latin typeface="Inter"/>
+              </a:rPr>
+              <a:t>Trilha tamper-evident</a:t>
+            </a:r>
+          </a:p>
+        </p:txBody>
+      </p:sp>
+      <p:sp>
+        <p:nvSpPr>
+          <p:cNvPr id="9" name="TextBox 8"/>
+          <p:cNvSpPr txBox="1"/>
+          <p:nvPr/>
+        </p:nvSpPr>
+        <p:spPr>
+          <a:xfrm>
+            <a:off x="8046720" y="3319272"/>
+            <a:ext cx="3474720" cy="777240"/>
+          </a:xfrm>
+          <a:prstGeom prst="rect">
+            <a:avLst/>
+          </a:prstGeom>
+          <a:noFill/>
+        </p:spPr>
+        <p:txBody>
+          <a:bodyPr wrap="square">
+            <a:spAutoFit/>
+          </a:bodyPr>
+          <a:lstStyle/>
+          <a:p>
+            <a:pPr algn="l">
+              <a:lnSpc>
+                <a:spcPct val="105000"/>
+              </a:lnSpc>
+            </a:pPr>
+            <a:r>
+              <a:rPr sz="1200" b="0">
+                <a:solidFill>
+                  <a:srgbClr val="8B98B8"/>
+                </a:solidFill>
+                <a:latin typeface="Inter"/>
+              </a:rPr>
+              <a:t>Adultere 1 caractere — verify_chain aponta o seq exato.</a:t>
+            </a:r>
+          </a:p>
+        </p:txBody>
+      </p:sp>
+      <p:sp>
+        <p:nvSpPr>
+          <p:cNvPr id="10" name="TextBox 9"/>
+          <p:cNvSpPr txBox="1"/>
+          <p:nvPr/>
+        </p:nvSpPr>
+        <p:spPr>
+          <a:xfrm>
+            <a:off x="8046720" y="4114800"/>
+            <a:ext cx="3474720" cy="365760"/>
+          </a:xfrm>
+          <a:prstGeom prst="rect">
+            <a:avLst/>
+          </a:prstGeom>
+          <a:noFill/>
+        </p:spPr>
+        <p:txBody>
+          <a:bodyPr wrap="square">
+            <a:spAutoFit/>
+          </a:bodyPr>
+          <a:lstStyle/>
+          <a:p>
+            <a:pPr algn="l">
+              <a:lnSpc>
+                <a:spcPct val="100000"/>
+              </a:lnSpc>
+            </a:pPr>
+            <a:r>
+              <a:rPr sz="1600" b="1">
+                <a:solidFill>
+                  <a:srgbClr val="38BDF8"/>
+                </a:solidFill>
+                <a:latin typeface="Inter"/>
+              </a:rPr>
+              <a:t>/explain</a:t>
+            </a:r>
+          </a:p>
+        </p:txBody>
+      </p:sp>
+      <p:sp>
+        <p:nvSpPr>
+          <p:cNvPr id="11" name="TextBox 10"/>
+          <p:cNvSpPr txBox="1"/>
+          <p:nvPr/>
+        </p:nvSpPr>
+        <p:spPr>
+          <a:xfrm>
+            <a:off x="8046720" y="4462272"/>
+            <a:ext cx="3474720" cy="777240"/>
+          </a:xfrm>
+          <a:prstGeom prst="rect">
+            <a:avLst/>
+          </a:prstGeom>
+          <a:noFill/>
+        </p:spPr>
+        <p:txBody>
+          <a:bodyPr wrap="square">
+            <a:spAutoFit/>
+          </a:bodyPr>
+          <a:lstStyle/>
+          <a:p>
+            <a:pPr algn="l">
+              <a:lnSpc>
+                <a:spcPct val="105000"/>
+              </a:lnSpc>
+            </a:pPr>
+            <a:r>
+              <a:rPr sz="1200" b="0">
+                <a:solidFill>
+                  <a:srgbClr val="8B98B8"/>
+                </a:solidFill>
+                <a:latin typeface="Inter"/>
+              </a:rPr>
+              <a:t>Cada ação vem com o porquê derivado DOS DADOS — zero alucinação na auditoria.</a:t>
+            </a:r>
+          </a:p>
+        </p:txBody>
+      </p:sp>
+      <p:sp>
+        <p:nvSpPr>
+          <p:cNvPr id="12" name="TextBox 11"/>
+          <p:cNvSpPr txBox="1"/>
+          <p:nvPr/>
+        </p:nvSpPr>
+        <p:spPr>
+          <a:xfrm>
+            <a:off x="8046720" y="5257800"/>
+            <a:ext cx="3474720" cy="365760"/>
+          </a:xfrm>
+          <a:prstGeom prst="rect">
+            <a:avLst/>
+          </a:prstGeom>
+          <a:noFill/>
+        </p:spPr>
+        <p:txBody>
+          <a:bodyPr wrap="square">
+            <a:spAutoFit/>
+          </a:bodyPr>
+          <a:lstStyle/>
+          <a:p>
+            <a:pPr algn="l">
+              <a:lnSpc>
+                <a:spcPct val="100000"/>
+              </a:lnSpc>
+            </a:pPr>
+            <a:r>
+              <a:rPr sz="1600" b="1">
+                <a:solidFill>
+                  <a:srgbClr val="38BDF8"/>
+                </a:solidFill>
+                <a:latin typeface="Inter"/>
+              </a:rPr>
+              <a:t>Compliance report</a:t>
+            </a:r>
+          </a:p>
+        </p:txBody>
+      </p:sp>
+      <p:sp>
+        <p:nvSpPr>
+          <p:cNvPr id="13" name="TextBox 12"/>
+          <p:cNvSpPr txBox="1"/>
+          <p:nvPr/>
+        </p:nvSpPr>
+        <p:spPr>
+          <a:xfrm>
+            <a:off x="8046720" y="5605272"/>
+            <a:ext cx="3474720" cy="777240"/>
+          </a:xfrm>
+          <a:prstGeom prst="rect">
+            <a:avLst/>
+          </a:prstGeom>
+          <a:noFill/>
+        </p:spPr>
+        <p:txBody>
+          <a:bodyPr wrap="square">
+            <a:spAutoFit/>
+          </a:bodyPr>
+          <a:lstStyle/>
+          <a:p>
+            <a:pPr algn="l">
+              <a:lnSpc>
+                <a:spcPct val="105000"/>
+              </a:lnSpc>
+            </a:pPr>
+            <a:r>
+              <a:rPr sz="1200" b="0">
+                <a:solidFill>
+                  <a:srgbClr val="8B98B8"/>
+                </a:solidFill>
+                <a:latin typeface="Inter"/>
+              </a:rPr>
+              <a:t>Markdown que auditor lê, não log que operador finge.</a:t>
+            </a:r>
+          </a:p>
+        </p:txBody>
+      </p:sp>
+    </p:spTree>
+  </p:cSld>
+  <p:clrMapOvr>
+    <a:masterClrMapping/>
+  </p:clrMapOvr>
+</p:sld>
+</file>
+
+<file path=ppt/slides/slide6.xml><?xml version="1.0" encoding="utf-8"?>
+<p:sld xmlns:a="http://schemas.openxmlformats.org/drawingml/2006/main" xmlns:r="http://schemas.openxmlformats.org/officeDocument/2006/relationships" xmlns:p="http://schemas.openxmlformats.org/presentationml/2006/main">
+  <p:cSld>
+    <p:spTree>
+      <p:nvGrpSpPr>
+        <p:cNvPr id="1" name=""/>
+        <p:cNvGrpSpPr/>
+        <p:nvPr/>
+      </p:nvGrpSpPr>
+      <p:grpSpPr>
+        <a:xfrm>
+          <a:off x="0" y="0"/>
+          <a:ext cx="0" cy="0"/>
+          <a:chOff x="0" y="0"/>
+          <a:chExt cx="0" cy="0"/>
+        </a:xfrm>
+      </p:grpSpPr>
+      <p:sp>
+        <p:nvSpPr>
+          <p:cNvPr id="2" name="Rectangle 1"/>
           <p:cNvSpPr/>
           <p:nvPr/>
         </p:nvSpPr>
         <p:spPr>
           <a:xfrm>
-            <a:off x="8046720" y="2898648"/>
-            <a:ext cx="3383280" cy="960120"/>
-          </a:xfrm>
-          <a:prstGeom prst="roundRect">
-            <a:avLst>
-              <a:gd name="adj" fmla="val 6000"/>
-            </a:avLst>
+            <a:off x="0" y="0"/>
+            <a:ext cx="12191695" cy="6858000"/>
+          </a:xfrm>
+          <a:prstGeom prst="rect">
+            <a:avLst/>
           </a:prstGeom>
           <a:solidFill>
-            <a:srgbClr val="111731"/>
+            <a:srgbClr val="0A0E1E"/>
           </a:solidFill>
-          <a:ln w="12700">
-            <a:solidFill>
-              <a:srgbClr val="1C2640"/>
-            </a:solidFill>
+          <a:ln>
+            <a:noFill/>
           </a:ln>
           <a:effectLst/>
         </p:spPr>
@@ -5610,19 +6830,20 @@
           <a:lstStyle/>
           <a:p>
             <a:pPr algn="ctr"/>
-          </a:p>
-        </p:txBody>
-      </p:sp>
-      <p:sp>
-        <p:nvSpPr>
-          <p:cNvPr id="10" name="TextBox 9"/>
+            <a:endParaRPr/>
+          </a:p>
+        </p:txBody>
+      </p:sp>
+      <p:sp>
+        <p:nvSpPr>
+          <p:cNvPr id="3" name="TextBox 2"/>
           <p:cNvSpPr txBox="1"/>
           <p:nvPr/>
         </p:nvSpPr>
         <p:spPr>
           <a:xfrm>
-            <a:off x="8229600" y="2990088"/>
-            <a:ext cx="3108960" cy="411480"/>
+            <a:off x="822960" y="548640"/>
+            <a:ext cx="5486400" cy="365760"/>
           </a:xfrm>
           <a:prstGeom prst="rect">
             <a:avLst/>
@@ -5641,27 +6862,27 @@
               </a:lnSpc>
             </a:pPr>
             <a:r>
-              <a:rPr sz="2100" b="1">
-                <a:solidFill>
-                  <a:srgbClr val="FBBF24"/>
-                </a:solidFill>
-                <a:latin typeface="Inter"/>
-              </a:rPr>
-              <a:t>$0.0047</a:t>
-            </a:r>
-          </a:p>
-        </p:txBody>
-      </p:sp>
-      <p:sp>
-        <p:nvSpPr>
-          <p:cNvPr id="11" name="TextBox 10"/>
+              <a:rPr sz="1300" b="1">
+                <a:solidFill>
+                  <a:srgbClr val="665EFD"/>
+                </a:solidFill>
+                <a:latin typeface="Inter"/>
+              </a:rPr>
+              <a:t>O NEGÓCIO</a:t>
+            </a:r>
+          </a:p>
+        </p:txBody>
+      </p:sp>
+      <p:sp>
+        <p:nvSpPr>
+          <p:cNvPr id="4" name="TextBox 3"/>
           <p:cNvSpPr txBox="1"/>
           <p:nvPr/>
         </p:nvSpPr>
         <p:spPr>
           <a:xfrm>
-            <a:off x="8229600" y="3429000"/>
-            <a:ext cx="3108960" cy="365760"/>
+            <a:off x="822960" y="960120"/>
+            <a:ext cx="10515600" cy="640080"/>
           </a:xfrm>
           <a:prstGeom prst="rect">
             <a:avLst/>
@@ -5680,40 +6901,776 @@
               </a:lnSpc>
             </a:pPr>
             <a:r>
-              <a:rPr sz="1200" b="0">
-                <a:solidFill>
-                  <a:srgbClr val="8B98B8"/>
-                </a:solidFill>
-                <a:latin typeface="Inter"/>
-              </a:rPr>
-              <a:t>de inferência — ~$0.001/decisão</a:t>
-            </a:r>
-          </a:p>
-        </p:txBody>
-      </p:sp>
-      <p:sp>
-        <p:nvSpPr>
-          <p:cNvPr id="12" name="Rounded Rectangle 11"/>
+              <a:rPr sz="3400" b="1">
+                <a:solidFill>
+                  <a:srgbClr val="FFFFFF"/>
+                </a:solidFill>
+                <a:latin typeface="Inter"/>
+              </a:rPr>
+              <a:t>Quem tem o dinheiro em risco paga.</a:t>
+            </a:r>
+          </a:p>
+        </p:txBody>
+      </p:sp>
+      <p:sp>
+        <p:nvSpPr>
+          <p:cNvPr id="21" name="TextBox 20">
+            <a:extLst>
+              <a:ext uri="{FF2B5EF4-FFF2-40B4-BE49-F238E27FC236}">
+                <a16:creationId xmlns:a16="http://schemas.microsoft.com/office/drawing/2014/main" id="{162234E5-BEF2-180C-9DBC-A90871E03314}"/>
+              </a:ext>
+            </a:extLst>
+          </p:cNvPr>
+          <p:cNvSpPr txBox="1"/>
+          <p:nvPr/>
+        </p:nvSpPr>
+        <p:spPr>
+          <a:xfrm>
+            <a:off x="822960" y="2697480"/>
+            <a:ext cx="914400" cy="457200"/>
+          </a:xfrm>
+          <a:prstGeom prst="rect">
+            <a:avLst/>
+          </a:prstGeom>
+          <a:noFill/>
+        </p:spPr>
+        <p:txBody>
+          <a:bodyPr wrap="square">
+            <a:spAutoFit/>
+          </a:bodyPr>
+          <a:lstStyle/>
+          <a:p>
+            <a:pPr algn="l">
+              <a:lnSpc>
+                <a:spcPct val="100000"/>
+              </a:lnSpc>
+            </a:pPr>
+            <a:r>
+              <a:rPr sz="2200" b="1">
+                <a:solidFill>
+                  <a:srgbClr val="38BDF8"/>
+                </a:solidFill>
+                <a:latin typeface="Inter"/>
+              </a:rPr>
+              <a:t>01</a:t>
+            </a:r>
+          </a:p>
+        </p:txBody>
+      </p:sp>
+      <p:sp>
+        <p:nvSpPr>
+          <p:cNvPr id="23" name="TextBox 22">
+            <a:extLst>
+              <a:ext uri="{FF2B5EF4-FFF2-40B4-BE49-F238E27FC236}">
+                <a16:creationId xmlns:a16="http://schemas.microsoft.com/office/drawing/2014/main" id="{D010BC35-ADD8-6C3C-F5BD-8597FE73C8FF}"/>
+              </a:ext>
+            </a:extLst>
+          </p:cNvPr>
+          <p:cNvSpPr txBox="1"/>
+          <p:nvPr/>
+        </p:nvSpPr>
+        <p:spPr>
+          <a:xfrm>
+            <a:off x="1544320" y="2740152"/>
+            <a:ext cx="9875520" cy="369332"/>
+          </a:xfrm>
+          <a:prstGeom prst="rect">
+            <a:avLst/>
+          </a:prstGeom>
+          <a:noFill/>
+        </p:spPr>
+        <p:txBody>
+          <a:bodyPr wrap="square" lIns="91440" tIns="45720" rIns="91440" bIns="45720" anchor="t">
+            <a:spAutoFit/>
+          </a:bodyPr>
+          <a:lstStyle/>
+          <a:p>
+            <a:r>
+              <a:rPr lang="en-US" b="1" dirty="0">
+                <a:solidFill>
+                  <a:srgbClr val="FFFFFF"/>
+                </a:solidFill>
+                <a:latin typeface="Inter"/>
+              </a:rPr>
+              <a:t>Fintechs, </a:t>
+            </a:r>
+            <a:r>
+              <a:rPr lang="en-US" b="1" dirty="0" err="1">
+                <a:solidFill>
+                  <a:srgbClr val="FFFFFF"/>
+                </a:solidFill>
+                <a:latin typeface="Inter"/>
+              </a:rPr>
+              <a:t>bancos</a:t>
+            </a:r>
+            <a:r>
+              <a:rPr lang="en-US" b="1" dirty="0">
+                <a:solidFill>
+                  <a:srgbClr val="FFFFFF"/>
+                </a:solidFill>
+                <a:latin typeface="Inter"/>
+              </a:rPr>
+              <a:t> </a:t>
+            </a:r>
+            <a:r>
+              <a:rPr lang="en-US" b="1" dirty="0" err="1">
+                <a:solidFill>
+                  <a:srgbClr val="FFFFFF"/>
+                </a:solidFill>
+                <a:latin typeface="Inter"/>
+              </a:rPr>
+              <a:t>digitais</a:t>
+            </a:r>
+            <a:r>
+              <a:rPr lang="en-US" b="1" dirty="0">
+                <a:solidFill>
+                  <a:srgbClr val="FFFFFF"/>
+                </a:solidFill>
+                <a:latin typeface="Inter"/>
+              </a:rPr>
+              <a:t> e enterprises </a:t>
+            </a:r>
+            <a:r>
+              <a:rPr lang="en-US" b="1" dirty="0" err="1">
+                <a:solidFill>
+                  <a:srgbClr val="FFFFFF"/>
+                </a:solidFill>
+                <a:latin typeface="Inter"/>
+              </a:rPr>
+              <a:t>pilotando</a:t>
+            </a:r>
+            <a:r>
+              <a:rPr lang="en-US" b="1" dirty="0">
+                <a:solidFill>
+                  <a:srgbClr val="FFFFFF"/>
+                </a:solidFill>
+                <a:latin typeface="Inter"/>
+              </a:rPr>
+              <a:t> </a:t>
+            </a:r>
+            <a:r>
+              <a:rPr lang="en-US" b="1" dirty="0" err="1">
+                <a:solidFill>
+                  <a:srgbClr val="FFFFFF"/>
+                </a:solidFill>
+                <a:latin typeface="Inter"/>
+              </a:rPr>
+              <a:t>pagamentos</a:t>
+            </a:r>
+            <a:r>
+              <a:rPr lang="en-US" b="1" dirty="0">
+                <a:solidFill>
+                  <a:srgbClr val="FFFFFF"/>
+                </a:solidFill>
+                <a:latin typeface="Inter"/>
+              </a:rPr>
+              <a:t> agentic (A2A / x402 / AP2)</a:t>
+            </a:r>
+            <a:r>
+              <a:rPr b="1" dirty="0">
+                <a:solidFill>
+                  <a:srgbClr val="FFFFFF"/>
+                </a:solidFill>
+                <a:latin typeface="Inter"/>
+              </a:rPr>
+              <a:t>.</a:t>
+            </a:r>
+          </a:p>
+        </p:txBody>
+      </p:sp>
+      <p:sp>
+        <p:nvSpPr>
+          <p:cNvPr id="25" name="TextBox 24">
+            <a:extLst>
+              <a:ext uri="{FF2B5EF4-FFF2-40B4-BE49-F238E27FC236}">
+                <a16:creationId xmlns:a16="http://schemas.microsoft.com/office/drawing/2014/main" id="{A1D85A4E-F018-D6FA-938E-BF00B363BB63}"/>
+              </a:ext>
+            </a:extLst>
+          </p:cNvPr>
+          <p:cNvSpPr txBox="1"/>
+          <p:nvPr/>
+        </p:nvSpPr>
+        <p:spPr>
+          <a:xfrm>
+            <a:off x="822960" y="3708399"/>
+            <a:ext cx="914400" cy="457200"/>
+          </a:xfrm>
+          <a:prstGeom prst="rect">
+            <a:avLst/>
+          </a:prstGeom>
+          <a:noFill/>
+        </p:spPr>
+        <p:txBody>
+          <a:bodyPr wrap="square">
+            <a:spAutoFit/>
+          </a:bodyPr>
+          <a:lstStyle/>
+          <a:p>
+            <a:pPr algn="l">
+              <a:lnSpc>
+                <a:spcPct val="100000"/>
+              </a:lnSpc>
+            </a:pPr>
+            <a:r>
+              <a:rPr sz="2200" b="1">
+                <a:solidFill>
+                  <a:srgbClr val="FBBF24"/>
+                </a:solidFill>
+                <a:latin typeface="Inter"/>
+              </a:rPr>
+              <a:t>02</a:t>
+            </a:r>
+          </a:p>
+        </p:txBody>
+      </p:sp>
+      <p:sp>
+        <p:nvSpPr>
+          <p:cNvPr id="26" name="TextBox 25">
+            <a:extLst>
+              <a:ext uri="{FF2B5EF4-FFF2-40B4-BE49-F238E27FC236}">
+                <a16:creationId xmlns:a16="http://schemas.microsoft.com/office/drawing/2014/main" id="{58E47D43-D474-E0AA-0DFE-AD117ABF2B56}"/>
+              </a:ext>
+            </a:extLst>
+          </p:cNvPr>
+          <p:cNvSpPr txBox="1"/>
+          <p:nvPr/>
+        </p:nvSpPr>
+        <p:spPr>
+          <a:xfrm>
+            <a:off x="1544320" y="3756151"/>
+            <a:ext cx="9875520" cy="369332"/>
+          </a:xfrm>
+          <a:prstGeom prst="rect">
+            <a:avLst/>
+          </a:prstGeom>
+          <a:noFill/>
+        </p:spPr>
+        <p:txBody>
+          <a:bodyPr wrap="square" lIns="91440" tIns="45720" rIns="91440" bIns="45720" anchor="t">
+            <a:spAutoFit/>
+          </a:bodyPr>
+          <a:lstStyle/>
+          <a:p>
+            <a:r>
+              <a:rPr lang="en-US" b="1" dirty="0">
+                <a:solidFill>
+                  <a:srgbClr val="FFFFFF"/>
+                </a:solidFill>
+                <a:latin typeface="Inter"/>
+              </a:rPr>
+              <a:t>Quem </a:t>
+            </a:r>
+            <a:r>
+              <a:rPr lang="en-US" b="1" dirty="0" err="1">
+                <a:solidFill>
+                  <a:srgbClr val="FFFFFF"/>
+                </a:solidFill>
+                <a:latin typeface="Inter"/>
+              </a:rPr>
+              <a:t>toma</a:t>
+            </a:r>
+            <a:r>
+              <a:rPr lang="en-US" b="1" dirty="0">
+                <a:solidFill>
+                  <a:srgbClr val="FFFFFF"/>
+                </a:solidFill>
+                <a:latin typeface="Inter"/>
+              </a:rPr>
+              <a:t> a </a:t>
+            </a:r>
+            <a:r>
+              <a:rPr lang="en-US" b="1" dirty="0" err="1">
+                <a:solidFill>
+                  <a:srgbClr val="FFFFFF"/>
+                </a:solidFill>
+                <a:latin typeface="Inter"/>
+              </a:rPr>
+              <a:t>decisão</a:t>
+            </a:r>
+            <a:r>
+              <a:rPr lang="en-US" b="1" dirty="0">
+                <a:solidFill>
+                  <a:srgbClr val="FFFFFF"/>
+                </a:solidFill>
+                <a:latin typeface="Inter"/>
+              </a:rPr>
+              <a:t>: Head de </a:t>
+            </a:r>
+            <a:r>
+              <a:rPr lang="en-US" b="1" dirty="0" err="1">
+                <a:solidFill>
+                  <a:srgbClr val="FFFFFF"/>
+                </a:solidFill>
+                <a:latin typeface="Inter"/>
+              </a:rPr>
+              <a:t>plataforma</a:t>
+            </a:r>
+            <a:r>
+              <a:rPr lang="en-US" b="1" dirty="0">
+                <a:solidFill>
+                  <a:srgbClr val="FFFFFF"/>
+                </a:solidFill>
+                <a:latin typeface="Inter"/>
+              </a:rPr>
+              <a:t> de IA + Compliance Officer</a:t>
+            </a:r>
+            <a:endParaRPr dirty="0"/>
+          </a:p>
+        </p:txBody>
+      </p:sp>
+      <p:sp>
+        <p:nvSpPr>
+          <p:cNvPr id="28" name="TextBox 27">
+            <a:extLst>
+              <a:ext uri="{FF2B5EF4-FFF2-40B4-BE49-F238E27FC236}">
+                <a16:creationId xmlns:a16="http://schemas.microsoft.com/office/drawing/2014/main" id="{C08CDFDE-D680-C143-6E93-A6D6A8C6CDE1}"/>
+              </a:ext>
+            </a:extLst>
+          </p:cNvPr>
+          <p:cNvSpPr txBox="1"/>
+          <p:nvPr/>
+        </p:nvSpPr>
+        <p:spPr>
+          <a:xfrm>
+            <a:off x="822960" y="4759960"/>
+            <a:ext cx="914400" cy="457200"/>
+          </a:xfrm>
+          <a:prstGeom prst="rect">
+            <a:avLst/>
+          </a:prstGeom>
+          <a:noFill/>
+        </p:spPr>
+        <p:txBody>
+          <a:bodyPr wrap="square">
+            <a:spAutoFit/>
+          </a:bodyPr>
+          <a:lstStyle/>
+          <a:p>
+            <a:pPr algn="l">
+              <a:lnSpc>
+                <a:spcPct val="100000"/>
+              </a:lnSpc>
+            </a:pPr>
+            <a:r>
+              <a:rPr sz="2200" b="1">
+                <a:solidFill>
+                  <a:srgbClr val="F87171"/>
+                </a:solidFill>
+                <a:latin typeface="Inter"/>
+              </a:rPr>
+              <a:t>03</a:t>
+            </a:r>
+          </a:p>
+        </p:txBody>
+      </p:sp>
+      <p:sp>
+        <p:nvSpPr>
+          <p:cNvPr id="29" name="TextBox 28">
+            <a:extLst>
+              <a:ext uri="{FF2B5EF4-FFF2-40B4-BE49-F238E27FC236}">
+                <a16:creationId xmlns:a16="http://schemas.microsoft.com/office/drawing/2014/main" id="{F5B5726E-4238-0623-301B-2DE4DC906DC0}"/>
+              </a:ext>
+            </a:extLst>
+          </p:cNvPr>
+          <p:cNvSpPr txBox="1"/>
+          <p:nvPr/>
+        </p:nvSpPr>
+        <p:spPr>
+          <a:xfrm>
+            <a:off x="1544320" y="4680710"/>
+            <a:ext cx="9875520" cy="646331"/>
+          </a:xfrm>
+          <a:prstGeom prst="rect">
+            <a:avLst/>
+          </a:prstGeom>
+          <a:noFill/>
+        </p:spPr>
+        <p:txBody>
+          <a:bodyPr wrap="square" lIns="91440" tIns="45720" rIns="91440" bIns="45720" anchor="t">
+            <a:spAutoFit/>
+          </a:bodyPr>
+          <a:lstStyle/>
+          <a:p>
+            <a:r>
+              <a:rPr lang="en-US" b="1" dirty="0">
+                <a:solidFill>
+                  <a:srgbClr val="FFFFFF"/>
+                </a:solidFill>
+                <a:latin typeface="Inter"/>
+              </a:rPr>
+              <a:t>A </a:t>
+            </a:r>
+            <a:r>
+              <a:rPr lang="en-US" b="1" dirty="0" err="1">
+                <a:solidFill>
+                  <a:srgbClr val="FFFFFF"/>
+                </a:solidFill>
+                <a:latin typeface="Inter"/>
+              </a:rPr>
+              <a:t>dor</a:t>
+            </a:r>
+            <a:r>
+              <a:rPr lang="en-US" b="1" dirty="0">
+                <a:solidFill>
+                  <a:srgbClr val="FFFFFF"/>
+                </a:solidFill>
+                <a:latin typeface="Inter"/>
+              </a:rPr>
+              <a:t>: “meu </a:t>
+            </a:r>
+            <a:r>
+              <a:rPr lang="en-US" b="1" dirty="0" err="1">
+                <a:solidFill>
+                  <a:srgbClr val="FFFFFF"/>
+                </a:solidFill>
+                <a:latin typeface="Inter"/>
+              </a:rPr>
+              <a:t>agente</a:t>
+            </a:r>
+            <a:r>
+              <a:rPr lang="en-US" b="1" dirty="0">
+                <a:solidFill>
+                  <a:srgbClr val="FFFFFF"/>
+                </a:solidFill>
+                <a:latin typeface="Inter"/>
+              </a:rPr>
+              <a:t> </a:t>
+            </a:r>
+            <a:r>
+              <a:rPr lang="en-US" b="1" dirty="0" err="1">
+                <a:solidFill>
+                  <a:srgbClr val="FFFFFF"/>
+                </a:solidFill>
+                <a:latin typeface="Inter"/>
+              </a:rPr>
+              <a:t>paga</a:t>
+            </a:r>
+            <a:r>
+              <a:rPr lang="en-US" b="1" dirty="0">
+                <a:solidFill>
+                  <a:srgbClr val="FFFFFF"/>
+                </a:solidFill>
+                <a:latin typeface="Inter"/>
+              </a:rPr>
+              <a:t> o </a:t>
+            </a:r>
+            <a:r>
+              <a:rPr lang="en-US" b="1" dirty="0" err="1">
+                <a:solidFill>
+                  <a:srgbClr val="FFFFFF"/>
+                </a:solidFill>
+                <a:latin typeface="Inter"/>
+              </a:rPr>
+              <a:t>agente</a:t>
+            </a:r>
+            <a:r>
+              <a:rPr lang="en-US" b="1" dirty="0">
+                <a:solidFill>
+                  <a:srgbClr val="FFFFFF"/>
+                </a:solidFill>
+                <a:latin typeface="Inter"/>
+              </a:rPr>
+              <a:t> de </a:t>
+            </a:r>
+            <a:r>
+              <a:rPr lang="en-US" b="1" dirty="0" err="1">
+                <a:solidFill>
+                  <a:srgbClr val="FFFFFF"/>
+                </a:solidFill>
+                <a:latin typeface="Inter"/>
+              </a:rPr>
+              <a:t>outra</a:t>
+            </a:r>
+            <a:r>
+              <a:rPr lang="en-US" b="1" dirty="0">
+                <a:solidFill>
+                  <a:srgbClr val="FFFFFF"/>
+                </a:solidFill>
+                <a:latin typeface="Inter"/>
+              </a:rPr>
+              <a:t> </a:t>
+            </a:r>
+            <a:r>
+              <a:rPr lang="en-US" b="1" dirty="0" err="1">
+                <a:solidFill>
+                  <a:srgbClr val="FFFFFF"/>
+                </a:solidFill>
+                <a:latin typeface="Inter"/>
+              </a:rPr>
+              <a:t>empresa</a:t>
+            </a:r>
+            <a:r>
+              <a:rPr lang="en-US" b="1" dirty="0">
+                <a:solidFill>
+                  <a:srgbClr val="FFFFFF"/>
+                </a:solidFill>
+                <a:latin typeface="Inter"/>
+              </a:rPr>
+              <a:t> e </a:t>
+            </a:r>
+            <a:r>
+              <a:rPr lang="en-US" b="1" dirty="0" err="1">
+                <a:solidFill>
+                  <a:srgbClr val="FFFFFF"/>
+                </a:solidFill>
+                <a:latin typeface="Inter"/>
+              </a:rPr>
+              <a:t>eu</a:t>
+            </a:r>
+            <a:r>
+              <a:rPr lang="en-US" b="1" dirty="0">
+                <a:solidFill>
+                  <a:srgbClr val="FFFFFF"/>
+                </a:solidFill>
+                <a:latin typeface="Inter"/>
+              </a:rPr>
+              <a:t> </a:t>
+            </a:r>
+            <a:r>
+              <a:rPr lang="en-US" b="1" dirty="0" err="1">
+                <a:solidFill>
+                  <a:srgbClr val="FFFFFF"/>
+                </a:solidFill>
+                <a:latin typeface="Inter"/>
+              </a:rPr>
+              <a:t>não</a:t>
+            </a:r>
+            <a:r>
+              <a:rPr lang="en-US" b="1" dirty="0">
+                <a:solidFill>
+                  <a:srgbClr val="FFFFFF"/>
+                </a:solidFill>
+                <a:latin typeface="Inter"/>
+              </a:rPr>
+              <a:t> </a:t>
+            </a:r>
+            <a:r>
+              <a:rPr lang="en-US" b="1" dirty="0" err="1">
+                <a:solidFill>
+                  <a:srgbClr val="FFFFFF"/>
+                </a:solidFill>
+                <a:latin typeface="Inter"/>
+              </a:rPr>
+              <a:t>tenho</a:t>
+            </a:r>
+            <a:r>
+              <a:rPr lang="en-US" b="1" dirty="0">
+                <a:solidFill>
+                  <a:srgbClr val="FFFFFF"/>
+                </a:solidFill>
+                <a:latin typeface="Inter"/>
+              </a:rPr>
+              <a:t> </a:t>
+            </a:r>
+            <a:r>
+              <a:rPr lang="en-US" b="1" dirty="0" err="1">
+                <a:solidFill>
+                  <a:srgbClr val="FFFFFF"/>
+                </a:solidFill>
+                <a:latin typeface="Inter"/>
+              </a:rPr>
+              <a:t>como</a:t>
+            </a:r>
+            <a:r>
+              <a:rPr lang="en-US" b="1" dirty="0">
+                <a:solidFill>
+                  <a:srgbClr val="FFFFFF"/>
+                </a:solidFill>
+                <a:latin typeface="Inter"/>
+              </a:rPr>
+              <a:t> </a:t>
+            </a:r>
+            <a:r>
+              <a:rPr lang="en-US" b="1" dirty="0" err="1">
+                <a:solidFill>
+                  <a:srgbClr val="FFFFFF"/>
+                </a:solidFill>
+                <a:latin typeface="Inter"/>
+              </a:rPr>
+              <a:t>provar</a:t>
+            </a:r>
+            <a:r>
+              <a:rPr lang="en-US" b="1" dirty="0">
+                <a:solidFill>
+                  <a:srgbClr val="FFFFFF"/>
+                </a:solidFill>
+                <a:latin typeface="Inter"/>
+              </a:rPr>
+              <a:t> para o board e para o </a:t>
+            </a:r>
+            <a:r>
+              <a:rPr lang="en-US" b="1" dirty="0" err="1">
+                <a:solidFill>
+                  <a:srgbClr val="FFFFFF"/>
+                </a:solidFill>
+                <a:latin typeface="Inter"/>
+              </a:rPr>
+              <a:t>regulador</a:t>
+            </a:r>
+            <a:r>
+              <a:rPr lang="en-US" b="1" dirty="0">
+                <a:solidFill>
+                  <a:srgbClr val="FFFFFF"/>
+                </a:solidFill>
+                <a:latin typeface="Inter"/>
+              </a:rPr>
+              <a:t> </a:t>
+            </a:r>
+            <a:r>
+              <a:rPr lang="en-US" b="1" dirty="0" err="1">
+                <a:solidFill>
+                  <a:srgbClr val="FFFFFF"/>
+                </a:solidFill>
+                <a:latin typeface="Inter"/>
+              </a:rPr>
+              <a:t>que</a:t>
+            </a:r>
+            <a:r>
+              <a:rPr lang="en-US" b="1" dirty="0">
+                <a:solidFill>
+                  <a:srgbClr val="FFFFFF"/>
+                </a:solidFill>
+                <a:latin typeface="Inter"/>
+              </a:rPr>
+              <a:t> o </a:t>
+            </a:r>
+            <a:r>
+              <a:rPr lang="en-US" b="1" dirty="0" err="1">
+                <a:solidFill>
+                  <a:srgbClr val="FFFFFF"/>
+                </a:solidFill>
+                <a:latin typeface="Inter"/>
+              </a:rPr>
+              <a:t>trabalho</a:t>
+            </a:r>
+            <a:r>
+              <a:rPr lang="en-US" b="1" dirty="0">
+                <a:solidFill>
+                  <a:srgbClr val="FFFFFF"/>
+                </a:solidFill>
+                <a:latin typeface="Inter"/>
+              </a:rPr>
+              <a:t> </a:t>
+            </a:r>
+            <a:r>
+              <a:rPr lang="en-US" b="1" dirty="0" err="1">
+                <a:solidFill>
+                  <a:srgbClr val="FFFFFF"/>
+                </a:solidFill>
+                <a:latin typeface="Inter"/>
+              </a:rPr>
+              <a:t>foi</a:t>
+            </a:r>
+            <a:r>
+              <a:rPr lang="en-US" b="1" dirty="0">
+                <a:solidFill>
+                  <a:srgbClr val="FFFFFF"/>
+                </a:solidFill>
+                <a:latin typeface="Inter"/>
+              </a:rPr>
+              <a:t> </a:t>
+            </a:r>
+            <a:r>
+              <a:rPr lang="en-US" b="1" dirty="0" err="1">
+                <a:solidFill>
+                  <a:srgbClr val="FFFFFF"/>
+                </a:solidFill>
+                <a:latin typeface="Inter"/>
+              </a:rPr>
+              <a:t>verificado</a:t>
+            </a:r>
+            <a:r>
+              <a:rPr lang="en-US" b="1" dirty="0">
+                <a:solidFill>
+                  <a:srgbClr val="FFFFFF"/>
+                </a:solidFill>
+                <a:latin typeface="Inter"/>
+              </a:rPr>
+              <a:t>, </a:t>
+            </a:r>
+            <a:r>
+              <a:rPr lang="en-US" b="1" dirty="0" err="1">
+                <a:solidFill>
+                  <a:srgbClr val="FFFFFF"/>
+                </a:solidFill>
+                <a:latin typeface="Inter"/>
+              </a:rPr>
+              <a:t>especialmente</a:t>
+            </a:r>
+            <a:r>
+              <a:rPr lang="en-US" b="1" dirty="0">
+                <a:solidFill>
+                  <a:srgbClr val="FFFFFF"/>
+                </a:solidFill>
+                <a:latin typeface="Inter"/>
+              </a:rPr>
+              <a:t> de forma </a:t>
+            </a:r>
+            <a:r>
+              <a:rPr lang="en-US" b="1" dirty="0" err="1">
+                <a:solidFill>
+                  <a:srgbClr val="FFFFFF"/>
+                </a:solidFill>
+                <a:latin typeface="Inter"/>
+              </a:rPr>
+              <a:t>escalável</a:t>
+            </a:r>
+            <a:r>
+              <a:rPr lang="en-US" b="1" dirty="0">
+                <a:solidFill>
+                  <a:srgbClr val="FFFFFF"/>
+                </a:solidFill>
+                <a:latin typeface="Inter"/>
+              </a:rPr>
+              <a:t>”</a:t>
+            </a:r>
+          </a:p>
+        </p:txBody>
+      </p:sp>
+    </p:spTree>
+  </p:cSld>
+  <p:clrMapOvr>
+    <a:masterClrMapping/>
+  </p:clrMapOvr>
+</p:sld>
+</file>
+
+<file path=ppt/slides/slide7.xml><?xml version="1.0" encoding="utf-8"?>
+<p:sld xmlns:a="http://schemas.openxmlformats.org/drawingml/2006/main" xmlns:r="http://schemas.openxmlformats.org/officeDocument/2006/relationships" xmlns:p="http://schemas.openxmlformats.org/presentationml/2006/main">
+  <p:cSld>
+    <p:spTree>
+      <p:nvGrpSpPr>
+        <p:cNvPr id="1" name=""/>
+        <p:cNvGrpSpPr/>
+        <p:nvPr/>
+      </p:nvGrpSpPr>
+      <p:grpSpPr>
+        <a:xfrm>
+          <a:off x="0" y="0"/>
+          <a:ext cx="0" cy="0"/>
+          <a:chOff x="0" y="0"/>
+          <a:chExt cx="0" cy="0"/>
+        </a:xfrm>
+      </p:grpSpPr>
+      <p:sp>
+        <p:nvSpPr>
+          <p:cNvPr id="2" name="Rectangle 1"/>
           <p:cNvSpPr/>
           <p:nvPr/>
         </p:nvSpPr>
         <p:spPr>
           <a:xfrm>
-            <a:off x="8046720" y="4014215"/>
-            <a:ext cx="3383280" cy="960120"/>
-          </a:xfrm>
-          <a:prstGeom prst="roundRect">
-            <a:avLst>
-              <a:gd name="adj" fmla="val 6000"/>
-            </a:avLst>
+            <a:off x="0" y="0"/>
+            <a:ext cx="12191695" cy="6858000"/>
+          </a:xfrm>
+          <a:prstGeom prst="rect">
+            <a:avLst/>
           </a:prstGeom>
           <a:solidFill>
-            <a:srgbClr val="111731"/>
+            <a:srgbClr val="0A0E1E"/>
           </a:solidFill>
-          <a:ln w="12700">
-            <a:solidFill>
-              <a:srgbClr val="1C2640"/>
-            </a:solidFill>
+          <a:ln>
+            <a:noFill/>
           </a:ln>
           <a:effectLst/>
         </p:spPr>
@@ -5736,19 +7693,20 @@
           <a:lstStyle/>
           <a:p>
             <a:pPr algn="ctr"/>
-          </a:p>
-        </p:txBody>
-      </p:sp>
-      <p:sp>
-        <p:nvSpPr>
-          <p:cNvPr id="13" name="TextBox 12"/>
+            <a:endParaRPr/>
+          </a:p>
+        </p:txBody>
+      </p:sp>
+      <p:sp>
+        <p:nvSpPr>
+          <p:cNvPr id="3" name="TextBox 2"/>
           <p:cNvSpPr txBox="1"/>
           <p:nvPr/>
         </p:nvSpPr>
         <p:spPr>
           <a:xfrm>
-            <a:off x="8229600" y="4105655"/>
-            <a:ext cx="3108960" cy="411480"/>
+            <a:off x="822960" y="640080"/>
+            <a:ext cx="5486400" cy="365760"/>
           </a:xfrm>
           <a:prstGeom prst="rect">
             <a:avLst/>
@@ -5767,27 +7725,27 @@
               </a:lnSpc>
             </a:pPr>
             <a:r>
-              <a:rPr sz="2100" b="1">
-                <a:solidFill>
-                  <a:srgbClr val="38BDF8"/>
-                </a:solidFill>
-                <a:latin typeface="Inter"/>
-              </a:rPr>
-              <a:t>41 eventos</a:t>
-            </a:r>
-          </a:p>
-        </p:txBody>
-      </p:sp>
-      <p:sp>
-        <p:nvSpPr>
-          <p:cNvPr id="14" name="TextBox 13"/>
+              <a:rPr sz="1300" b="1">
+                <a:solidFill>
+                  <a:srgbClr val="665EFD"/>
+                </a:solidFill>
+                <a:latin typeface="Inter"/>
+              </a:rPr>
+              <a:t>POR QUE AGORA · POR QUE A GENTE</a:t>
+            </a:r>
+          </a:p>
+        </p:txBody>
+      </p:sp>
+      <p:sp>
+        <p:nvSpPr>
+          <p:cNvPr id="4" name="TextBox 3"/>
           <p:cNvSpPr txBox="1"/>
           <p:nvPr/>
         </p:nvSpPr>
         <p:spPr>
           <a:xfrm>
-            <a:off x="8229600" y="4544568"/>
-            <a:ext cx="3108960" cy="365760"/>
+            <a:off x="822960" y="1051560"/>
+            <a:ext cx="10515600" cy="615553"/>
           </a:xfrm>
           <a:prstGeom prst="rect">
             <a:avLst/>
@@ -5795,51 +7753,61 @@
           <a:noFill/>
         </p:spPr>
         <p:txBody>
-          <a:bodyPr wrap="square">
+          <a:bodyPr wrap="square" lIns="91440" tIns="45720" rIns="91440" bIns="45720" anchor="t">
             <a:spAutoFit/>
           </a:bodyPr>
           <a:lstStyle/>
           <a:p>
-            <a:pPr algn="l">
-              <a:lnSpc>
-                <a:spcPct val="100000"/>
-              </a:lnSpc>
-            </a:pPr>
-            <a:r>
-              <a:rPr sz="1200" b="0">
-                <a:solidFill>
-                  <a:srgbClr val="8B98B8"/>
-                </a:solidFill>
-                <a:latin typeface="Inter"/>
-              </a:rPr>
-              <a:t>trilha hash-chained íntegra</a:t>
-            </a:r>
-          </a:p>
-        </p:txBody>
-      </p:sp>
-      <p:sp>
-        <p:nvSpPr>
-          <p:cNvPr id="15" name="Rounded Rectangle 14"/>
+            <a:r>
+              <a:rPr lang="en-US" sz="3400" b="1" dirty="0" err="1">
+                <a:solidFill>
+                  <a:srgbClr val="FFFFFF"/>
+                </a:solidFill>
+                <a:latin typeface="Inter"/>
+              </a:rPr>
+              <a:t>Nossas</a:t>
+            </a:r>
+            <a:r>
+              <a:rPr lang="en-US" sz="3400" b="1" dirty="0">
+                <a:solidFill>
+                  <a:srgbClr val="FFFFFF"/>
+                </a:solidFill>
+                <a:latin typeface="Inter"/>
+              </a:rPr>
+              <a:t> </a:t>
+            </a:r>
+            <a:r>
+              <a:rPr lang="en-US" sz="3400" b="1" dirty="0" err="1">
+                <a:solidFill>
+                  <a:srgbClr val="FFFFFF"/>
+                </a:solidFill>
+                <a:latin typeface="Inter"/>
+              </a:rPr>
+              <a:t>razões</a:t>
+            </a:r>
+            <a:endParaRPr lang="en-US" dirty="0" err="1"/>
+          </a:p>
+        </p:txBody>
+      </p:sp>
+      <p:sp>
+        <p:nvSpPr>
+          <p:cNvPr id="5" name="Rectangle 4"/>
           <p:cNvSpPr/>
           <p:nvPr/>
         </p:nvSpPr>
         <p:spPr>
           <a:xfrm>
-            <a:off x="8046720" y="5129783"/>
-            <a:ext cx="3383280" cy="960120"/>
-          </a:xfrm>
-          <a:prstGeom prst="roundRect">
-            <a:avLst>
-              <a:gd name="adj" fmla="val 6000"/>
-            </a:avLst>
+            <a:off x="822960" y="2316480"/>
+            <a:ext cx="10515600" cy="9525"/>
+          </a:xfrm>
+          <a:prstGeom prst="rect">
+            <a:avLst/>
           </a:prstGeom>
           <a:solidFill>
-            <a:srgbClr val="111731"/>
+            <a:srgbClr val="1C2640"/>
           </a:solidFill>
-          <a:ln w="12700">
-            <a:solidFill>
-              <a:srgbClr val="1C2640"/>
-            </a:solidFill>
+          <a:ln>
+            <a:noFill/>
           </a:ln>
           <a:effectLst/>
         </p:spPr>
@@ -5862,163 +7830,33 @@
           <a:lstStyle/>
           <a:p>
             <a:pPr algn="ctr"/>
-          </a:p>
-        </p:txBody>
-      </p:sp>
-      <p:sp>
-        <p:nvSpPr>
-          <p:cNvPr id="16" name="TextBox 15"/>
-          <p:cNvSpPr txBox="1"/>
-          <p:nvPr/>
-        </p:nvSpPr>
-        <p:spPr>
-          <a:xfrm>
-            <a:off x="8229600" y="5221223"/>
-            <a:ext cx="3108960" cy="411480"/>
-          </a:xfrm>
-          <a:prstGeom prst="rect">
-            <a:avLst/>
-          </a:prstGeom>
-          <a:noFill/>
-        </p:spPr>
-        <p:txBody>
-          <a:bodyPr wrap="square">
-            <a:spAutoFit/>
-          </a:bodyPr>
-          <a:lstStyle/>
-          <a:p>
-            <a:pPr algn="l">
-              <a:lnSpc>
-                <a:spcPct val="100000"/>
-              </a:lnSpc>
-            </a:pPr>
-            <a:r>
-              <a:rPr sz="2100" b="1">
-                <a:solidFill>
-                  <a:srgbClr val="F87171"/>
-                </a:solidFill>
-                <a:latin typeface="Inter"/>
-              </a:rPr>
-              <a:t>2-de-3</a:t>
-            </a:r>
-          </a:p>
-        </p:txBody>
-      </p:sp>
-      <p:sp>
-        <p:nvSpPr>
-          <p:cNvPr id="17" name="TextBox 16"/>
-          <p:cNvSpPr txBox="1"/>
-          <p:nvPr/>
-        </p:nvSpPr>
-        <p:spPr>
-          <a:xfrm>
-            <a:off x="8229600" y="5660136"/>
-            <a:ext cx="3108960" cy="365760"/>
-          </a:xfrm>
-          <a:prstGeom prst="rect">
-            <a:avLst/>
-          </a:prstGeom>
-          <a:noFill/>
-        </p:spPr>
-        <p:txBody>
-          <a:bodyPr wrap="square">
-            <a:spAutoFit/>
-          </a:bodyPr>
-          <a:lstStyle/>
-          <a:p>
-            <a:pPr algn="l">
-              <a:lnSpc>
-                <a:spcPct val="100000"/>
-              </a:lnSpc>
-            </a:pPr>
-            <a:r>
-              <a:rPr sz="1200" b="0">
-                <a:solidFill>
-                  <a:srgbClr val="8B98B8"/>
-                </a:solidFill>
-                <a:latin typeface="Inter"/>
-              </a:rPr>
-              <a:t>juiz caiu ao vivo → fail-closed decidiu</a:t>
-            </a:r>
-          </a:p>
-        </p:txBody>
-      </p:sp>
-      <p:sp>
-        <p:nvSpPr>
-          <p:cNvPr id="18" name="TextBox 17"/>
-          <p:cNvSpPr txBox="1"/>
-          <p:nvPr/>
-        </p:nvSpPr>
-        <p:spPr>
-          <a:xfrm>
-            <a:off x="822960" y="6263640"/>
-            <a:ext cx="10515600" cy="457200"/>
-          </a:xfrm>
-          <a:prstGeom prst="rect">
-            <a:avLst/>
-          </a:prstGeom>
-          <a:noFill/>
-        </p:spPr>
-        <p:txBody>
-          <a:bodyPr wrap="square">
-            <a:spAutoFit/>
-          </a:bodyPr>
-          <a:lstStyle/>
-          <a:p>
-            <a:pPr algn="l">
-              <a:lnSpc>
-                <a:spcPct val="100000"/>
-              </a:lnSpc>
-            </a:pPr>
-            <a:r>
-              <a:rPr sz="1400" b="0">
-                <a:solidFill>
-                  <a:srgbClr val="DBE3F5"/>
-                </a:solidFill>
-                <a:latin typeface="Inter"/>
-              </a:rPr>
-              <a:t>Escrow e-bfb3f1434714: reasoning falhou → reject conf 0 → reasoning-pro + code aprovaram → RELEASED.</a:t>
-            </a:r>
-          </a:p>
-        </p:txBody>
-      </p:sp>
-    </p:spTree>
-  </p:cSld>
-  <p:clrMapOvr>
-    <a:masterClrMapping/>
-  </p:clrMapOvr>
-</p:sld>
-</file>
-
-<file path=ppt/slides/slide5.xml><?xml version="1.0" encoding="utf-8"?>
-<p:sld xmlns:a="http://schemas.openxmlformats.org/drawingml/2006/main" xmlns:p="http://schemas.openxmlformats.org/presentationml/2006/main" xmlns:r="http://schemas.openxmlformats.org/officeDocument/2006/relationships">
-  <p:cSld>
-    <p:spTree>
-      <p:nvGrpSpPr>
-        <p:cNvPr id="1" name=""/>
-        <p:cNvGrpSpPr/>
-        <p:nvPr/>
-      </p:nvGrpSpPr>
-      <p:grpSpPr/>
-      <p:sp>
-        <p:nvSpPr>
-          <p:cNvPr id="2" name="Rectangle 1"/>
+            <a:endParaRPr/>
+          </a:p>
+        </p:txBody>
+      </p:sp>
+      <p:sp>
+        <p:nvSpPr>
+          <p:cNvPr id="6" name="Rounded Rectangle 5"/>
           <p:cNvSpPr/>
           <p:nvPr/>
         </p:nvSpPr>
         <p:spPr>
           <a:xfrm>
-            <a:off x="0" y="0"/>
-            <a:ext cx="12191695" cy="6858000"/>
-          </a:xfrm>
-          <a:prstGeom prst="rect">
-            <a:avLst/>
+            <a:off x="904240" y="2672080"/>
+            <a:ext cx="3383280" cy="2377440"/>
+          </a:xfrm>
+          <a:prstGeom prst="roundRect">
+            <a:avLst>
+              <a:gd name="adj" fmla="val 6000"/>
+            </a:avLst>
           </a:prstGeom>
           <a:solidFill>
-            <a:srgbClr val="0A0E1E"/>
+            <a:srgbClr val="111731"/>
           </a:solidFill>
-          <a:ln>
-            <a:noFill/>
+          <a:ln w="12700">
+            <a:solidFill>
+              <a:srgbClr val="1C2640"/>
+            </a:solidFill>
           </a:ln>
           <a:effectLst/>
         </p:spPr>
@@ -6041,19 +7879,20 @@
           <a:lstStyle/>
           <a:p>
             <a:pPr algn="ctr"/>
-          </a:p>
-        </p:txBody>
-      </p:sp>
-      <p:sp>
-        <p:nvSpPr>
-          <p:cNvPr id="3" name="TextBox 2"/>
+            <a:endParaRPr/>
+          </a:p>
+        </p:txBody>
+      </p:sp>
+      <p:sp>
+        <p:nvSpPr>
+          <p:cNvPr id="7" name="TextBox 6"/>
           <p:cNvSpPr txBox="1"/>
           <p:nvPr/>
         </p:nvSpPr>
         <p:spPr>
           <a:xfrm>
-            <a:off x="822960" y="548640"/>
-            <a:ext cx="5486400" cy="365760"/>
+            <a:off x="1105408" y="2854960"/>
+            <a:ext cx="3017520" cy="365760"/>
           </a:xfrm>
           <a:prstGeom prst="rect">
             <a:avLst/>
@@ -6072,154 +7911,13 @@
               </a:lnSpc>
             </a:pPr>
             <a:r>
-              <a:rPr sz="1300" b="1">
-                <a:solidFill>
-                  <a:srgbClr val="665EFD"/>
-                </a:solidFill>
-                <a:latin typeface="Inter"/>
-              </a:rPr>
-              <a:t>THREAT INTELLIGENCE</a:t>
-            </a:r>
-          </a:p>
-        </p:txBody>
-      </p:sp>
-      <p:sp>
-        <p:nvSpPr>
-          <p:cNvPr id="4" name="TextBox 3"/>
-          <p:cNvSpPr txBox="1"/>
-          <p:nvPr/>
-        </p:nvSpPr>
-        <p:spPr>
-          <a:xfrm>
-            <a:off x="822960" y="960120"/>
-            <a:ext cx="10515600" cy="640080"/>
-          </a:xfrm>
-          <a:prstGeom prst="rect">
-            <a:avLst/>
-          </a:prstGeom>
-          <a:noFill/>
-        </p:spPr>
-        <p:txBody>
-          <a:bodyPr wrap="square">
-            <a:spAutoFit/>
-          </a:bodyPr>
-          <a:lstStyle/>
-          <a:p>
-            <a:pPr algn="l">
-              <a:lnSpc>
-                <a:spcPct val="100000"/>
-              </a:lnSpc>
-            </a:pPr>
-            <a:r>
-              <a:rPr sz="3400" b="1">
-                <a:solidFill>
-                  <a:srgbClr val="FFFFFF"/>
-                </a:solidFill>
-                <a:latin typeface="Inter"/>
-              </a:rPr>
-              <a:t>Tudo conectado. Tudo provável.</a:t>
-            </a:r>
-          </a:p>
-        </p:txBody>
-      </p:sp>
-      <p:pic>
-        <p:nvPicPr>
-          <p:cNvPr id="5" name="Picture 4" descr="deck_trace.png"/>
-          <p:cNvPicPr>
-            <a:picLocks noChangeAspect="1"/>
-          </p:cNvPicPr>
-          <p:nvPr/>
-        </p:nvPicPr>
-        <p:blipFill>
-          <a:blip r:embed="rId2"/>
-          <a:stretch>
-            <a:fillRect/>
-          </a:stretch>
-        </p:blipFill>
-        <p:spPr>
-          <a:xfrm>
-            <a:off x="822960" y="1691640"/>
-            <a:ext cx="6949440" cy="4467497"/>
-          </a:xfrm>
-          <a:prstGeom prst="rect">
-            <a:avLst/>
-          </a:prstGeom>
-        </p:spPr>
-      </p:pic>
-      <p:sp>
-        <p:nvSpPr>
-          <p:cNvPr id="6" name="TextBox 5"/>
-          <p:cNvSpPr txBox="1"/>
-          <p:nvPr/>
-        </p:nvSpPr>
-        <p:spPr>
-          <a:xfrm>
-            <a:off x="8046720" y="1828800"/>
-            <a:ext cx="3474720" cy="365760"/>
-          </a:xfrm>
-          <a:prstGeom prst="rect">
-            <a:avLst/>
-          </a:prstGeom>
-          <a:noFill/>
-        </p:spPr>
-        <p:txBody>
-          <a:bodyPr wrap="square">
-            <a:spAutoFit/>
-          </a:bodyPr>
-          <a:lstStyle/>
-          <a:p>
-            <a:pPr algn="l">
-              <a:lnSpc>
-                <a:spcPct val="100000"/>
-              </a:lnSpc>
-            </a:pPr>
-            <a:r>
-              <a:rPr sz="1600" b="1">
+              <a:rPr sz="1700" b="1">
                 <a:solidFill>
                   <a:srgbClr val="38BDF8"/>
                 </a:solidFill>
                 <a:latin typeface="Inter"/>
               </a:rPr>
-              <a:t>Grafo de ameaças</a:t>
-            </a:r>
-          </a:p>
-        </p:txBody>
-      </p:sp>
-      <p:sp>
-        <p:nvSpPr>
-          <p:cNvPr id="7" name="TextBox 6"/>
-          <p:cNvSpPr txBox="1"/>
-          <p:nvPr/>
-        </p:nvSpPr>
-        <p:spPr>
-          <a:xfrm>
-            <a:off x="8046720" y="2176272"/>
-            <a:ext cx="3474720" cy="777240"/>
-          </a:xfrm>
-          <a:prstGeom prst="rect">
-            <a:avLst/>
-          </a:prstGeom>
-          <a:noFill/>
-        </p:spPr>
-        <p:txBody>
-          <a:bodyPr wrap="square">
-            <a:spAutoFit/>
-          </a:bodyPr>
-          <a:lstStyle/>
-          <a:p>
-            <a:pPr algn="l">
-              <a:lnSpc>
-                <a:spcPct val="105000"/>
-              </a:lnSpc>
-            </a:pPr>
-            <a:r>
-              <a:rPr sz="1200" b="0">
-                <a:solidFill>
-                  <a:srgbClr val="8B98B8"/>
-                </a:solidFill>
-                <a:latin typeface="Inter"/>
-              </a:rPr>
-              <a:t>KYC → KYA → quote → escrow → votos → dinheiro, clicável.</a:t>
+              <a:t>Timing</a:t>
             </a:r>
           </a:p>
         </p:txBody>
@@ -6232,8 +7930,8 @@
         </p:nvSpPr>
         <p:spPr>
           <a:xfrm>
-            <a:off x="8046720" y="2971800"/>
-            <a:ext cx="3474720" cy="365760"/>
+            <a:off x="1105408" y="3312160"/>
+            <a:ext cx="3017520" cy="716543"/>
           </a:xfrm>
           <a:prstGeom prst="rect">
             <a:avLst/>
@@ -6241,260 +7939,75 @@
           <a:noFill/>
         </p:spPr>
         <p:txBody>
-          <a:bodyPr wrap="square">
+          <a:bodyPr wrap="square" lIns="91440" tIns="45720" rIns="91440" bIns="45720" anchor="t">
             <a:spAutoFit/>
           </a:bodyPr>
           <a:lstStyle/>
           <a:p>
             <a:pPr algn="l">
               <a:lnSpc>
-                <a:spcPct val="100000"/>
+                <a:spcPct val="110000"/>
               </a:lnSpc>
             </a:pPr>
             <a:r>
-              <a:rPr sz="1600" b="1">
-                <a:solidFill>
-                  <a:srgbClr val="38BDF8"/>
-                </a:solidFill>
-                <a:latin typeface="Inter"/>
-              </a:rPr>
-              <a:t>Trilha tamper-evident</a:t>
-            </a:r>
-          </a:p>
-        </p:txBody>
-      </p:sp>
-      <p:sp>
-        <p:nvSpPr>
-          <p:cNvPr id="9" name="TextBox 8"/>
-          <p:cNvSpPr txBox="1"/>
-          <p:nvPr/>
-        </p:nvSpPr>
-        <p:spPr>
-          <a:xfrm>
-            <a:off x="8046720" y="3319272"/>
-            <a:ext cx="3474720" cy="777240"/>
-          </a:xfrm>
-          <a:prstGeom prst="rect">
-            <a:avLst/>
-          </a:prstGeom>
-          <a:noFill/>
-        </p:spPr>
-        <p:txBody>
-          <a:bodyPr wrap="square">
-            <a:spAutoFit/>
-          </a:bodyPr>
-          <a:lstStyle/>
-          <a:p>
-            <a:pPr algn="l">
-              <a:lnSpc>
-                <a:spcPct val="105000"/>
-              </a:lnSpc>
-            </a:pPr>
-            <a:r>
-              <a:rPr sz="1200" b="0">
-                <a:solidFill>
-                  <a:srgbClr val="8B98B8"/>
-                </a:solidFill>
-                <a:latin typeface="Inter"/>
-              </a:rPr>
-              <a:t>Adultere 1 caractere — verify_chain aponta o seq exato.</a:t>
-            </a:r>
-          </a:p>
-        </p:txBody>
-      </p:sp>
-      <p:sp>
-        <p:nvSpPr>
-          <p:cNvPr id="10" name="TextBox 9"/>
-          <p:cNvSpPr txBox="1"/>
-          <p:nvPr/>
-        </p:nvSpPr>
-        <p:spPr>
-          <a:xfrm>
-            <a:off x="8046720" y="4114800"/>
-            <a:ext cx="3474720" cy="365760"/>
-          </a:xfrm>
-          <a:prstGeom prst="rect">
-            <a:avLst/>
-          </a:prstGeom>
-          <a:noFill/>
-        </p:spPr>
-        <p:txBody>
-          <a:bodyPr wrap="square">
-            <a:spAutoFit/>
-          </a:bodyPr>
-          <a:lstStyle/>
-          <a:p>
-            <a:pPr algn="l">
-              <a:lnSpc>
-                <a:spcPct val="100000"/>
-              </a:lnSpc>
-            </a:pPr>
-            <a:r>
-              <a:rPr sz="1600" b="1">
-                <a:solidFill>
-                  <a:srgbClr val="38BDF8"/>
-                </a:solidFill>
-                <a:latin typeface="Inter"/>
-              </a:rPr>
-              <a:t>/explain</a:t>
-            </a:r>
-          </a:p>
-        </p:txBody>
-      </p:sp>
-      <p:sp>
-        <p:nvSpPr>
-          <p:cNvPr id="11" name="TextBox 10"/>
-          <p:cNvSpPr txBox="1"/>
-          <p:nvPr/>
-        </p:nvSpPr>
-        <p:spPr>
-          <a:xfrm>
-            <a:off x="8046720" y="4462272"/>
-            <a:ext cx="3474720" cy="777240"/>
-          </a:xfrm>
-          <a:prstGeom prst="rect">
-            <a:avLst/>
-          </a:prstGeom>
-          <a:noFill/>
-        </p:spPr>
-        <p:txBody>
-          <a:bodyPr wrap="square">
-            <a:spAutoFit/>
-          </a:bodyPr>
-          <a:lstStyle/>
-          <a:p>
-            <a:pPr algn="l">
-              <a:lnSpc>
-                <a:spcPct val="105000"/>
-              </a:lnSpc>
-            </a:pPr>
-            <a:r>
-              <a:rPr sz="1200" b="0">
-                <a:solidFill>
-                  <a:srgbClr val="8B98B8"/>
-                </a:solidFill>
-                <a:latin typeface="Inter"/>
-              </a:rPr>
-              <a:t>Cada ação vem com o porquê derivado DOS DADOS — zero alucinação na auditoria.</a:t>
-            </a:r>
-          </a:p>
-        </p:txBody>
-      </p:sp>
-      <p:sp>
-        <p:nvSpPr>
-          <p:cNvPr id="12" name="TextBox 11"/>
-          <p:cNvSpPr txBox="1"/>
-          <p:nvPr/>
-        </p:nvSpPr>
-        <p:spPr>
-          <a:xfrm>
-            <a:off x="8046720" y="5257800"/>
-            <a:ext cx="3474720" cy="365760"/>
-          </a:xfrm>
-          <a:prstGeom prst="rect">
-            <a:avLst/>
-          </a:prstGeom>
-          <a:noFill/>
-        </p:spPr>
-        <p:txBody>
-          <a:bodyPr wrap="square">
-            <a:spAutoFit/>
-          </a:bodyPr>
-          <a:lstStyle/>
-          <a:p>
-            <a:pPr algn="l">
-              <a:lnSpc>
-                <a:spcPct val="100000"/>
-              </a:lnSpc>
-            </a:pPr>
-            <a:r>
-              <a:rPr sz="1600" b="1">
-                <a:solidFill>
-                  <a:srgbClr val="38BDF8"/>
-                </a:solidFill>
-                <a:latin typeface="Inter"/>
-              </a:rPr>
-              <a:t>Compliance report</a:t>
-            </a:r>
-          </a:p>
-        </p:txBody>
-      </p:sp>
-      <p:sp>
-        <p:nvSpPr>
-          <p:cNvPr id="13" name="TextBox 12"/>
-          <p:cNvSpPr txBox="1"/>
-          <p:nvPr/>
-        </p:nvSpPr>
-        <p:spPr>
-          <a:xfrm>
-            <a:off x="8046720" y="5605272"/>
-            <a:ext cx="3474720" cy="777240"/>
-          </a:xfrm>
-          <a:prstGeom prst="rect">
-            <a:avLst/>
-          </a:prstGeom>
-          <a:noFill/>
-        </p:spPr>
-        <p:txBody>
-          <a:bodyPr wrap="square">
-            <a:spAutoFit/>
-          </a:bodyPr>
-          <a:lstStyle/>
-          <a:p>
-            <a:pPr algn="l">
-              <a:lnSpc>
-                <a:spcPct val="105000"/>
-              </a:lnSpc>
-            </a:pPr>
-            <a:r>
-              <a:rPr sz="1200" b="0">
-                <a:solidFill>
-                  <a:srgbClr val="8B98B8"/>
-                </a:solidFill>
-                <a:latin typeface="Inter"/>
-              </a:rPr>
-              <a:t>Markdown que auditor lê, não log que operador finge.</a:t>
-            </a:r>
-          </a:p>
-        </p:txBody>
-      </p:sp>
-    </p:spTree>
-  </p:cSld>
-  <p:clrMapOvr>
-    <a:masterClrMapping/>
-  </p:clrMapOvr>
-</p:sld>
-</file>
-
-<file path=ppt/slides/slide6.xml><?xml version="1.0" encoding="utf-8"?>
-<p:sld xmlns:a="http://schemas.openxmlformats.org/drawingml/2006/main" xmlns:p="http://schemas.openxmlformats.org/presentationml/2006/main" xmlns:r="http://schemas.openxmlformats.org/officeDocument/2006/relationships">
-  <p:cSld>
-    <p:spTree>
-      <p:nvGrpSpPr>
-        <p:cNvPr id="1" name=""/>
-        <p:cNvGrpSpPr/>
-        <p:nvPr/>
-      </p:nvGrpSpPr>
-      <p:grpSpPr/>
-      <p:sp>
-        <p:nvSpPr>
-          <p:cNvPr id="2" name="Rectangle 1"/>
+              <a:rPr sz="1250" b="0" dirty="0">
+                <a:solidFill>
+                  <a:srgbClr val="8B98B8"/>
+                </a:solidFill>
+                <a:latin typeface="Inter"/>
+              </a:rPr>
+              <a:t>AP2 (Mastercard, PayPal, Amex), ACP (</a:t>
+            </a:r>
+            <a:r>
+              <a:rPr sz="1250" b="0" dirty="0" err="1">
+                <a:solidFill>
+                  <a:srgbClr val="8B98B8"/>
+                </a:solidFill>
+                <a:latin typeface="Inter"/>
+              </a:rPr>
+              <a:t>OpenAI+Stripe</a:t>
+            </a:r>
+            <a:r>
+              <a:rPr sz="1250" b="0" dirty="0">
+                <a:solidFill>
+                  <a:srgbClr val="8B98B8"/>
+                </a:solidFill>
+                <a:latin typeface="Inter"/>
+              </a:rPr>
+              <a:t>), x402 (Coinbase), ERC-8004 (Ethereum).</a:t>
+            </a:r>
+            <a:endParaRPr lang="en-US" sz="1250" b="0" dirty="0">
+              <a:solidFill>
+                <a:srgbClr val="8B98B8"/>
+              </a:solidFill>
+              <a:latin typeface="Inter"/>
+            </a:endParaRPr>
+          </a:p>
+        </p:txBody>
+      </p:sp>
+      <p:sp>
+        <p:nvSpPr>
+          <p:cNvPr id="9" name="Rounded Rectangle 8"/>
           <p:cNvSpPr/>
           <p:nvPr/>
         </p:nvSpPr>
         <p:spPr>
           <a:xfrm>
-            <a:off x="0" y="0"/>
-            <a:ext cx="12191695" cy="6858000"/>
-          </a:xfrm>
-          <a:prstGeom prst="rect">
-            <a:avLst/>
+            <a:off x="4485640" y="2672080"/>
+            <a:ext cx="3383280" cy="2377440"/>
+          </a:xfrm>
+          <a:prstGeom prst="roundRect">
+            <a:avLst>
+              <a:gd name="adj" fmla="val 6000"/>
+            </a:avLst>
           </a:prstGeom>
           <a:solidFill>
-            <a:srgbClr val="0A0E1E"/>
+            <a:srgbClr val="111731"/>
           </a:solidFill>
-          <a:ln>
-            <a:noFill/>
+          <a:ln w="12700">
+            <a:solidFill>
+              <a:srgbClr val="1C2640"/>
+            </a:solidFill>
           </a:ln>
           <a:effectLst/>
         </p:spPr>
@@ -6517,19 +8030,20 @@
           <a:lstStyle/>
           <a:p>
             <a:pPr algn="ctr"/>
-          </a:p>
-        </p:txBody>
-      </p:sp>
-      <p:sp>
-        <p:nvSpPr>
-          <p:cNvPr id="3" name="TextBox 2"/>
+            <a:endParaRPr/>
+          </a:p>
+        </p:txBody>
+      </p:sp>
+      <p:sp>
+        <p:nvSpPr>
+          <p:cNvPr id="10" name="TextBox 9"/>
           <p:cNvSpPr txBox="1"/>
           <p:nvPr/>
         </p:nvSpPr>
         <p:spPr>
           <a:xfrm>
-            <a:off x="822960" y="548640"/>
-            <a:ext cx="5486400" cy="365760"/>
+            <a:off x="4686808" y="2854960"/>
+            <a:ext cx="3017520" cy="365760"/>
           </a:xfrm>
           <a:prstGeom prst="rect">
             <a:avLst/>
@@ -6548,27 +8062,27 @@
               </a:lnSpc>
             </a:pPr>
             <a:r>
-              <a:rPr sz="1300" b="1">
-                <a:solidFill>
-                  <a:srgbClr val="665EFD"/>
-                </a:solidFill>
-                <a:latin typeface="Inter"/>
-              </a:rPr>
-              <a:t>O NEGÓCIO</a:t>
-            </a:r>
-          </a:p>
-        </p:txBody>
-      </p:sp>
-      <p:sp>
-        <p:nvSpPr>
-          <p:cNvPr id="4" name="TextBox 3"/>
+              <a:rPr sz="1700" b="1">
+                <a:solidFill>
+                  <a:srgbClr val="34D399"/>
+                </a:solidFill>
+                <a:latin typeface="Inter"/>
+              </a:rPr>
+              <a:t>Moat</a:t>
+            </a:r>
+          </a:p>
+        </p:txBody>
+      </p:sp>
+      <p:sp>
+        <p:nvSpPr>
+          <p:cNvPr id="11" name="TextBox 10"/>
           <p:cNvSpPr txBox="1"/>
           <p:nvPr/>
         </p:nvSpPr>
         <p:spPr>
           <a:xfrm>
-            <a:off x="822960" y="960120"/>
-            <a:ext cx="10515600" cy="640080"/>
+            <a:off x="4686808" y="3312160"/>
+            <a:ext cx="3017520" cy="716543"/>
           </a:xfrm>
           <a:prstGeom prst="rect">
             <a:avLst/>
@@ -6576,38 +8090,224 @@
           <a:noFill/>
         </p:spPr>
         <p:txBody>
-          <a:bodyPr wrap="square">
+          <a:bodyPr wrap="square" lIns="91440" tIns="45720" rIns="91440" bIns="45720" anchor="t">
             <a:spAutoFit/>
           </a:bodyPr>
           <a:lstStyle/>
           <a:p>
-            <a:pPr algn="l">
+            <a:pPr>
               <a:lnSpc>
-                <a:spcPct val="100000"/>
+                <a:spcPct val="110000"/>
               </a:lnSpc>
             </a:pPr>
             <a:r>
-              <a:rPr sz="3400" b="1">
-                <a:solidFill>
-                  <a:srgbClr val="FFFFFF"/>
-                </a:solidFill>
-                <a:latin typeface="Inter"/>
-              </a:rPr>
-              <a:t>Quem tem o dinheiro em risco paga.</a:t>
-            </a:r>
-          </a:p>
-        </p:txBody>
-      </p:sp>
-      <p:sp>
-        <p:nvSpPr>
-          <p:cNvPr id="5" name="Rounded Rectangle 4"/>
+              <a:rPr lang="en-US" sz="1250" dirty="0" err="1">
+                <a:solidFill>
+                  <a:srgbClr val="8B98B8"/>
+                </a:solidFill>
+                <a:latin typeface="Inter"/>
+              </a:rPr>
+              <a:t>Reputação</a:t>
+            </a:r>
+            <a:r>
+              <a:rPr lang="en-US" sz="1250" dirty="0">
+                <a:solidFill>
+                  <a:srgbClr val="8B98B8"/>
+                </a:solidFill>
+                <a:latin typeface="Inter"/>
+              </a:rPr>
+              <a:t> </a:t>
+            </a:r>
+            <a:r>
+              <a:rPr lang="en-US" sz="1250" dirty="0" err="1">
+                <a:solidFill>
+                  <a:srgbClr val="8B98B8"/>
+                </a:solidFill>
+                <a:latin typeface="Inter"/>
+              </a:rPr>
+              <a:t>descentralizada</a:t>
+            </a:r>
+            <a:r>
+              <a:rPr sz="1250" b="0" dirty="0">
+                <a:solidFill>
+                  <a:srgbClr val="8B98B8"/>
+                </a:solidFill>
+                <a:latin typeface="Inter"/>
+              </a:rPr>
+              <a:t>: </a:t>
+            </a:r>
+            <a:r>
+              <a:rPr sz="1250" b="0" dirty="0" err="1">
+                <a:solidFill>
+                  <a:srgbClr val="8B98B8"/>
+                </a:solidFill>
+                <a:latin typeface="Inter"/>
+              </a:rPr>
+              <a:t>cada</a:t>
+            </a:r>
+            <a:r>
+              <a:rPr sz="1250" b="0" dirty="0">
+                <a:solidFill>
+                  <a:srgbClr val="8B98B8"/>
+                </a:solidFill>
+                <a:latin typeface="Inter"/>
+              </a:rPr>
+              <a:t> escrow settled </a:t>
+            </a:r>
+            <a:r>
+              <a:rPr sz="1250" b="0" dirty="0" err="1">
+                <a:solidFill>
+                  <a:srgbClr val="8B98B8"/>
+                </a:solidFill>
+                <a:latin typeface="Inter"/>
+              </a:rPr>
+              <a:t>melhora</a:t>
+            </a:r>
+            <a:r>
+              <a:rPr sz="1250" b="0" dirty="0">
+                <a:solidFill>
+                  <a:srgbClr val="8B98B8"/>
+                </a:solidFill>
+                <a:latin typeface="Inter"/>
+              </a:rPr>
+              <a:t> o score de </a:t>
+            </a:r>
+            <a:r>
+              <a:rPr sz="1250" b="0" dirty="0" err="1">
+                <a:solidFill>
+                  <a:srgbClr val="8B98B8"/>
+                </a:solidFill>
+                <a:latin typeface="Inter"/>
+              </a:rPr>
+              <a:t>todos</a:t>
+            </a:r>
+            <a:r>
+              <a:rPr sz="1250" b="0" dirty="0">
+                <a:solidFill>
+                  <a:srgbClr val="8B98B8"/>
+                </a:solidFill>
+                <a:latin typeface="Inter"/>
+              </a:rPr>
+              <a:t>. Dados de </a:t>
+            </a:r>
+            <a:r>
+              <a:rPr sz="1250" b="0" dirty="0" err="1">
+                <a:solidFill>
+                  <a:srgbClr val="8B98B8"/>
+                </a:solidFill>
+                <a:latin typeface="Inter"/>
+              </a:rPr>
+              <a:t>confiança</a:t>
+            </a:r>
+            <a:r>
+              <a:rPr sz="1250" b="0" dirty="0">
+                <a:solidFill>
+                  <a:srgbClr val="8B98B8"/>
+                </a:solidFill>
+                <a:latin typeface="Inter"/>
+              </a:rPr>
+              <a:t> </a:t>
+            </a:r>
+            <a:r>
+              <a:rPr sz="1250" b="0" dirty="0" err="1">
+                <a:solidFill>
+                  <a:srgbClr val="8B98B8"/>
+                </a:solidFill>
+                <a:latin typeface="Inter"/>
+              </a:rPr>
+              <a:t>que</a:t>
+            </a:r>
+            <a:r>
+              <a:rPr sz="1250" b="0" dirty="0">
+                <a:solidFill>
+                  <a:srgbClr val="8B98B8"/>
+                </a:solidFill>
+                <a:latin typeface="Inter"/>
+              </a:rPr>
+              <a:t> </a:t>
+            </a:r>
+            <a:r>
+              <a:rPr sz="1250" b="0" dirty="0" err="1">
+                <a:solidFill>
+                  <a:srgbClr val="8B98B8"/>
+                </a:solidFill>
+                <a:latin typeface="Inter"/>
+              </a:rPr>
+              <a:t>ninguém</a:t>
+            </a:r>
+            <a:r>
+              <a:rPr sz="1250" b="0" dirty="0">
+                <a:solidFill>
+                  <a:srgbClr val="8B98B8"/>
+                </a:solidFill>
+                <a:latin typeface="Inter"/>
+              </a:rPr>
+              <a:t> </a:t>
+            </a:r>
+            <a:r>
+              <a:rPr sz="1250" b="0" dirty="0" err="1">
+                <a:solidFill>
+                  <a:srgbClr val="8B98B8"/>
+                </a:solidFill>
+                <a:latin typeface="Inter"/>
+              </a:rPr>
+              <a:t>constrói</a:t>
+            </a:r>
+            <a:r>
+              <a:rPr sz="1250" b="0" dirty="0">
+                <a:solidFill>
+                  <a:srgbClr val="8B98B8"/>
+                </a:solidFill>
+                <a:latin typeface="Inter"/>
+              </a:rPr>
+              <a:t> </a:t>
+            </a:r>
+            <a:r>
+              <a:rPr sz="1250" b="0" dirty="0" err="1">
+                <a:solidFill>
+                  <a:srgbClr val="8B98B8"/>
+                </a:solidFill>
+                <a:latin typeface="Inter"/>
+              </a:rPr>
+              <a:t>sozinho</a:t>
+            </a:r>
+            <a:r>
+              <a:rPr sz="1250" b="0" dirty="0">
+                <a:solidFill>
+                  <a:srgbClr val="8B98B8"/>
+                </a:solidFill>
+                <a:latin typeface="Inter"/>
+              </a:rPr>
+              <a:t>.</a:t>
+            </a:r>
+            <a:r>
+              <a:rPr lang="en-US" sz="1250" dirty="0">
+                <a:solidFill>
+                  <a:srgbClr val="8B98B8"/>
+                </a:solidFill>
+                <a:latin typeface="Inter"/>
+              </a:rPr>
+              <a:t> </a:t>
+            </a:r>
+            <a:endParaRPr sz="1250" b="0" dirty="0">
+              <a:solidFill>
+                <a:srgbClr val="8B98B8"/>
+              </a:solidFill>
+              <a:latin typeface="Inter"/>
+            </a:endParaRPr>
+          </a:p>
+        </p:txBody>
+      </p:sp>
+      <p:sp>
+        <p:nvSpPr>
+          <p:cNvPr id="12" name="Rounded Rectangle 11"/>
           <p:cNvSpPr/>
           <p:nvPr/>
         </p:nvSpPr>
         <p:spPr>
           <a:xfrm>
-            <a:off x="822960" y="1737360"/>
-            <a:ext cx="5120640" cy="4480560"/>
+            <a:off x="8046720" y="2651760"/>
+            <a:ext cx="3383280" cy="2377440"/>
           </a:xfrm>
           <a:prstGeom prst="roundRect">
             <a:avLst>
@@ -6643,19 +8343,20 @@
           <a:lstStyle/>
           <a:p>
             <a:pPr algn="ctr"/>
-          </a:p>
-        </p:txBody>
-      </p:sp>
-      <p:sp>
-        <p:nvSpPr>
-          <p:cNvPr id="6" name="TextBox 5"/>
+            <a:endParaRPr/>
+          </a:p>
+        </p:txBody>
+      </p:sp>
+      <p:sp>
+        <p:nvSpPr>
+          <p:cNvPr id="13" name="TextBox 12"/>
           <p:cNvSpPr txBox="1"/>
           <p:nvPr/>
         </p:nvSpPr>
         <p:spPr>
           <a:xfrm>
-            <a:off x="1051560" y="1920240"/>
-            <a:ext cx="4572000" cy="365760"/>
+            <a:off x="8247888" y="2834640"/>
+            <a:ext cx="3017520" cy="365760"/>
           </a:xfrm>
           <a:prstGeom prst="rect">
             <a:avLst/>
@@ -6674,27 +8375,27 @@
               </a:lnSpc>
             </a:pPr>
             <a:r>
-              <a:rPr sz="1500" b="1">
-                <a:solidFill>
-                  <a:srgbClr val="665EFD"/>
-                </a:solidFill>
-                <a:latin typeface="Inter"/>
-              </a:rPr>
-              <a:t>ICP</a:t>
-            </a:r>
-          </a:p>
-        </p:txBody>
-      </p:sp>
-      <p:sp>
-        <p:nvSpPr>
-          <p:cNvPr id="7" name="TextBox 6"/>
+              <a:rPr sz="1700" b="1">
+                <a:solidFill>
+                  <a:srgbClr val="FBBF24"/>
+                </a:solidFill>
+                <a:latin typeface="Inter"/>
+              </a:rPr>
+              <a:t>Defesa</a:t>
+            </a:r>
+          </a:p>
+        </p:txBody>
+      </p:sp>
+      <p:sp>
+        <p:nvSpPr>
+          <p:cNvPr id="14" name="TextBox 13"/>
           <p:cNvSpPr txBox="1"/>
           <p:nvPr/>
         </p:nvSpPr>
         <p:spPr>
           <a:xfrm>
-            <a:off x="1051560" y="2331720"/>
-            <a:ext cx="4663440" cy="3657600"/>
+            <a:off x="8247888" y="3291840"/>
+            <a:ext cx="3017520" cy="1645920"/>
           </a:xfrm>
           <a:prstGeom prst="rect">
             <a:avLst/>
@@ -6713,86 +8414,392 @@
               </a:lnSpc>
             </a:pPr>
             <a:r>
-              <a:rPr sz="1300" b="0">
-                <a:solidFill>
-                  <a:srgbClr val="DBE3F5"/>
-                </a:solidFill>
-                <a:latin typeface="Inter"/>
-              </a:rPr>
-              <a:t>Fintechs, bancos digitais e enterprises pilotando pagamentos agentic (A2A / x402 / AP2).</a:t>
-            </a:r>
-          </a:p>
-          <a:p>
-            <a:pPr algn="l">
+              <a:rPr sz="1250" b="0">
+                <a:solidFill>
+                  <a:srgbClr val="8B98B8"/>
+                </a:solidFill>
+                <a:latin typeface="Inter"/>
+              </a:rPr>
+              <a:t>Open-core do verifier + export PROV-O/W3C + BYO judge. Padrão aberto é como a gente vira padrão.</a:t>
+            </a:r>
+          </a:p>
+        </p:txBody>
+      </p:sp>
+      <p:sp>
+        <p:nvSpPr>
+          <p:cNvPr id="16" name="TextBox 15"/>
+          <p:cNvSpPr txBox="1"/>
+          <p:nvPr/>
+        </p:nvSpPr>
+        <p:spPr>
+          <a:xfrm>
+            <a:off x="822960" y="5440680"/>
+            <a:ext cx="10515600" cy="573298"/>
+          </a:xfrm>
+          <a:prstGeom prst="rect">
+            <a:avLst/>
+          </a:prstGeom>
+          <a:noFill/>
+        </p:spPr>
+        <p:txBody>
+          <a:bodyPr wrap="square" lIns="91440" tIns="45720" rIns="91440" bIns="45720" anchor="t">
+            <a:spAutoFit/>
+          </a:bodyPr>
+          <a:lstStyle/>
+          <a:p>
+            <a:pPr>
               <a:lnSpc>
-                <a:spcPct val="110000"/>
+                <a:spcPct val="115000"/>
               </a:lnSpc>
             </a:pPr>
-          </a:p>
-          <a:p>
-            <a:pPr algn="l">
-              <a:lnSpc>
-                <a:spcPct val="110000"/>
-              </a:lnSpc>
-            </a:pPr>
-            <a:r>
-              <a:rPr sz="1300" b="0">
-                <a:solidFill>
-                  <a:srgbClr val="DBE3F5"/>
-                </a:solidFill>
-                <a:latin typeface="Inter"/>
-              </a:rPr>
-              <a:t>Decisor: Head of AI Platform + Compliance Officer — a venda só fecha com os dois.</a:t>
-            </a:r>
-          </a:p>
-          <a:p>
-            <a:pPr algn="l">
-              <a:lnSpc>
-                <a:spcPct val="110000"/>
-              </a:lnSpc>
-            </a:pPr>
-          </a:p>
-          <a:p>
-            <a:pPr algn="l">
-              <a:lnSpc>
-                <a:spcPct val="110000"/>
-              </a:lnSpc>
-            </a:pPr>
-            <a:r>
-              <a:rPr sz="1300" b="0">
-                <a:solidFill>
-                  <a:srgbClr val="DBE3F5"/>
-                </a:solidFill>
-                <a:latin typeface="Inter"/>
-              </a:rPr>
-              <a:t>A dor: “meu agente paga o agente de outra empresa e eu não tenho como provar pro board e pro regulador que o trabalho foi conferido.”</a:t>
-            </a:r>
-          </a:p>
-        </p:txBody>
-      </p:sp>
-      <p:sp>
-        <p:nvSpPr>
-          <p:cNvPr id="8" name="Rounded Rectangle 7"/>
+            <a:r>
+              <a:rPr sz="1400" b="0" dirty="0" err="1">
+                <a:solidFill>
+                  <a:srgbClr val="FFFFFF"/>
+                </a:solidFill>
+                <a:latin typeface="Inter"/>
+              </a:rPr>
+              <a:t>Não</a:t>
+            </a:r>
+            <a:r>
+              <a:rPr sz="1400" b="0" dirty="0">
+                <a:solidFill>
+                  <a:srgbClr val="FFFFFF"/>
+                </a:solidFill>
+                <a:latin typeface="Inter"/>
+              </a:rPr>
+              <a:t> </a:t>
+            </a:r>
+            <a:r>
+              <a:rPr sz="1400" b="0" dirty="0" err="1">
+                <a:solidFill>
+                  <a:srgbClr val="FFFFFF"/>
+                </a:solidFill>
+                <a:latin typeface="Inter"/>
+              </a:rPr>
+              <a:t>somos</a:t>
+            </a:r>
+            <a:r>
+              <a:rPr sz="1400" b="0" dirty="0">
+                <a:solidFill>
+                  <a:srgbClr val="FFFFFF"/>
+                </a:solidFill>
+                <a:latin typeface="Inter"/>
+              </a:rPr>
+              <a:t> PSP, </a:t>
+            </a:r>
+            <a:r>
+              <a:rPr sz="1400" b="0" dirty="0" err="1">
+                <a:solidFill>
+                  <a:srgbClr val="FFFFFF"/>
+                </a:solidFill>
+                <a:latin typeface="Inter"/>
+              </a:rPr>
+              <a:t>não</a:t>
+            </a:r>
+            <a:r>
+              <a:rPr sz="1400" b="0" dirty="0">
+                <a:solidFill>
+                  <a:srgbClr val="FFFFFF"/>
+                </a:solidFill>
+                <a:latin typeface="Inter"/>
+              </a:rPr>
+              <a:t> </a:t>
+            </a:r>
+            <a:r>
+              <a:rPr sz="1400" b="0" dirty="0" err="1">
+                <a:solidFill>
+                  <a:srgbClr val="FFFFFF"/>
+                </a:solidFill>
+                <a:latin typeface="Inter"/>
+              </a:rPr>
+              <a:t>somos</a:t>
+            </a:r>
+            <a:r>
+              <a:rPr sz="1400" b="0" dirty="0">
+                <a:solidFill>
+                  <a:srgbClr val="FFFFFF"/>
+                </a:solidFill>
+                <a:latin typeface="Inter"/>
+              </a:rPr>
+              <a:t> marketplace, </a:t>
+            </a:r>
+            <a:r>
+              <a:rPr sz="1400" b="0" dirty="0" err="1">
+                <a:solidFill>
+                  <a:srgbClr val="FFFFFF"/>
+                </a:solidFill>
+                <a:latin typeface="Inter"/>
+              </a:rPr>
+              <a:t>não</a:t>
+            </a:r>
+            <a:r>
+              <a:rPr sz="1400" b="0" dirty="0">
+                <a:solidFill>
+                  <a:srgbClr val="FFFFFF"/>
+                </a:solidFill>
+                <a:latin typeface="Inter"/>
+              </a:rPr>
+              <a:t> </a:t>
+            </a:r>
+            <a:r>
+              <a:rPr sz="1400" b="0" dirty="0" err="1">
+                <a:solidFill>
+                  <a:srgbClr val="FFFFFF"/>
+                </a:solidFill>
+                <a:latin typeface="Inter"/>
+              </a:rPr>
+              <a:t>competimos</a:t>
+            </a:r>
+            <a:r>
+              <a:rPr sz="1400" b="0" dirty="0">
+                <a:solidFill>
+                  <a:srgbClr val="FFFFFF"/>
+                </a:solidFill>
+                <a:latin typeface="Inter"/>
+              </a:rPr>
+              <a:t> com </a:t>
+            </a:r>
+            <a:r>
+              <a:rPr sz="1400" b="0" dirty="0" err="1">
+                <a:solidFill>
+                  <a:srgbClr val="FFFFFF"/>
+                </a:solidFill>
+                <a:latin typeface="Inter"/>
+              </a:rPr>
+              <a:t>os</a:t>
+            </a:r>
+            <a:r>
+              <a:rPr sz="1400" b="0" dirty="0">
+                <a:solidFill>
+                  <a:srgbClr val="FFFFFF"/>
+                </a:solidFill>
+                <a:latin typeface="Inter"/>
+              </a:rPr>
+              <a:t> rails</a:t>
+            </a:r>
+            <a:r>
+              <a:rPr lang="en-US" sz="1400" dirty="0">
+                <a:solidFill>
+                  <a:srgbClr val="FFFFFF"/>
+                </a:solidFill>
+                <a:latin typeface="Inter"/>
+              </a:rPr>
+              <a:t>. </a:t>
+            </a:r>
+            <a:r>
+              <a:rPr lang="en-US" sz="1400" b="1" dirty="0">
+                <a:solidFill>
+                  <a:srgbClr val="FFFFFF"/>
+                </a:solidFill>
+                <a:latin typeface="Inter"/>
+              </a:rPr>
+              <a:t>Somos</a:t>
+            </a:r>
+            <a:r>
+              <a:rPr sz="1400" b="1" dirty="0">
+                <a:solidFill>
+                  <a:srgbClr val="FFFFFF"/>
+                </a:solidFill>
+                <a:latin typeface="Inter"/>
+              </a:rPr>
+              <a:t> a </a:t>
+            </a:r>
+            <a:r>
+              <a:rPr sz="1400" b="1" dirty="0" err="1">
+                <a:solidFill>
+                  <a:srgbClr val="FFFFFF"/>
+                </a:solidFill>
+                <a:latin typeface="Inter"/>
+              </a:rPr>
+              <a:t>camada</a:t>
+            </a:r>
+            <a:r>
+              <a:rPr sz="1400" b="1" dirty="0">
+                <a:solidFill>
+                  <a:srgbClr val="FFFFFF"/>
+                </a:solidFill>
+                <a:latin typeface="Inter"/>
+              </a:rPr>
+              <a:t> </a:t>
+            </a:r>
+            <a:r>
+              <a:rPr sz="1400" b="1" dirty="0" err="1">
+                <a:solidFill>
+                  <a:srgbClr val="FFFFFF"/>
+                </a:solidFill>
+                <a:latin typeface="Inter"/>
+              </a:rPr>
+              <a:t>que</a:t>
+            </a:r>
+            <a:r>
+              <a:rPr sz="1400" b="1" dirty="0">
+                <a:solidFill>
+                  <a:srgbClr val="FFFFFF"/>
+                </a:solidFill>
+                <a:latin typeface="Inter"/>
+              </a:rPr>
+              <a:t> </a:t>
+            </a:r>
+            <a:r>
+              <a:rPr sz="1400" b="1" dirty="0" err="1">
+                <a:solidFill>
+                  <a:srgbClr val="FFFFFF"/>
+                </a:solidFill>
+                <a:latin typeface="Inter"/>
+              </a:rPr>
+              <a:t>falta</a:t>
+            </a:r>
+            <a:r>
+              <a:rPr sz="1400" b="1" dirty="0">
+                <a:solidFill>
+                  <a:srgbClr val="FFFFFF"/>
+                </a:solidFill>
+                <a:latin typeface="Inter"/>
+              </a:rPr>
+              <a:t> </a:t>
+            </a:r>
+            <a:r>
+              <a:rPr sz="1400" b="1" dirty="0" err="1">
+                <a:solidFill>
+                  <a:srgbClr val="FFFFFF"/>
+                </a:solidFill>
+                <a:latin typeface="Inter"/>
+              </a:rPr>
+              <a:t>em</a:t>
+            </a:r>
+            <a:r>
+              <a:rPr sz="1400" b="1" dirty="0">
+                <a:solidFill>
+                  <a:srgbClr val="FFFFFF"/>
+                </a:solidFill>
+                <a:latin typeface="Inter"/>
+              </a:rPr>
+              <a:t> </a:t>
+            </a:r>
+            <a:r>
+              <a:rPr sz="1400" b="1" dirty="0" err="1">
+                <a:solidFill>
+                  <a:srgbClr val="FFFFFF"/>
+                </a:solidFill>
+                <a:latin typeface="Inter"/>
+              </a:rPr>
+              <a:t>cima</a:t>
+            </a:r>
+            <a:r>
+              <a:rPr sz="1400" b="1" dirty="0">
+                <a:solidFill>
+                  <a:srgbClr val="FFFFFF"/>
+                </a:solidFill>
+                <a:latin typeface="Inter"/>
+              </a:rPr>
+              <a:t> deles. Quanto </a:t>
+            </a:r>
+            <a:r>
+              <a:rPr sz="1400" b="1" dirty="0" err="1">
+                <a:solidFill>
+                  <a:srgbClr val="FFFFFF"/>
+                </a:solidFill>
+                <a:latin typeface="Inter"/>
+              </a:rPr>
+              <a:t>maior</a:t>
+            </a:r>
+            <a:r>
+              <a:rPr sz="1400" b="1" dirty="0">
+                <a:solidFill>
+                  <a:srgbClr val="FFFFFF"/>
+                </a:solidFill>
+                <a:latin typeface="Inter"/>
+              </a:rPr>
+              <a:t> o volume deles, </a:t>
+            </a:r>
+            <a:r>
+              <a:rPr sz="1400" b="1" dirty="0" err="1">
+                <a:solidFill>
+                  <a:srgbClr val="FFFFFF"/>
+                </a:solidFill>
+                <a:latin typeface="Inter"/>
+              </a:rPr>
+              <a:t>maior</a:t>
+            </a:r>
+            <a:r>
+              <a:rPr sz="1400" b="1" dirty="0">
+                <a:solidFill>
+                  <a:srgbClr val="FFFFFF"/>
+                </a:solidFill>
+                <a:latin typeface="Inter"/>
+              </a:rPr>
+              <a:t> </a:t>
+            </a:r>
+            <a:r>
+              <a:rPr sz="1400" b="1" dirty="0" err="1">
+                <a:solidFill>
+                  <a:srgbClr val="FFFFFF"/>
+                </a:solidFill>
+                <a:latin typeface="Inter"/>
+              </a:rPr>
+              <a:t>nosso</a:t>
+            </a:r>
+            <a:r>
+              <a:rPr sz="1400" b="1" dirty="0">
+                <a:solidFill>
+                  <a:srgbClr val="FFFFFF"/>
+                </a:solidFill>
+                <a:latin typeface="Inter"/>
+              </a:rPr>
+              <a:t> mercado.</a:t>
+            </a:r>
+            <a:endParaRPr lang="en-US" b="1">
+              <a:ea typeface="Calibri"/>
+              <a:cs typeface="Calibri"/>
+            </a:endParaRPr>
+          </a:p>
+        </p:txBody>
+      </p:sp>
+    </p:spTree>
+  </p:cSld>
+  <p:clrMapOvr>
+    <a:masterClrMapping/>
+  </p:clrMapOvr>
+</p:sld>
+</file>
+
+<file path=ppt/slides/slide8.xml><?xml version="1.0" encoding="utf-8"?>
+<p:sld xmlns:a="http://schemas.openxmlformats.org/drawingml/2006/main" xmlns:r="http://schemas.openxmlformats.org/officeDocument/2006/relationships" xmlns:p="http://schemas.openxmlformats.org/presentationml/2006/main">
+  <p:cSld>
+    <p:spTree>
+      <p:nvGrpSpPr>
+        <p:cNvPr id="1" name=""/>
+        <p:cNvGrpSpPr/>
+        <p:nvPr/>
+      </p:nvGrpSpPr>
+      <p:grpSpPr>
+        <a:xfrm>
+          <a:off x="0" y="0"/>
+          <a:ext cx="0" cy="0"/>
+          <a:chOff x="0" y="0"/>
+          <a:chExt cx="0" cy="0"/>
+        </a:xfrm>
+      </p:grpSpPr>
+      <p:sp>
+        <p:nvSpPr>
+          <p:cNvPr id="2" name="Rectangle 1"/>
           <p:cNvSpPr/>
           <p:nvPr/>
         </p:nvSpPr>
         <p:spPr>
           <a:xfrm>
-            <a:off x="6217920" y="1737360"/>
-            <a:ext cx="5212080" cy="868680"/>
-          </a:xfrm>
-          <a:prstGeom prst="roundRect">
-            <a:avLst>
-              <a:gd name="adj" fmla="val 6000"/>
-            </a:avLst>
+            <a:off x="0" y="0"/>
+            <a:ext cx="12191695" cy="6858000"/>
+          </a:xfrm>
+          <a:prstGeom prst="rect">
+            <a:avLst/>
           </a:prstGeom>
           <a:solidFill>
-            <a:srgbClr val="111731"/>
+            <a:srgbClr val="0A0E1E"/>
           </a:solidFill>
-          <a:ln w="12700">
-            <a:solidFill>
-              <a:srgbClr val="1C2640"/>
-            </a:solidFill>
+          <a:ln>
+            <a:noFill/>
           </a:ln>
           <a:effectLst/>
         </p:spPr>
@@ -6815,110 +8822,29 @@
           <a:lstStyle/>
           <a:p>
             <a:pPr algn="ctr"/>
-          </a:p>
-        </p:txBody>
-      </p:sp>
-      <p:sp>
-        <p:nvSpPr>
-          <p:cNvPr id="9" name="TextBox 8"/>
-          <p:cNvSpPr txBox="1"/>
+            <a:endParaRPr/>
+          </a:p>
+        </p:txBody>
+      </p:sp>
+      <p:sp>
+        <p:nvSpPr>
+          <p:cNvPr id="3" name="Rectangle 2"/>
+          <p:cNvSpPr/>
           <p:nvPr/>
         </p:nvSpPr>
         <p:spPr>
           <a:xfrm>
-            <a:off x="6400800" y="1810512"/>
-            <a:ext cx="4846320" cy="365760"/>
+            <a:off x="0" y="6807200"/>
+            <a:ext cx="12191695" cy="50800"/>
           </a:xfrm>
           <a:prstGeom prst="rect">
             <a:avLst/>
           </a:prstGeom>
-          <a:noFill/>
-        </p:spPr>
-        <p:txBody>
-          <a:bodyPr wrap="square">
-            <a:spAutoFit/>
-          </a:bodyPr>
-          <a:lstStyle/>
-          <a:p>
-            <a:pPr algn="l">
-              <a:lnSpc>
-                <a:spcPct val="100000"/>
-              </a:lnSpc>
-            </a:pPr>
-            <a:r>
-              <a:rPr sz="1700" b="1">
-                <a:solidFill>
-                  <a:srgbClr val="38BDF8"/>
-                </a:solidFill>
-                <a:latin typeface="Inter"/>
-              </a:rPr>
-              <a:t>Verify</a:t>
-            </a:r>
-          </a:p>
-        </p:txBody>
-      </p:sp>
-      <p:sp>
-        <p:nvSpPr>
-          <p:cNvPr id="10" name="TextBox 9"/>
-          <p:cNvSpPr txBox="1"/>
-          <p:nvPr/>
-        </p:nvSpPr>
-        <p:spPr>
-          <a:xfrm>
-            <a:off x="6400800" y="2194560"/>
-            <a:ext cx="4846320" cy="365760"/>
-          </a:xfrm>
-          <a:prstGeom prst="rect">
-            <a:avLst/>
-          </a:prstGeom>
-          <a:noFill/>
-        </p:spPr>
-        <p:txBody>
-          <a:bodyPr wrap="square">
-            <a:spAutoFit/>
-          </a:bodyPr>
-          <a:lstStyle/>
-          <a:p>
-            <a:pPr algn="l">
-              <a:lnSpc>
-                <a:spcPct val="100000"/>
-              </a:lnSpc>
-            </a:pPr>
-            <a:r>
-              <a:rPr sz="1200" b="0">
-                <a:solidFill>
-                  <a:srgbClr val="8B98B8"/>
-                </a:solidFill>
-                <a:latin typeface="Inter"/>
-              </a:rPr>
-              <a:t>$0.10/decisão · self-serve, 100 grátis</a:t>
-            </a:r>
-          </a:p>
-        </p:txBody>
-      </p:sp>
-      <p:sp>
-        <p:nvSpPr>
-          <p:cNvPr id="11" name="Rounded Rectangle 10"/>
-          <p:cNvSpPr/>
-          <p:nvPr/>
-        </p:nvSpPr>
-        <p:spPr>
-          <a:xfrm>
-            <a:off x="6217920" y="2761488"/>
-            <a:ext cx="5212080" cy="868680"/>
-          </a:xfrm>
-          <a:prstGeom prst="roundRect">
-            <a:avLst>
-              <a:gd name="adj" fmla="val 6000"/>
-            </a:avLst>
-          </a:prstGeom>
           <a:solidFill>
-            <a:srgbClr val="111731"/>
+            <a:srgbClr val="533AFD"/>
           </a:solidFill>
-          <a:ln w="12700">
-            <a:solidFill>
-              <a:srgbClr val="1C2640"/>
-            </a:solidFill>
+          <a:ln>
+            <a:noFill/>
           </a:ln>
           <a:effectLst/>
         </p:spPr>
@@ -6941,110 +8867,29 @@
           <a:lstStyle/>
           <a:p>
             <a:pPr algn="ctr"/>
-          </a:p>
-        </p:txBody>
-      </p:sp>
-      <p:sp>
-        <p:nvSpPr>
-          <p:cNvPr id="12" name="TextBox 11"/>
-          <p:cNvSpPr txBox="1"/>
+            <a:endParaRPr/>
+          </a:p>
+        </p:txBody>
+      </p:sp>
+      <p:sp>
+        <p:nvSpPr>
+          <p:cNvPr id="7" name="Rectangle 6"/>
+          <p:cNvSpPr/>
           <p:nvPr/>
         </p:nvSpPr>
         <p:spPr>
           <a:xfrm>
-            <a:off x="6400800" y="2834640"/>
-            <a:ext cx="4846320" cy="365760"/>
+            <a:off x="822960" y="4480560"/>
+            <a:ext cx="10515600" cy="9525"/>
           </a:xfrm>
           <a:prstGeom prst="rect">
             <a:avLst/>
           </a:prstGeom>
-          <a:noFill/>
-        </p:spPr>
-        <p:txBody>
-          <a:bodyPr wrap="square">
-            <a:spAutoFit/>
-          </a:bodyPr>
-          <a:lstStyle/>
-          <a:p>
-            <a:pPr algn="l">
-              <a:lnSpc>
-                <a:spcPct val="100000"/>
-              </a:lnSpc>
-            </a:pPr>
-            <a:r>
-              <a:rPr sz="1700" b="1">
-                <a:solidFill>
-                  <a:srgbClr val="34D399"/>
-                </a:solidFill>
-                <a:latin typeface="Inter"/>
-              </a:rPr>
-              <a:t>Settle ⭐</a:t>
-            </a:r>
-          </a:p>
-        </p:txBody>
-      </p:sp>
-      <p:sp>
-        <p:nvSpPr>
-          <p:cNvPr id="13" name="TextBox 12"/>
-          <p:cNvSpPr txBox="1"/>
-          <p:nvPr/>
-        </p:nvSpPr>
-        <p:spPr>
-          <a:xfrm>
-            <a:off x="6400800" y="3218688"/>
-            <a:ext cx="4846320" cy="365760"/>
-          </a:xfrm>
-          <a:prstGeom prst="rect">
-            <a:avLst/>
-          </a:prstGeom>
-          <a:noFill/>
-        </p:spPr>
-        <p:txBody>
-          <a:bodyPr wrap="square">
-            <a:spAutoFit/>
-          </a:bodyPr>
-          <a:lstStyle/>
-          <a:p>
-            <a:pPr algn="l">
-              <a:lnSpc>
-                <a:spcPct val="100000"/>
-              </a:lnSpc>
-            </a:pPr>
-            <a:r>
-              <a:rPr sz="1200" b="0">
-                <a:solidFill>
-                  <a:srgbClr val="8B98B8"/>
-                </a:solidFill>
-                <a:latin typeface="Inter"/>
-              </a:rPr>
-              <a:t>$999/mês + 0.5–1% do volume</a:t>
-            </a:r>
-          </a:p>
-        </p:txBody>
-      </p:sp>
-      <p:sp>
-        <p:nvSpPr>
-          <p:cNvPr id="14" name="Rounded Rectangle 13"/>
-          <p:cNvSpPr/>
-          <p:nvPr/>
-        </p:nvSpPr>
-        <p:spPr>
-          <a:xfrm>
-            <a:off x="6217920" y="3785616"/>
-            <a:ext cx="5212080" cy="868680"/>
-          </a:xfrm>
-          <a:prstGeom prst="roundRect">
-            <a:avLst>
-              <a:gd name="adj" fmla="val 6000"/>
-            </a:avLst>
-          </a:prstGeom>
           <a:solidFill>
-            <a:srgbClr val="111731"/>
+            <a:srgbClr val="1C2640"/>
           </a:solidFill>
-          <a:ln w="12700">
-            <a:solidFill>
-              <a:srgbClr val="1C2640"/>
-            </a:solidFill>
+          <a:ln>
+            <a:noFill/>
           </a:ln>
           <a:effectLst/>
         </p:spPr>
@@ -7067,19 +8912,117 @@
           <a:lstStyle/>
           <a:p>
             <a:pPr algn="ctr"/>
-          </a:p>
-        </p:txBody>
-      </p:sp>
-      <p:sp>
-        <p:nvSpPr>
-          <p:cNvPr id="15" name="TextBox 14"/>
+            <a:endParaRPr/>
+          </a:p>
+        </p:txBody>
+      </p:sp>
+      <p:sp>
+        <p:nvSpPr>
+          <p:cNvPr id="8" name="TextBox 7"/>
           <p:cNvSpPr txBox="1"/>
           <p:nvPr/>
         </p:nvSpPr>
         <p:spPr>
           <a:xfrm>
-            <a:off x="6400800" y="3858768"/>
-            <a:ext cx="4846320" cy="365760"/>
+            <a:off x="822960" y="4754880"/>
+            <a:ext cx="10515600" cy="461665"/>
+          </a:xfrm>
+          <a:prstGeom prst="rect">
+            <a:avLst/>
+          </a:prstGeom>
+          <a:noFill/>
+        </p:spPr>
+        <p:txBody>
+          <a:bodyPr wrap="square" lIns="91440" tIns="45720" rIns="91440" bIns="45720" anchor="t">
+            <a:spAutoFit/>
+          </a:bodyPr>
+          <a:lstStyle/>
+          <a:p>
+            <a:r>
+              <a:rPr sz="2400" b="1" dirty="0" err="1">
+                <a:solidFill>
+                  <a:srgbClr val="665EFD"/>
+                </a:solidFill>
+                <a:latin typeface="Inter"/>
+              </a:rPr>
+              <a:t>EvidenceGate</a:t>
+            </a:r>
+            <a:r>
+              <a:rPr lang="en-US" sz="2400" b="1" dirty="0">
+                <a:solidFill>
+                  <a:srgbClr val="665EFD"/>
+                </a:solidFill>
+                <a:latin typeface="Inter"/>
+              </a:rPr>
+              <a:t>. </a:t>
+            </a:r>
+            <a:r>
+              <a:rPr lang="en-US" sz="2400" b="1" dirty="0" err="1">
+                <a:solidFill>
+                  <a:srgbClr val="665EFD"/>
+                </a:solidFill>
+                <a:latin typeface="Inter"/>
+              </a:rPr>
+              <a:t>Fé</a:t>
+            </a:r>
+            <a:r>
+              <a:rPr sz="2400" b="1" dirty="0">
+                <a:solidFill>
+                  <a:srgbClr val="665EFD"/>
+                </a:solidFill>
+                <a:latin typeface="Inter"/>
+              </a:rPr>
+              <a:t> </a:t>
+            </a:r>
+            <a:r>
+              <a:rPr sz="2400" b="1" dirty="0" err="1">
+                <a:solidFill>
+                  <a:srgbClr val="665EFD"/>
+                </a:solidFill>
+                <a:latin typeface="Inter"/>
+              </a:rPr>
+              <a:t>pública</a:t>
+            </a:r>
+            <a:r>
+              <a:rPr sz="2400" b="1" dirty="0">
+                <a:solidFill>
+                  <a:srgbClr val="665EFD"/>
+                </a:solidFill>
+                <a:latin typeface="Inter"/>
+              </a:rPr>
+              <a:t> </a:t>
+            </a:r>
+            <a:r>
+              <a:rPr sz="2400" b="1" dirty="0" err="1">
+                <a:solidFill>
+                  <a:srgbClr val="665EFD"/>
+                </a:solidFill>
+                <a:latin typeface="Inter"/>
+              </a:rPr>
+              <a:t>programável</a:t>
+            </a:r>
+            <a:r>
+              <a:rPr sz="2400" b="1" dirty="0">
+                <a:solidFill>
+                  <a:srgbClr val="665EFD"/>
+                </a:solidFill>
+                <a:latin typeface="Inter"/>
+              </a:rPr>
+              <a:t>.</a:t>
+            </a:r>
+          </a:p>
+        </p:txBody>
+      </p:sp>
+      <p:sp>
+        <p:nvSpPr>
+          <p:cNvPr id="9" name="TextBox 8"/>
+          <p:cNvSpPr txBox="1"/>
+          <p:nvPr/>
+        </p:nvSpPr>
+        <p:spPr>
+          <a:xfrm>
+            <a:off x="822960" y="5486400"/>
+            <a:ext cx="10515600" cy="731520"/>
           </a:xfrm>
           <a:prstGeom prst="rect">
             <a:avLst/>
@@ -7098,27 +9041,33 @@
               </a:lnSpc>
             </a:pPr>
             <a:r>
-              <a:rPr sz="1700" b="1">
-                <a:solidFill>
-                  <a:srgbClr val="FBBF24"/>
-                </a:solidFill>
-                <a:latin typeface="Inter"/>
-              </a:rPr>
-              <a:t>Enterprise</a:t>
-            </a:r>
-          </a:p>
-        </p:txBody>
-      </p:sp>
-      <p:sp>
-        <p:nvSpPr>
-          <p:cNvPr id="16" name="TextBox 15"/>
+              <a:rPr sz="1400" b="0">
+                <a:solidFill>
+                  <a:srgbClr val="8B98B8"/>
+                </a:solidFill>
+                <a:latin typeface="Inter"/>
+              </a:rPr>
+              <a:t>evidencegate.163-192-115-82.sslip.io · github.com/acarloshenrique/evidencegate</a:t>
+            </a:r>
+          </a:p>
+        </p:txBody>
+      </p:sp>
+      <p:sp>
+        <p:nvSpPr>
+          <p:cNvPr id="11" name="TextBox 10">
+            <a:extLst>
+              <a:ext uri="{FF2B5EF4-FFF2-40B4-BE49-F238E27FC236}">
+                <a16:creationId xmlns:a16="http://schemas.microsoft.com/office/drawing/2014/main" id="{16C43248-1E55-0A4C-49EB-6577B7315177}"/>
+              </a:ext>
+            </a:extLst>
+          </p:cNvPr>
           <p:cNvSpPr txBox="1"/>
           <p:nvPr/>
         </p:nvSpPr>
         <p:spPr>
           <a:xfrm>
-            <a:off x="6400800" y="4242816"/>
-            <a:ext cx="4846320" cy="365760"/>
+            <a:off x="822960" y="1468120"/>
+            <a:ext cx="10515600" cy="2185214"/>
           </a:xfrm>
           <a:prstGeom prst="rect">
             <a:avLst/>
@@ -7126,1136 +9075,184 @@
           <a:noFill/>
         </p:spPr>
         <p:txBody>
-          <a:bodyPr wrap="square">
+          <a:bodyPr wrap="square" lIns="91440" tIns="45720" rIns="91440" bIns="45720" anchor="t">
             <a:spAutoFit/>
           </a:bodyPr>
           <a:lstStyle/>
           <a:p>
-            <a:pPr algn="l">
-              <a:lnSpc>
-                <a:spcPct val="100000"/>
-              </a:lnSpc>
-            </a:pPr>
-            <a:r>
-              <a:rPr sz="1200" b="0">
-                <a:solidFill>
-                  <a:srgbClr val="8B98B8"/>
-                </a:solidFill>
-                <a:latin typeface="Inter"/>
-              </a:rPr>
-              <a:t>VPC/self-host · BYO judge · arbitration desk</a:t>
-            </a:r>
-          </a:p>
-        </p:txBody>
-      </p:sp>
-      <p:sp>
-        <p:nvSpPr>
-          <p:cNvPr id="17" name="Rounded Rectangle 16"/>
-          <p:cNvSpPr/>
-          <p:nvPr/>
-        </p:nvSpPr>
-        <p:spPr>
-          <a:xfrm>
-            <a:off x="6217920" y="4855464"/>
-            <a:ext cx="5212080" cy="1325880"/>
-          </a:xfrm>
-          <a:prstGeom prst="roundRect">
-            <a:avLst>
-              <a:gd name="adj" fmla="val 6000"/>
-            </a:avLst>
-          </a:prstGeom>
-          <a:solidFill>
-            <a:srgbClr val="111731"/>
-          </a:solidFill>
-          <a:ln w="12700">
-            <a:solidFill>
-              <a:srgbClr val="1C2640"/>
-            </a:solidFill>
-          </a:ln>
-          <a:effectLst/>
-        </p:spPr>
-        <p:style>
-          <a:lnRef idx="1">
-            <a:schemeClr val="accent1"/>
-          </a:lnRef>
-          <a:fillRef idx="3">
-            <a:schemeClr val="accent1"/>
-          </a:fillRef>
-          <a:effectRef idx="2">
-            <a:schemeClr val="accent1"/>
-          </a:effectRef>
-          <a:fontRef idx="minor">
-            <a:schemeClr val="lt1"/>
-          </a:fontRef>
-        </p:style>
-        <p:txBody>
-          <a:bodyPr rtlCol="0" anchor="ctr"/>
-          <a:lstStyle/>
-          <a:p>
-            <a:pPr algn="ctr"/>
-          </a:p>
-        </p:txBody>
-      </p:sp>
-      <p:sp>
-        <p:nvSpPr>
-          <p:cNvPr id="18" name="TextBox 17"/>
-          <p:cNvSpPr txBox="1"/>
-          <p:nvPr/>
-        </p:nvSpPr>
-        <p:spPr>
-          <a:xfrm>
-            <a:off x="6400800" y="4946904"/>
-            <a:ext cx="4846320" cy="365760"/>
-          </a:xfrm>
-          <a:prstGeom prst="rect">
-            <a:avLst/>
-          </a:prstGeom>
-          <a:noFill/>
-        </p:spPr>
-        <p:txBody>
-          <a:bodyPr wrap="square">
-            <a:spAutoFit/>
-          </a:bodyPr>
-          <a:lstStyle/>
-          <a:p>
-            <a:pPr algn="l">
-              <a:lnSpc>
-                <a:spcPct val="100000"/>
-              </a:lnSpc>
-            </a:pPr>
-            <a:r>
-              <a:rPr sz="1500" b="1">
-                <a:solidFill>
-                  <a:srgbClr val="665EFD"/>
-                </a:solidFill>
-                <a:latin typeface="Inter"/>
-              </a:rPr>
-              <a:t>Unit economics</a:t>
-            </a:r>
-          </a:p>
-        </p:txBody>
-      </p:sp>
-      <p:sp>
-        <p:nvSpPr>
-          <p:cNvPr id="19" name="TextBox 18"/>
-          <p:cNvSpPr txBox="1"/>
-          <p:nvPr/>
-        </p:nvSpPr>
-        <p:spPr>
-          <a:xfrm>
-            <a:off x="6400800" y="5312664"/>
-            <a:ext cx="4846320" cy="822960"/>
-          </a:xfrm>
-          <a:prstGeom prst="rect">
-            <a:avLst/>
-          </a:prstGeom>
-          <a:noFill/>
-        </p:spPr>
-        <p:txBody>
-          <a:bodyPr wrap="square">
-            <a:spAutoFit/>
-          </a:bodyPr>
-          <a:lstStyle/>
-          <a:p>
-            <a:pPr algn="l">
-              <a:lnSpc>
-                <a:spcPct val="110000"/>
-              </a:lnSpc>
-            </a:pPr>
-            <a:r>
-              <a:rPr sz="1200" b="0">
-                <a:solidFill>
-                  <a:srgbClr val="8B98B8"/>
-                </a:solidFill>
-                <a:latin typeface="Inter"/>
-              </a:rPr>
-              <a:t>COGS $0.02/decisão → margem ~80%. Uma liquidação errada de $1.000 custa 10.000 verificações.</a:t>
-            </a:r>
-          </a:p>
-        </p:txBody>
-      </p:sp>
-    </p:spTree>
-  </p:cSld>
-  <p:clrMapOvr>
-    <a:masterClrMapping/>
-  </p:clrMapOvr>
-</p:sld>
-</file>
-
-<file path=ppt/slides/slide7.xml><?xml version="1.0" encoding="utf-8"?>
-<p:sld xmlns:a="http://schemas.openxmlformats.org/drawingml/2006/main" xmlns:p="http://schemas.openxmlformats.org/presentationml/2006/main" xmlns:r="http://schemas.openxmlformats.org/officeDocument/2006/relationships">
-  <p:cSld>
-    <p:spTree>
-      <p:nvGrpSpPr>
-        <p:cNvPr id="1" name=""/>
-        <p:cNvGrpSpPr/>
-        <p:nvPr/>
-      </p:nvGrpSpPr>
-      <p:grpSpPr/>
-      <p:sp>
-        <p:nvSpPr>
-          <p:cNvPr id="2" name="Rectangle 1"/>
-          <p:cNvSpPr/>
-          <p:nvPr/>
-        </p:nvSpPr>
-        <p:spPr>
-          <a:xfrm>
-            <a:off x="0" y="0"/>
-            <a:ext cx="12191695" cy="6858000"/>
-          </a:xfrm>
-          <a:prstGeom prst="rect">
-            <a:avLst/>
-          </a:prstGeom>
-          <a:solidFill>
-            <a:srgbClr val="0A0E1E"/>
-          </a:solidFill>
-          <a:ln>
-            <a:noFill/>
-          </a:ln>
-          <a:effectLst/>
-        </p:spPr>
-        <p:style>
-          <a:lnRef idx="1">
-            <a:schemeClr val="accent1"/>
-          </a:lnRef>
-          <a:fillRef idx="3">
-            <a:schemeClr val="accent1"/>
-          </a:fillRef>
-          <a:effectRef idx="2">
-            <a:schemeClr val="accent1"/>
-          </a:effectRef>
-          <a:fontRef idx="minor">
-            <a:schemeClr val="lt1"/>
-          </a:fontRef>
-        </p:style>
-        <p:txBody>
-          <a:bodyPr rtlCol="0" anchor="ctr"/>
-          <a:lstStyle/>
-          <a:p>
-            <a:pPr algn="ctr"/>
-          </a:p>
-        </p:txBody>
-      </p:sp>
-      <p:sp>
-        <p:nvSpPr>
-          <p:cNvPr id="3" name="TextBox 2"/>
-          <p:cNvSpPr txBox="1"/>
-          <p:nvPr/>
-        </p:nvSpPr>
-        <p:spPr>
-          <a:xfrm>
-            <a:off x="822960" y="640080"/>
-            <a:ext cx="5486400" cy="365760"/>
-          </a:xfrm>
-          <a:prstGeom prst="rect">
-            <a:avLst/>
-          </a:prstGeom>
-          <a:noFill/>
-        </p:spPr>
-        <p:txBody>
-          <a:bodyPr wrap="square">
-            <a:spAutoFit/>
-          </a:bodyPr>
-          <a:lstStyle/>
-          <a:p>
-            <a:pPr algn="l">
-              <a:lnSpc>
-                <a:spcPct val="100000"/>
-              </a:lnSpc>
-            </a:pPr>
-            <a:r>
-              <a:rPr sz="1300" b="1">
-                <a:solidFill>
-                  <a:srgbClr val="665EFD"/>
-                </a:solidFill>
-                <a:latin typeface="Inter"/>
-              </a:rPr>
-              <a:t>POR QUE AGORA · POR QUE A GENTE</a:t>
-            </a:r>
-          </a:p>
-        </p:txBody>
-      </p:sp>
-      <p:sp>
-        <p:nvSpPr>
-          <p:cNvPr id="4" name="TextBox 3"/>
-          <p:cNvSpPr txBox="1"/>
-          <p:nvPr/>
-        </p:nvSpPr>
-        <p:spPr>
-          <a:xfrm>
-            <a:off x="822960" y="1051560"/>
-            <a:ext cx="10515600" cy="731520"/>
-          </a:xfrm>
-          <a:prstGeom prst="rect">
-            <a:avLst/>
-          </a:prstGeom>
-          <a:noFill/>
-        </p:spPr>
-        <p:txBody>
-          <a:bodyPr wrap="square">
-            <a:spAutoFit/>
-          </a:bodyPr>
-          <a:lstStyle/>
-          <a:p>
-            <a:pPr algn="l">
-              <a:lnSpc>
-                <a:spcPct val="100000"/>
-              </a:lnSpc>
-            </a:pPr>
-            <a:r>
-              <a:rPr sz="3400" b="1">
-                <a:solidFill>
-                  <a:srgbClr val="FFFFFF"/>
-                </a:solidFill>
-                <a:latin typeface="Inter"/>
-              </a:rPr>
-              <a:t>Os trilhos estão prontos. O antifraude, não.</a:t>
-            </a:r>
-          </a:p>
-        </p:txBody>
-      </p:sp>
-      <p:sp>
-        <p:nvSpPr>
-          <p:cNvPr id="5" name="Rectangle 4"/>
-          <p:cNvSpPr/>
-          <p:nvPr/>
-        </p:nvSpPr>
-        <p:spPr>
-          <a:xfrm>
-            <a:off x="822960" y="1920240"/>
-            <a:ext cx="10515600" cy="9525"/>
-          </a:xfrm>
-          <a:prstGeom prst="rect">
-            <a:avLst/>
-          </a:prstGeom>
-          <a:solidFill>
-            <a:srgbClr val="1C2640"/>
-          </a:solidFill>
-          <a:ln>
-            <a:noFill/>
-          </a:ln>
-          <a:effectLst/>
-        </p:spPr>
-        <p:style>
-          <a:lnRef idx="1">
-            <a:schemeClr val="accent1"/>
-          </a:lnRef>
-          <a:fillRef idx="3">
-            <a:schemeClr val="accent1"/>
-          </a:fillRef>
-          <a:effectRef idx="2">
-            <a:schemeClr val="accent1"/>
-          </a:effectRef>
-          <a:fontRef idx="minor">
-            <a:schemeClr val="lt1"/>
-          </a:fontRef>
-        </p:style>
-        <p:txBody>
-          <a:bodyPr rtlCol="0" anchor="ctr"/>
-          <a:lstStyle/>
-          <a:p>
-            <a:pPr algn="ctr"/>
-          </a:p>
-        </p:txBody>
-      </p:sp>
-      <p:sp>
-        <p:nvSpPr>
-          <p:cNvPr id="6" name="Rounded Rectangle 5"/>
-          <p:cNvSpPr/>
-          <p:nvPr/>
-        </p:nvSpPr>
-        <p:spPr>
-          <a:xfrm>
-            <a:off x="822960" y="2194560"/>
-            <a:ext cx="3383280" cy="2377440"/>
-          </a:xfrm>
-          <a:prstGeom prst="roundRect">
-            <a:avLst>
-              <a:gd name="adj" fmla="val 6000"/>
-            </a:avLst>
-          </a:prstGeom>
-          <a:solidFill>
-            <a:srgbClr val="111731"/>
-          </a:solidFill>
-          <a:ln w="12700">
-            <a:solidFill>
-              <a:srgbClr val="1C2640"/>
-            </a:solidFill>
-          </a:ln>
-          <a:effectLst/>
-        </p:spPr>
-        <p:style>
-          <a:lnRef idx="1">
-            <a:schemeClr val="accent1"/>
-          </a:lnRef>
-          <a:fillRef idx="3">
-            <a:schemeClr val="accent1"/>
-          </a:fillRef>
-          <a:effectRef idx="2">
-            <a:schemeClr val="accent1"/>
-          </a:effectRef>
-          <a:fontRef idx="minor">
-            <a:schemeClr val="lt1"/>
-          </a:fontRef>
-        </p:style>
-        <p:txBody>
-          <a:bodyPr rtlCol="0" anchor="ctr"/>
-          <a:lstStyle/>
-          <a:p>
-            <a:pPr algn="ctr"/>
-          </a:p>
-        </p:txBody>
-      </p:sp>
-      <p:sp>
-        <p:nvSpPr>
-          <p:cNvPr id="7" name="TextBox 6"/>
-          <p:cNvSpPr txBox="1"/>
-          <p:nvPr/>
-        </p:nvSpPr>
-        <p:spPr>
-          <a:xfrm>
-            <a:off x="1024128" y="2377440"/>
-            <a:ext cx="3017520" cy="365760"/>
-          </a:xfrm>
-          <a:prstGeom prst="rect">
-            <a:avLst/>
-          </a:prstGeom>
-          <a:noFill/>
-        </p:spPr>
-        <p:txBody>
-          <a:bodyPr wrap="square">
-            <a:spAutoFit/>
-          </a:bodyPr>
-          <a:lstStyle/>
-          <a:p>
-            <a:pPr algn="l">
-              <a:lnSpc>
-                <a:spcPct val="100000"/>
-              </a:lnSpc>
-            </a:pPr>
-            <a:r>
-              <a:rPr sz="1700" b="1">
-                <a:solidFill>
-                  <a:srgbClr val="38BDF8"/>
-                </a:solidFill>
-                <a:latin typeface="Inter"/>
-              </a:rPr>
-              <a:t>Timing</a:t>
-            </a:r>
-          </a:p>
-        </p:txBody>
-      </p:sp>
-      <p:sp>
-        <p:nvSpPr>
-          <p:cNvPr id="8" name="TextBox 7"/>
-          <p:cNvSpPr txBox="1"/>
-          <p:nvPr/>
-        </p:nvSpPr>
-        <p:spPr>
-          <a:xfrm>
-            <a:off x="1024128" y="2834640"/>
-            <a:ext cx="3017520" cy="1645920"/>
-          </a:xfrm>
-          <a:prstGeom prst="rect">
-            <a:avLst/>
-          </a:prstGeom>
-          <a:noFill/>
-        </p:spPr>
-        <p:txBody>
-          <a:bodyPr wrap="square">
-            <a:spAutoFit/>
-          </a:bodyPr>
-          <a:lstStyle/>
-          <a:p>
-            <a:pPr algn="l">
-              <a:lnSpc>
-                <a:spcPct val="110000"/>
-              </a:lnSpc>
-            </a:pPr>
-            <a:r>
-              <a:rPr sz="1250" b="0">
-                <a:solidFill>
-                  <a:srgbClr val="8B98B8"/>
-                </a:solidFill>
-                <a:latin typeface="Inter"/>
-              </a:rPr>
-              <a:t>AP2 (Mastercard, PayPal, Amex), ACP (OpenAI+Stripe), x402 (Coinbase), ERC-8004 (Ethereum). Todo o capital do mundo nos trilhos — ninguém na verificação.</a:t>
-            </a:r>
-          </a:p>
-        </p:txBody>
-      </p:sp>
-      <p:sp>
-        <p:nvSpPr>
-          <p:cNvPr id="9" name="Rounded Rectangle 8"/>
-          <p:cNvSpPr/>
-          <p:nvPr/>
-        </p:nvSpPr>
-        <p:spPr>
-          <a:xfrm>
-            <a:off x="4434840" y="2194560"/>
-            <a:ext cx="3383280" cy="2377440"/>
-          </a:xfrm>
-          <a:prstGeom prst="roundRect">
-            <a:avLst>
-              <a:gd name="adj" fmla="val 6000"/>
-            </a:avLst>
-          </a:prstGeom>
-          <a:solidFill>
-            <a:srgbClr val="111731"/>
-          </a:solidFill>
-          <a:ln w="12700">
-            <a:solidFill>
-              <a:srgbClr val="1C2640"/>
-            </a:solidFill>
-          </a:ln>
-          <a:effectLst/>
-        </p:spPr>
-        <p:style>
-          <a:lnRef idx="1">
-            <a:schemeClr val="accent1"/>
-          </a:lnRef>
-          <a:fillRef idx="3">
-            <a:schemeClr val="accent1"/>
-          </a:fillRef>
-          <a:effectRef idx="2">
-            <a:schemeClr val="accent1"/>
-          </a:effectRef>
-          <a:fontRef idx="minor">
-            <a:schemeClr val="lt1"/>
-          </a:fontRef>
-        </p:style>
-        <p:txBody>
-          <a:bodyPr rtlCol="0" anchor="ctr"/>
-          <a:lstStyle/>
-          <a:p>
-            <a:pPr algn="ctr"/>
-          </a:p>
-        </p:txBody>
-      </p:sp>
-      <p:sp>
-        <p:nvSpPr>
-          <p:cNvPr id="10" name="TextBox 9"/>
-          <p:cNvSpPr txBox="1"/>
-          <p:nvPr/>
-        </p:nvSpPr>
-        <p:spPr>
-          <a:xfrm>
-            <a:off x="4636008" y="2377440"/>
-            <a:ext cx="3017520" cy="365760"/>
-          </a:xfrm>
-          <a:prstGeom prst="rect">
-            <a:avLst/>
-          </a:prstGeom>
-          <a:noFill/>
-        </p:spPr>
-        <p:txBody>
-          <a:bodyPr wrap="square">
-            <a:spAutoFit/>
-          </a:bodyPr>
-          <a:lstStyle/>
-          <a:p>
-            <a:pPr algn="l">
-              <a:lnSpc>
-                <a:spcPct val="100000"/>
-              </a:lnSpc>
-            </a:pPr>
-            <a:r>
-              <a:rPr sz="1700" b="1">
-                <a:solidFill>
-                  <a:srgbClr val="34D399"/>
-                </a:solidFill>
-                <a:latin typeface="Inter"/>
-              </a:rPr>
-              <a:t>Moat</a:t>
-            </a:r>
-          </a:p>
-        </p:txBody>
-      </p:sp>
-      <p:sp>
-        <p:nvSpPr>
-          <p:cNvPr id="11" name="TextBox 10"/>
-          <p:cNvSpPr txBox="1"/>
-          <p:nvPr/>
-        </p:nvSpPr>
-        <p:spPr>
-          <a:xfrm>
-            <a:off x="4636008" y="2834640"/>
-            <a:ext cx="3017520" cy="1645920"/>
-          </a:xfrm>
-          <a:prstGeom prst="rect">
-            <a:avLst/>
-          </a:prstGeom>
-          <a:noFill/>
-        </p:spPr>
-        <p:txBody>
-          <a:bodyPr wrap="square">
-            <a:spAutoFit/>
-          </a:bodyPr>
-          <a:lstStyle/>
-          <a:p>
-            <a:pPr algn="l">
-              <a:lnSpc>
-                <a:spcPct val="110000"/>
-              </a:lnSpc>
-            </a:pPr>
-            <a:r>
-              <a:rPr sz="1250" b="0">
-                <a:solidFill>
-                  <a:srgbClr val="8B98B8"/>
-                </a:solidFill>
-                <a:latin typeface="Inter"/>
-              </a:rPr>
-              <a:t>Rede antifraude: cada golpe barrado num cliente protege todos. É o Stripe Radar dos agentes — dados que ninguém constrói sozinho. Rede, não feature.</a:t>
-            </a:r>
-          </a:p>
-        </p:txBody>
-      </p:sp>
-      <p:sp>
-        <p:nvSpPr>
-          <p:cNvPr id="12" name="Rounded Rectangle 11"/>
-          <p:cNvSpPr/>
-          <p:nvPr/>
-        </p:nvSpPr>
-        <p:spPr>
-          <a:xfrm>
-            <a:off x="8046720" y="2194560"/>
-            <a:ext cx="3383280" cy="2377440"/>
-          </a:xfrm>
-          <a:prstGeom prst="roundRect">
-            <a:avLst>
-              <a:gd name="adj" fmla="val 6000"/>
-            </a:avLst>
-          </a:prstGeom>
-          <a:solidFill>
-            <a:srgbClr val="111731"/>
-          </a:solidFill>
-          <a:ln w="12700">
-            <a:solidFill>
-              <a:srgbClr val="1C2640"/>
-            </a:solidFill>
-          </a:ln>
-          <a:effectLst/>
-        </p:spPr>
-        <p:style>
-          <a:lnRef idx="1">
-            <a:schemeClr val="accent1"/>
-          </a:lnRef>
-          <a:fillRef idx="3">
-            <a:schemeClr val="accent1"/>
-          </a:fillRef>
-          <a:effectRef idx="2">
-            <a:schemeClr val="accent1"/>
-          </a:effectRef>
-          <a:fontRef idx="minor">
-            <a:schemeClr val="lt1"/>
-          </a:fontRef>
-        </p:style>
-        <p:txBody>
-          <a:bodyPr rtlCol="0" anchor="ctr"/>
-          <a:lstStyle/>
-          <a:p>
-            <a:pPr algn="ctr"/>
-          </a:p>
-        </p:txBody>
-      </p:sp>
-      <p:sp>
-        <p:nvSpPr>
-          <p:cNvPr id="13" name="TextBox 12"/>
-          <p:cNvSpPr txBox="1"/>
-          <p:nvPr/>
-        </p:nvSpPr>
-        <p:spPr>
-          <a:xfrm>
-            <a:off x="8247888" y="2377440"/>
-            <a:ext cx="3017520" cy="365760"/>
-          </a:xfrm>
-          <a:prstGeom prst="rect">
-            <a:avLst/>
-          </a:prstGeom>
-          <a:noFill/>
-        </p:spPr>
-        <p:txBody>
-          <a:bodyPr wrap="square">
-            <a:spAutoFit/>
-          </a:bodyPr>
-          <a:lstStyle/>
-          <a:p>
-            <a:pPr algn="l">
-              <a:lnSpc>
-                <a:spcPct val="100000"/>
-              </a:lnSpc>
-            </a:pPr>
-            <a:r>
-              <a:rPr sz="1700" b="1">
-                <a:solidFill>
-                  <a:srgbClr val="FBBF24"/>
-                </a:solidFill>
-                <a:latin typeface="Inter"/>
-              </a:rPr>
-              <a:t>Defesa</a:t>
-            </a:r>
-          </a:p>
-        </p:txBody>
-      </p:sp>
-      <p:sp>
-        <p:nvSpPr>
-          <p:cNvPr id="14" name="TextBox 13"/>
-          <p:cNvSpPr txBox="1"/>
-          <p:nvPr/>
-        </p:nvSpPr>
-        <p:spPr>
-          <a:xfrm>
-            <a:off x="8247888" y="2834640"/>
-            <a:ext cx="3017520" cy="1645920"/>
-          </a:xfrm>
-          <a:prstGeom prst="rect">
-            <a:avLst/>
-          </a:prstGeom>
-          <a:noFill/>
-        </p:spPr>
-        <p:txBody>
-          <a:bodyPr wrap="square">
-            <a:spAutoFit/>
-          </a:bodyPr>
-          <a:lstStyle/>
-          <a:p>
-            <a:pPr algn="l">
-              <a:lnSpc>
-                <a:spcPct val="110000"/>
-              </a:lnSpc>
-            </a:pPr>
-            <a:r>
-              <a:rPr sz="1250" b="0">
-                <a:solidFill>
-                  <a:srgbClr val="8B98B8"/>
-                </a:solidFill>
-                <a:latin typeface="Inter"/>
-              </a:rPr>
-              <a:t>Open-core do verifier + export PROV-O/W3C + BYO judge. Padrão aberto é como a gente vira padrão.</a:t>
-            </a:r>
-          </a:p>
-        </p:txBody>
-      </p:sp>
-      <p:sp>
-        <p:nvSpPr>
-          <p:cNvPr id="15" name="TextBox 14"/>
-          <p:cNvSpPr txBox="1"/>
-          <p:nvPr/>
-        </p:nvSpPr>
-        <p:spPr>
-          <a:xfrm>
-            <a:off x="822960" y="4892040"/>
-            <a:ext cx="10515600" cy="365760"/>
-          </a:xfrm>
-          <a:prstGeom prst="rect">
-            <a:avLst/>
-          </a:prstGeom>
-          <a:noFill/>
-        </p:spPr>
-        <p:txBody>
-          <a:bodyPr wrap="square">
-            <a:spAutoFit/>
-          </a:bodyPr>
-          <a:lstStyle/>
-          <a:p>
-            <a:pPr algn="l">
-              <a:lnSpc>
-                <a:spcPct val="100000"/>
-              </a:lnSpc>
-            </a:pPr>
-            <a:r>
-              <a:rPr sz="1600" b="1">
-                <a:solidFill>
-                  <a:srgbClr val="DBE3F5"/>
-                </a:solidFill>
-                <a:latin typeface="Inter"/>
-              </a:rPr>
-              <a:t>GTM: 3 design partners (piloto real, feedback brutal) → self-serve API → registry como rede.</a:t>
-            </a:r>
-          </a:p>
-        </p:txBody>
-      </p:sp>
-      <p:sp>
-        <p:nvSpPr>
-          <p:cNvPr id="16" name="TextBox 15"/>
-          <p:cNvSpPr txBox="1"/>
-          <p:nvPr/>
-        </p:nvSpPr>
-        <p:spPr>
-          <a:xfrm>
-            <a:off x="822960" y="5440680"/>
-            <a:ext cx="10515600" cy="822960"/>
-          </a:xfrm>
-          <a:prstGeom prst="rect">
-            <a:avLst/>
-          </a:prstGeom>
-          <a:noFill/>
-        </p:spPr>
-        <p:txBody>
-          <a:bodyPr wrap="square">
-            <a:spAutoFit/>
-          </a:bodyPr>
-          <a:lstStyle/>
-          <a:p>
-            <a:pPr algn="l">
-              <a:lnSpc>
-                <a:spcPct val="115000"/>
-              </a:lnSpc>
-            </a:pPr>
-            <a:r>
-              <a:rPr sz="1400" b="0">
-                <a:solidFill>
-                  <a:srgbClr val="8B98B8"/>
-                </a:solidFill>
-                <a:latin typeface="Inter"/>
-              </a:rPr>
-              <a:t>Não somos PSP, não somos marketplace, não competimos com os rails — somos a camada que falta em cima deles. Quanto maior o volume deles, maior nosso mercado.</a:t>
-            </a:r>
-          </a:p>
-        </p:txBody>
-      </p:sp>
-    </p:spTree>
-  </p:cSld>
-  <p:clrMapOvr>
-    <a:masterClrMapping/>
-  </p:clrMapOvr>
-</p:sld>
-</file>
-
-<file path=ppt/slides/slide8.xml><?xml version="1.0" encoding="utf-8"?>
-<p:sld xmlns:a="http://schemas.openxmlformats.org/drawingml/2006/main" xmlns:p="http://schemas.openxmlformats.org/presentationml/2006/main" xmlns:r="http://schemas.openxmlformats.org/officeDocument/2006/relationships">
-  <p:cSld>
-    <p:spTree>
-      <p:nvGrpSpPr>
-        <p:cNvPr id="1" name=""/>
-        <p:cNvGrpSpPr/>
-        <p:nvPr/>
-      </p:nvGrpSpPr>
-      <p:grpSpPr/>
-      <p:sp>
-        <p:nvSpPr>
-          <p:cNvPr id="2" name="Rectangle 1"/>
-          <p:cNvSpPr/>
-          <p:nvPr/>
-        </p:nvSpPr>
-        <p:spPr>
-          <a:xfrm>
-            <a:off x="0" y="0"/>
-            <a:ext cx="12191695" cy="6858000"/>
-          </a:xfrm>
-          <a:prstGeom prst="rect">
-            <a:avLst/>
-          </a:prstGeom>
-          <a:solidFill>
-            <a:srgbClr val="0A0E1E"/>
-          </a:solidFill>
-          <a:ln>
-            <a:noFill/>
-          </a:ln>
-          <a:effectLst/>
-        </p:spPr>
-        <p:style>
-          <a:lnRef idx="1">
-            <a:schemeClr val="accent1"/>
-          </a:lnRef>
-          <a:fillRef idx="3">
-            <a:schemeClr val="accent1"/>
-          </a:fillRef>
-          <a:effectRef idx="2">
-            <a:schemeClr val="accent1"/>
-          </a:effectRef>
-          <a:fontRef idx="minor">
-            <a:schemeClr val="lt1"/>
-          </a:fontRef>
-        </p:style>
-        <p:txBody>
-          <a:bodyPr rtlCol="0" anchor="ctr"/>
-          <a:lstStyle/>
-          <a:p>
-            <a:pPr algn="ctr"/>
-          </a:p>
-        </p:txBody>
-      </p:sp>
-      <p:sp>
-        <p:nvSpPr>
-          <p:cNvPr id="3" name="Rectangle 2"/>
-          <p:cNvSpPr/>
-          <p:nvPr/>
-        </p:nvSpPr>
-        <p:spPr>
-          <a:xfrm>
-            <a:off x="0" y="6807200"/>
-            <a:ext cx="12191695" cy="50800"/>
-          </a:xfrm>
-          <a:prstGeom prst="rect">
-            <a:avLst/>
-          </a:prstGeom>
-          <a:solidFill>
-            <a:srgbClr val="533AFD"/>
-          </a:solidFill>
-          <a:ln>
-            <a:noFill/>
-          </a:ln>
-          <a:effectLst/>
-        </p:spPr>
-        <p:style>
-          <a:lnRef idx="1">
-            <a:schemeClr val="accent1"/>
-          </a:lnRef>
-          <a:fillRef idx="3">
-            <a:schemeClr val="accent1"/>
-          </a:fillRef>
-          <a:effectRef idx="2">
-            <a:schemeClr val="accent1"/>
-          </a:effectRef>
-          <a:fontRef idx="minor">
-            <a:schemeClr val="lt1"/>
-          </a:fontRef>
-        </p:style>
-        <p:txBody>
-          <a:bodyPr rtlCol="0" anchor="ctr"/>
-          <a:lstStyle/>
-          <a:p>
-            <a:pPr algn="ctr"/>
-          </a:p>
-        </p:txBody>
-      </p:sp>
-      <p:sp>
-        <p:nvSpPr>
-          <p:cNvPr id="4" name="TextBox 3"/>
-          <p:cNvSpPr txBox="1"/>
-          <p:nvPr/>
-        </p:nvSpPr>
-        <p:spPr>
-          <a:xfrm>
-            <a:off x="822960" y="1645920"/>
-            <a:ext cx="10515600" cy="914400"/>
-          </a:xfrm>
-          <a:prstGeom prst="rect">
-            <a:avLst/>
-          </a:prstGeom>
-          <a:noFill/>
-        </p:spPr>
-        <p:txBody>
-          <a:bodyPr wrap="square">
-            <a:spAutoFit/>
-          </a:bodyPr>
-          <a:lstStyle/>
-          <a:p>
-            <a:pPr algn="l">
-              <a:lnSpc>
-                <a:spcPct val="100000"/>
-              </a:lnSpc>
-            </a:pPr>
-            <a:r>
-              <a:rPr sz="3200" b="0">
-                <a:solidFill>
-                  <a:srgbClr val="DBE3F5"/>
-                </a:solidFill>
-                <a:latin typeface="Inter"/>
-              </a:rPr>
-              <a:t>A gente não tirou o humano do sistema.</a:t>
-            </a:r>
-          </a:p>
-        </p:txBody>
-      </p:sp>
-      <p:sp>
-        <p:nvSpPr>
-          <p:cNvPr id="5" name="TextBox 4"/>
-          <p:cNvSpPr txBox="1"/>
-          <p:nvPr/>
-        </p:nvSpPr>
-        <p:spPr>
-          <a:xfrm>
-            <a:off x="822960" y="2514600"/>
-            <a:ext cx="10515600" cy="914400"/>
-          </a:xfrm>
-          <a:prstGeom prst="rect">
-            <a:avLst/>
-          </a:prstGeom>
-          <a:noFill/>
-        </p:spPr>
-        <p:txBody>
-          <a:bodyPr wrap="square">
-            <a:spAutoFit/>
-          </a:bodyPr>
-          <a:lstStyle/>
-          <a:p>
-            <a:pPr algn="l">
-              <a:lnSpc>
-                <a:spcPct val="100000"/>
-              </a:lnSpc>
-            </a:pPr>
-            <a:r>
-              <a:rPr sz="4400" b="1">
-                <a:solidFill>
-                  <a:srgbClr val="FFFFFF"/>
-                </a:solidFill>
-                <a:latin typeface="Inter"/>
-              </a:rPr>
-              <a:t>Tirou o humano do caminho.</a:t>
-            </a:r>
-          </a:p>
-        </p:txBody>
-      </p:sp>
-      <p:sp>
-        <p:nvSpPr>
-          <p:cNvPr id="6" name="TextBox 5"/>
-          <p:cNvSpPr txBox="1"/>
-          <p:nvPr/>
-        </p:nvSpPr>
-        <p:spPr>
-          <a:xfrm>
-            <a:off x="822960" y="3657600"/>
-            <a:ext cx="10515600" cy="640080"/>
-          </a:xfrm>
-          <a:prstGeom prst="rect">
-            <a:avLst/>
-          </a:prstGeom>
-          <a:noFill/>
-        </p:spPr>
-        <p:txBody>
-          <a:bodyPr wrap="square">
-            <a:spAutoFit/>
-          </a:bodyPr>
-          <a:lstStyle/>
-          <a:p>
-            <a:pPr algn="l">
-              <a:lnSpc>
-                <a:spcPct val="100000"/>
-              </a:lnSpc>
-            </a:pPr>
-            <a:r>
-              <a:rPr sz="1800" b="0">
-                <a:solidFill>
-                  <a:srgbClr val="8B98B8"/>
-                </a:solidFill>
-                <a:latin typeface="Inter"/>
-              </a:rPr>
-              <a:t>Settlement em velocidade de máquina. Humano só pela exceção — e até a exceção fica na trilha.</a:t>
-            </a:r>
-          </a:p>
-        </p:txBody>
-      </p:sp>
-      <p:sp>
-        <p:nvSpPr>
-          <p:cNvPr id="7" name="Rectangle 6"/>
-          <p:cNvSpPr/>
-          <p:nvPr/>
-        </p:nvSpPr>
-        <p:spPr>
-          <a:xfrm>
-            <a:off x="822960" y="4480560"/>
-            <a:ext cx="10515600" cy="9525"/>
-          </a:xfrm>
-          <a:prstGeom prst="rect">
-            <a:avLst/>
-          </a:prstGeom>
-          <a:solidFill>
-            <a:srgbClr val="1C2640"/>
-          </a:solidFill>
-          <a:ln>
-            <a:noFill/>
-          </a:ln>
-          <a:effectLst/>
-        </p:spPr>
-        <p:style>
-          <a:lnRef idx="1">
-            <a:schemeClr val="accent1"/>
-          </a:lnRef>
-          <a:fillRef idx="3">
-            <a:schemeClr val="accent1"/>
-          </a:fillRef>
-          <a:effectRef idx="2">
-            <a:schemeClr val="accent1"/>
-          </a:effectRef>
-          <a:fontRef idx="minor">
-            <a:schemeClr val="lt1"/>
-          </a:fontRef>
-        </p:style>
-        <p:txBody>
-          <a:bodyPr rtlCol="0" anchor="ctr"/>
-          <a:lstStyle/>
-          <a:p>
-            <a:pPr algn="ctr"/>
-          </a:p>
-        </p:txBody>
-      </p:sp>
-      <p:sp>
-        <p:nvSpPr>
-          <p:cNvPr id="8" name="TextBox 7"/>
-          <p:cNvSpPr txBox="1"/>
-          <p:nvPr/>
-        </p:nvSpPr>
-        <p:spPr>
-          <a:xfrm>
-            <a:off x="822960" y="4754880"/>
-            <a:ext cx="10515600" cy="548640"/>
-          </a:xfrm>
-          <a:prstGeom prst="rect">
-            <a:avLst/>
-          </a:prstGeom>
-          <a:noFill/>
-        </p:spPr>
-        <p:txBody>
-          <a:bodyPr wrap="square">
-            <a:spAutoFit/>
-          </a:bodyPr>
-          <a:lstStyle/>
-          <a:p>
-            <a:pPr algn="l">
-              <a:lnSpc>
-                <a:spcPct val="100000"/>
-              </a:lnSpc>
-            </a:pPr>
-            <a:r>
-              <a:rPr sz="2400" b="1">
-                <a:solidFill>
-                  <a:srgbClr val="665EFD"/>
-                </a:solidFill>
-                <a:latin typeface="Inter"/>
-              </a:rPr>
-              <a:t>EvidenceGate — o radar antifraude dos agentes.</a:t>
-            </a:r>
-          </a:p>
-        </p:txBody>
-      </p:sp>
-      <p:sp>
-        <p:nvSpPr>
-          <p:cNvPr id="9" name="TextBox 8"/>
-          <p:cNvSpPr txBox="1"/>
-          <p:nvPr/>
-        </p:nvSpPr>
-        <p:spPr>
-          <a:xfrm>
-            <a:off x="822960" y="5486400"/>
-            <a:ext cx="10515600" cy="731520"/>
-          </a:xfrm>
-          <a:prstGeom prst="rect">
-            <a:avLst/>
-          </a:prstGeom>
-          <a:noFill/>
-        </p:spPr>
-        <p:txBody>
-          <a:bodyPr wrap="square">
-            <a:spAutoFit/>
-          </a:bodyPr>
-          <a:lstStyle/>
-          <a:p>
-            <a:pPr algn="l">
-              <a:lnSpc>
-                <a:spcPct val="100000"/>
-              </a:lnSpc>
-            </a:pPr>
-            <a:r>
-              <a:rPr sz="1400" b="0">
-                <a:solidFill>
-                  <a:srgbClr val="8B98B8"/>
-                </a:solidFill>
-                <a:latin typeface="Inter"/>
-              </a:rPr>
-              <a:t>evidencegate.163-192-115-82.sslip.io · github.com/acarloshenrique/evidencegate</a:t>
-            </a:r>
+            <a:r>
+              <a:rPr lang="en-US" sz="3400" dirty="0">
+                <a:solidFill>
+                  <a:srgbClr val="FFFFFF"/>
+                </a:solidFill>
+                <a:latin typeface="Inter"/>
+              </a:rPr>
+              <a:t>O </a:t>
+            </a:r>
+            <a:r>
+              <a:rPr lang="en-US" sz="3400" dirty="0" err="1">
+                <a:solidFill>
+                  <a:srgbClr val="FFFFFF"/>
+                </a:solidFill>
+                <a:latin typeface="Inter"/>
+              </a:rPr>
+              <a:t>ecossistema</a:t>
+            </a:r>
+            <a:r>
+              <a:rPr lang="en-US" sz="3400" dirty="0">
+                <a:solidFill>
+                  <a:srgbClr val="FFFFFF"/>
+                </a:solidFill>
+                <a:latin typeface="Inter"/>
+              </a:rPr>
+              <a:t> </a:t>
+            </a:r>
+            <a:r>
+              <a:rPr lang="en-US" sz="3400" dirty="0" err="1">
+                <a:solidFill>
+                  <a:srgbClr val="FFFFFF"/>
+                </a:solidFill>
+                <a:latin typeface="Inter"/>
+              </a:rPr>
+              <a:t>está</a:t>
+            </a:r>
+            <a:r>
+              <a:rPr lang="en-US" sz="3400" dirty="0">
+                <a:solidFill>
+                  <a:srgbClr val="FFFFFF"/>
+                </a:solidFill>
+                <a:latin typeface="Inter"/>
+              </a:rPr>
+              <a:t> </a:t>
+            </a:r>
+            <a:r>
+              <a:rPr lang="en-US" sz="3400" dirty="0" err="1">
+                <a:solidFill>
+                  <a:srgbClr val="FFFFFF"/>
+                </a:solidFill>
+                <a:latin typeface="Inter"/>
+              </a:rPr>
+              <a:t>quase</a:t>
+            </a:r>
+            <a:r>
+              <a:rPr lang="en-US" sz="3400" dirty="0">
+                <a:solidFill>
+                  <a:srgbClr val="FFFFFF"/>
+                </a:solidFill>
+                <a:latin typeface="Inter"/>
+              </a:rPr>
+              <a:t> </a:t>
+            </a:r>
+            <a:r>
+              <a:rPr lang="en-US" sz="3400" dirty="0" err="1">
+                <a:solidFill>
+                  <a:srgbClr val="FFFFFF"/>
+                </a:solidFill>
+                <a:latin typeface="Inter"/>
+              </a:rPr>
+              <a:t>completo</a:t>
+            </a:r>
+            <a:r>
+              <a:rPr lang="en-US" sz="3400" dirty="0">
+                <a:solidFill>
+                  <a:srgbClr val="FFFFFF"/>
+                </a:solidFill>
+                <a:latin typeface="Inter"/>
+              </a:rPr>
+              <a:t>, mas </a:t>
+            </a:r>
+            <a:r>
+              <a:rPr lang="en-US" sz="3400" dirty="0" err="1">
+                <a:solidFill>
+                  <a:srgbClr val="FFFFFF"/>
+                </a:solidFill>
+                <a:latin typeface="Inter"/>
+              </a:rPr>
+              <a:t>falta</a:t>
+            </a:r>
+            <a:r>
+              <a:rPr lang="en-US" sz="3400" dirty="0">
+                <a:solidFill>
+                  <a:srgbClr val="FFFFFF"/>
+                </a:solidFill>
+                <a:latin typeface="Inter"/>
+              </a:rPr>
+              <a:t> a </a:t>
+            </a:r>
+            <a:r>
+              <a:rPr lang="en-US" sz="3400" dirty="0" err="1">
+                <a:solidFill>
+                  <a:srgbClr val="FFFFFF"/>
+                </a:solidFill>
+                <a:latin typeface="Inter"/>
+              </a:rPr>
+              <a:t>camada</a:t>
+            </a:r>
+            <a:r>
+              <a:rPr lang="en-US" sz="3400" dirty="0">
+                <a:solidFill>
+                  <a:srgbClr val="FFFFFF"/>
+                </a:solidFill>
+                <a:latin typeface="Inter"/>
+              </a:rPr>
+              <a:t> de </a:t>
+            </a:r>
+            <a:r>
+              <a:rPr lang="en-US" sz="3400" dirty="0" err="1">
+                <a:solidFill>
+                  <a:srgbClr val="FFFFFF"/>
+                </a:solidFill>
+                <a:latin typeface="Inter"/>
+              </a:rPr>
+              <a:t>segurança</a:t>
+            </a:r>
+            <a:r>
+              <a:rPr lang="en-US" sz="3400" dirty="0">
+                <a:solidFill>
+                  <a:srgbClr val="FFFFFF"/>
+                </a:solidFill>
+                <a:latin typeface="Inter"/>
+              </a:rPr>
+              <a:t>...</a:t>
+            </a:r>
+          </a:p>
+          <a:p>
+            <a:endParaRPr lang="en-US" sz="3400" b="1" dirty="0">
+              <a:solidFill>
+                <a:srgbClr val="FFFFFF"/>
+              </a:solidFill>
+              <a:latin typeface="Inter"/>
+            </a:endParaRPr>
+          </a:p>
+          <a:p>
+            <a:r>
+              <a:rPr lang="en-US" sz="3400" b="1" dirty="0">
+                <a:solidFill>
+                  <a:srgbClr val="FFFFFF"/>
+                </a:solidFill>
+                <a:latin typeface="Inter"/>
+              </a:rPr>
+              <a:t>Falta a </a:t>
+            </a:r>
+            <a:r>
+              <a:rPr lang="en-US" sz="3400" b="1" dirty="0" err="1">
+                <a:solidFill>
+                  <a:srgbClr val="FFFFFF"/>
+                </a:solidFill>
+                <a:latin typeface="Inter"/>
+              </a:rPr>
+              <a:t>EvidenceGate</a:t>
+            </a:r>
+            <a:r>
+              <a:rPr lang="en-US" sz="3400" b="1" dirty="0">
+                <a:solidFill>
+                  <a:srgbClr val="FFFFFF"/>
+                </a:solidFill>
+                <a:latin typeface="Inter"/>
+              </a:rPr>
+              <a:t>.</a:t>
+            </a:r>
+            <a:endParaRPr lang="en-US"/>
           </a:p>
         </p:txBody>
       </p:sp>
